--- a/docs/교재/통합반_오프라인/09회차/통합반_오프라인_09회차.pptx
+++ b/docs/교재/통합반_오프라인/09회차/통합반_오프라인_09회차.pptx
@@ -1233,7 +1233,7 @@
           <a:lstStyle/>
           <a:p>
             <a:r>
-              <a:t>마지막 실습에서는 고친 정의를 다시 실행합니다. 사전 검사를 다시 거쳐 새 판본으로 등록하고 배포합니다. 쿨러 경보로 처리 건을 열어 승인한 경우에는 정상으로 끝나는지를, 거절한 경우에는 설비 명령 없이 거절 종결에 닿아 닫히는지를 확인합니다. 끝으로 완성한 BPMN 파일과 처리 건의 결과를 보존합니다.</a:t>
+              <a:t>마지막 실습에서는 고친 정의를 다시 실행합니다. 사전 검사를 다시 거쳐 새 판본으로 등록하고 배포합니다. 쿨러 성능 저하 경보로 처리 건을 열어 승인한 경우에는 정상으로 끝나는지를, 거절한 경우에는 설비 명령 없이 거절 종결에 닿아 닫히는지를 확인합니다. 끝으로 완성한 BPMN 파일과 처리 건의 결과를 보존합니다.</a:t>
             </a:r>
           </a:p>
         </p:txBody>
@@ -2073,7 +2073,7 @@
           <a:lstStyle/>
           <a:p>
             <a:r>
-              <a:t>작업의 결과가 다음으로 전해지는 방법이 프로세스 변수입니다. 인스턴스는 이름 붙은 값들을 지니고 다니며, 작업이 낸 출력이 여기에 저장됩니다. 게이트웨이에서 갈림의 조건이 읽는 approval과 recovered가 이 변수입니다. 운전원 승인이 approval을 내고, 재관측이 recovered를 냅니다. 처리 건은 변수마다 그것을 만든 단계를 함께 적어 두므로 값이 어디서 나왔는지를 되짚을 수 있습니다.</a:t>
+              <a:t>작업의 결과가 다음으로 전해지는 방법이 프로세스 변수입니다. 인스턴스는 이름 붙은 값들을 지니고 다니며, 작업이 낸 출력이 여기에 저장됩니다. 8회차에 본 갈림의 조건이 읽던 approval과 recovered가 이 변수입니다. 운전원 승인이 approval을 내고, 재관측이 recovered를 냅니다. 처리 건은 변수마다 그것을 만든 단계를 함께 적어 두므로 값이 어디서 나왔는지를 되짚을 수 있습니다.</a:t>
             </a:r>
           </a:p>
         </p:txBody>
@@ -26114,7 +26114,7 @@
       </p:sp>
       <p:pic>
         <p:nvPicPr>
-          <p:cNvPr id="6" name="삽화:흐름_토큰_승인대기.svg" descr="illust_7352956830814899045_1791735769.png"/>
+          <p:cNvPr id="6" name="삽화:흐름_토큰_승인대기.svg" descr="illust_5300755939343762224_1791735769.png"/>
           <p:cNvPicPr>
             <a:picLocks noChangeAspect="1"/>
           </p:cNvPicPr>
@@ -27510,7 +27510,7 @@
       </p:sp>
       <p:pic>
         <p:nvPicPr>
-          <p:cNvPr id="6" name="삽화:흐름_토큰_둘.svg" descr="illust_719453835173558398_1791735769.png"/>
+          <p:cNvPr id="6" name="삽화:흐름_토큰_둘.svg" descr="illust_2197785171086237363_1791735769.png"/>
           <p:cNvPicPr>
             <a:picLocks noChangeAspect="1"/>
           </p:cNvPicPr>

--- a/docs/교재/통합반_오프라인/09회차/통합반_오프라인_09회차.pptx
+++ b/docs/교재/통합반_오프라인/09회차/통합반_오프라인_09회차.pptx
@@ -1023,7 +1023,7 @@
           <a:lstStyle/>
           <a:p>
             <a:r>
-              <a:t>첫 실습에서는 8회차에 배포한 프로세스를 실제로 실행합니다. 쿨러 열화를 일으켜 처리 건이 열리는 것을 보고, 에이전트의 판단 뒤 운전원 승인에서 기다리는 상태를 확인합니다. 승인한 뒤에는 명령과 유온 재확인을 거쳐 어느 끝 이벤트에 닿았는지를 읽습니다. 단계마다의 담당과 상태를 적어 두고, 승인을 기다리는 상태와 끝난 상태를 처리 건의 기록으로 구분해 보시기 바랍니다.</a:t>
+              <a:t>첫 실습에서는 8회차에 배포한 프로세스를 실제로 실행합니다. 쿨러 열화를 일으켜 처리 건이 열리는 것을 보고, 에이전트의 판단 뒤 운전원 승인에서 기다리는 상태를 확인합니다. 승인한 뒤에는 명령과 재관측을 거쳐 어느 끝 이벤트에 닿았는지를 읽습니다. 단계마다의 담당과 상태를 적어 두고, 승인을 기다리는 상태와 끝난 상태를 처리 건의 기록으로 구분해 보시기 바랍니다.</a:t>
             </a:r>
           </a:p>
         </p:txBody>
@@ -7115,7 +7115,7 @@
                 <a:ea typeface="맑은 고딕"/>
                 <a:cs typeface="맑은 고딕"/>
               </a:rPr>
-              <a:t>cause는 에이전트 단계가, chosen_skill은 운전원 승인이, work_order는 작업지시 등록이 만들었다.</a:t>
+              <a:t>cause는 에이전트 단계가, 승인된 조치 방법 chosen_skill은 운전원 승인이, work_order는 작업지시 등록이 만들었다.</a:t>
             </a:r>
           </a:p>
         </p:txBody>
@@ -15429,7 +15429,7 @@
                 <a:ea typeface="맑은 고딕"/>
                 <a:cs typeface="맑은 고딕"/>
               </a:rPr>
-              <a:t>승인 뒤 명령, 유온 재확인을 거쳐 닿은 끝 이벤트와 결과를 읽는다</a:t>
+              <a:t>승인 뒤 명령, 재관측을 거쳐 닿은 끝 이벤트와 결과를 읽는다</a:t>
             </a:r>
           </a:p>
         </p:txBody>
@@ -26114,7 +26114,7 @@
       </p:sp>
       <p:pic>
         <p:nvPicPr>
-          <p:cNvPr id="6" name="삽화:흐름_토큰_승인대기.svg" descr="illust_5300755939343762224_1791735769.png"/>
+          <p:cNvPr id="6" name="삽화:흐름_토큰_승인대기.svg" descr="illust_8271297440817884204_1791735769.png"/>
           <p:cNvPicPr>
             <a:picLocks noChangeAspect="1"/>
           </p:cNvPicPr>
@@ -27510,7 +27510,7 @@
       </p:sp>
       <p:pic>
         <p:nvPicPr>
-          <p:cNvPr id="6" name="삽화:흐름_토큰_둘.svg" descr="illust_2197785171086237363_1791735769.png"/>
+          <p:cNvPr id="6" name="삽화:흐름_토큰_둘.svg" descr="illust_4988906698374443006_1791735769.png"/>
           <p:cNvPicPr>
             <a:picLocks noChangeAspect="1"/>
           </p:cNvPicPr>

--- a/docs/교재/통합반_오프라인/09회차/통합반_오프라인_09회차.pptx
+++ b/docs/교재/통합반_오프라인/09회차/통합반_오프라인_09회차.pptx
@@ -603,7 +603,7 @@
           <a:lstStyle/>
           <a:p>
             <a:r>
-              <a:t>프로세스를 실행하면 기록이 쌓입니다. 승인된 긴급 대응 처리 건의 단계별 시각입니다. 에이전트의 단계는 15시 22분 46초에 시작해 24분 8초에 끝났고, 곧바로 운전원 승인 단계가 열렸습니다. 이런 기록으로 업무가 어디까지 진행되었고 어디서 기다리고 있는지를 지켜보는 일을 모니터링이라고 합니다. 끝 시각에서 시작 시각을 빼면 그 단계에 걸린 시간이 나옵니다.</a:t>
+              <a:t>한 처리 건이 실제로 지나간 순서입니다. 지식 그래프와 SOP와 업무 DB를 읽는 일은 첫 행인 에이전트 단계 안에서 끝났습니다. 프로세스는 그 결과를 운전원 승인에 넘기고, 승인된 조치를 냉각 명령에, 명령의 완료를 재관측에 넘겼습니다. 에이전트가 무엇을 읽을지는 에이전트가 정하지만, 그 결과가 어떤 순서로 누구에게 가는지는 프로세스가 정합니다.</a:t>
             </a:r>
           </a:p>
         </p:txBody>
@@ -673,7 +673,7 @@
           <a:lstStyle/>
           <a:p>
             <a:r>
-              <a:t>프로세스가 실행되는 동안 일어난 일은 기록으로 남습니다. 누가 무엇을 결정했는지를 나중에 확인하려고 남기는 이런 기록을 감사 기록, Audit Log라고 합니다. 처리 건이 열릴 때, 승인이 접수되고 다음 단계로 전달될 때, 결과 보고가 나갈 때마다 한 줄씩 남습니다. 승인할 역할이 아닌 쪽이 승인을 시도해 거부된 일도 DECISION_DENIED로 남습니다.</a:t>
+              <a:t>프로세스를 실행하면 기록이 쌓입니다. 승인된 긴급 대응 처리 건의 단계별 시각입니다. 에이전트의 단계는 15시 22분 46초에 시작해 24분 8초에 끝났고, 곧바로 운전원 승인 단계가 열렸습니다. 이런 기록으로 업무가 어디까지 진행되었고 어디서 기다리고 있는지를 지켜보는 일을 모니터링이라고 합니다. 끝 시각에서 시작 시각을 빼면 그 단계에 걸린 시간이 나옵니다.</a:t>
             </a:r>
           </a:p>
         </p:txBody>
@@ -743,7 +743,7 @@
           <a:lstStyle/>
           <a:p>
             <a:r>
-              <a:t>긴급 대응 처리 건에 남은 식별자를 순서대로 놓았습니다. 작업지시 WO-1010-1198에서 거슬러 올라가면, 그것이 어느 설비 명령 뒤에 등록되었고, 그 명령을 누가 승인했으며, 승인된 제안이 어느 판단이었는지, 그 판단이 어느 경보에서 시작되었는지를 차례로 찾을 수 있습니다. 끝난 처리 건의 기록이 뜻하는 것은 이렇게 제안과 결정과 실행이 한 줄로 이어져 남는다는 것입니다.</a:t>
+              <a:t>프로세스가 실행되는 동안 일어난 일은 두 가지 기록으로 남습니다. 처리 기록은 처리 건 한 건 안에서 일어난 일을 차례로 적은 것으로, 승인이 접수되고 다음 단계로 전달될 때와 결과 보고가 나갈 때 한 줄씩 남습니다. 감사 기록, Audit Log는 누가 무엇을 결정했는지를 나중에 확인하려고 처리 건 밖의 일까지 적는 기록입니다. 처리 건이 열린 일과 정의가 배포된 일, 그리고 승인할 역할이 아닌 쪽이 승인을 시도해 거부된 일이 여기에 남습니다. 처리 건 하나를 되짚을 때는 두 기록을 함께 읽습니다.</a:t>
             </a:r>
           </a:p>
         </p:txBody>
@@ -813,7 +813,7 @@
           <a:lstStyle/>
           <a:p>
             <a:r>
-              <a:t>승인된 처리 건의 실제 기록입니다. 어느 정의의 몇 번째 판본으로 열렸는지가 먼저 적혀 있습니다. start_event_id는 이 처리 건을 연 경보의 식별자이고, end_event는 닿은 끝 이벤트입니다. 처리 건 하나만 보아도 무엇으로 시작해 어디서 끝났는지를 알 수 있습니다.</a:t>
+              <a:t>앞에서 기록을 읽은 긴급 대응 처리 건 한 건을 경보에서 끝까지 한 줄로 놓았습니다. 이 경보가 처리 건을 열었고, 에이전트의 진단과 제안, 운전원의 승인, 냉각 명령, 재관측, 작업지시 등록, 결과 보고를 거쳐 끝났습니다. 아래의 식별자는 자리마다 남은 기록의 이름입니다. 작업지시 WO-1010-1198에서 왼쪽으로 거슬러 가면, 그것이 어느 설비 명령 뒤에 등록되었고, 그 명령을 누가 승인했으며, 승인된 추천안이 어느 판단의 것이고 어느 경보에서 시작되었는지를 차례로 찾을 수 있습니다.</a:t>
             </a:r>
           </a:p>
         </p:txBody>
@@ -883,7 +883,7 @@
           <a:lstStyle/>
           <a:p>
             <a:r>
-              <a:t>처리 건 한 건에서 지식과 에이전트와 프로세스가 맡는 것을 나누어 보겠습니다. 지식 그래프는 판단의 재료를 담고, 에이전트는 그 재료로 판단합니다. 프로세스는 그 판단을 사람의 승인과 시스템의 실행으로 잇고, 진행과 결과를 기록으로 남깁니다. 셋이 각자의 몫을 맡아야 경보 한 건이 끝난 업무가 됩니다.</a:t>
+              <a:t>처리 건 한 건에서 지식과 에이전트와 프로세스가 맡는 것을 한 그림으로 나누어 보겠습니다. 지식은 에이전트에게 관계와 기준이라는 재료를 건넵니다. 에이전트는 그것을 읽어 만든 추천안 한 건을 프로세스에 넘깁니다. 프로세스는 그 추천안을 사람의 승인과 시스템의 실행으로 잇고, 누가 무엇을 결정하고 실행했는지를 기록으로 남깁니다. 영역 사이를 넘어가는 것은 두 가지뿐이어서, 한 영역을 고칠 때 다른 영역은 그대로 둘 수 있습니다.</a:t>
             </a:r>
           </a:p>
         </p:txBody>
@@ -1023,7 +1023,7 @@
           <a:lstStyle/>
           <a:p>
             <a:r>
-              <a:t>첫 실습에서는 8회차에 배포한 프로세스를 실제로 실행합니다. 쿨러 열화를 일으켜 처리 건이 열리는 것을 보고, 에이전트의 판단 뒤 운전원 승인에서 기다리는 상태를 확인합니다. 승인한 뒤에는 명령과 재관측을 거쳐 어느 끝 이벤트에 닿았는지를 읽습니다. 단계마다의 담당과 상태를 적어 두고, 승인을 기다리는 상태와 끝난 상태를 처리 건의 기록으로 구분해 보시기 바랍니다.</a:t>
+              <a:t>첫 실습에서는 8회차에 배포한 프로세스를 실제로 실행합니다. 쿨러 열화를 일으켜 처리 건이 열리는 것을 보고, 에이전트의 추천안이 나온 뒤 운전원 승인에서 기다리는 상태를 확인합니다. 승인한 뒤에는 명령과 재관측을 거쳐 어느 끝 이벤트에 닿았는지를 읽습니다. 단계마다의 담당과 상태를 적어 두고, 승인을 기다리는 상태와 끝난 상태를 처리 건의 기록으로 구분해 보시기 바랍니다.</a:t>
             </a:r>
           </a:p>
         </p:txBody>
@@ -1233,7 +1233,7 @@
           <a:lstStyle/>
           <a:p>
             <a:r>
-              <a:t>마지막 실습에서는 고친 정의를 다시 실행합니다. 사전 검사를 다시 거쳐 새 판본으로 등록하고 배포합니다. 쿨러 성능 저하 경보로 처리 건을 열어 승인한 경우에는 정상으로 끝나는지를, 거절한 경우에는 설비 명령 없이 거절 종결에 닿아 닫히는지를 확인합니다. 끝으로 완성한 BPMN 파일과 처리 건의 결과를 보존합니다.</a:t>
+              <a:t>마지막 실습에서는 고친 정의를 다시 실행합니다. 사전 검사를 다시 거쳐 새 판본으로 등록하고 배포합니다. 쿨러 성능 저하 경보로 처리 건을 열어 승인한 경우에는 정상으로 끝나는지를, 거절한 경우에는 설비 명령 없이 거절 종결에 닿아 닫히는지를 확인합니다. 수업을 마치기 전에 쿨러 성능 저하 경보를 받는 흐름을 처음부터 배포되어 있던 기준 흐름으로 되돌려, 다음 경보가 기준 흐름에서 열리게 합니다. 끝으로 완성한 BPMN 파일과 처리 건의 결과를 보존합니다.</a:t>
             </a:r>
           </a:p>
         </p:txBody>
@@ -1863,7 +1863,7 @@
           <a:lstStyle/>
           <a:p>
             <a:r>
-              <a:t>운전원이 10분 동안 응답하지 않은 처리 건입니다. 승인 지연 타이머가 발생하면서 토큰이 하나 더 생겨 승인 지연 알림을 지났습니다. 처음의 토큰은 운전원 승인에 그대로 있습니다. 그래서 알림이 나간 뒤에도 처리 건은 닫히지 않고, 운전원은 여전히 승인하거나 거절할 수 있습니다.</a:t>
+              <a:t>운전원이 기한이 지나도록 응답하지 않은 처리 건입니다. 승인 지연 타이머가 발생하면서 토큰이 하나 더 생겨 승인 지연 알림을 지났습니다. 처음의 토큰은 운전원 승인에 그대로 있습니다. 그래서 알림이 나간 뒤에도 처리 건은 닫히지 않고, 운전원은 여전히 승인하거나 거절할 수 있습니다.</a:t>
             </a:r>
           </a:p>
         </p:txBody>
@@ -2003,7 +2003,7 @@
           <a:lstStyle/>
           <a:p>
             <a:r>
-              <a:t>같은 정의에서 나온 두 처리 건입니다. 왼쪽은 승인되어 설비 명령이 나갔고, 오른쪽은 거절되어 설비 명령이 없습니다. 그런데 두 건의 상태는 똑같이 COMPLETED입니다. COMPLETED는 실행이 끝났다는 뜻일 뿐이어서, 업무가 어떻게 끝났는지는 닿은 끝 이벤트와 결과 보고로 읽어야 합니다. 승인된 뒤 회복에 미달한 경우도 끝 이벤트는 같으므로 결과 보고가 정상인지 미달인지를 봅니다.</a:t>
+              <a:t>같은 정의에서 나온 두 처리 건입니다. 왼쪽은 승인되어 설비 명령이 나갔고, 오른쪽은 거절되어 설비 명령이 없으며 결과 보고의 값은 거절을 뜻하는 반려로 적혔습니다. 그런데 두 건의 상태는 똑같이 COMPLETED입니다. COMPLETED는 실행이 끝났다는 뜻일 뿐이어서, 업무가 어떻게 끝났는지는 닿은 끝 이벤트와 결과 보고로 읽어야 합니다. 승인된 뒤 회복에 미달한 경우도 끝 이벤트는 같으므로 결과 보고가 정상인지 미달인지를 봅니다.</a:t>
             </a:r>
           </a:p>
         </p:txBody>
@@ -2073,7 +2073,7 @@
           <a:lstStyle/>
           <a:p>
             <a:r>
-              <a:t>작업의 결과가 다음으로 전해지는 방법이 프로세스 변수입니다. 인스턴스는 이름 붙은 값들을 지니고 다니며, 작업이 낸 출력이 여기에 저장됩니다. 8회차에 본 갈림의 조건이 읽던 approval과 recovered가 이 변수입니다. 운전원 승인이 approval을 내고, 재관측이 recovered를 냅니다. 처리 건은 변수마다 그것을 만든 단계를 함께 적어 두므로 값이 어디서 나왔는지를 되짚을 수 있습니다.</a:t>
+              <a:t>승인된 처리 건의 실제 기록입니다. 어느 정의의 몇 번째 판본으로 열렸는지가 먼저 적혀 있습니다. start_event_id는 이 처리 건을 연 경보의 식별자이고, end_event는 닿은 끝 이벤트입니다. 처리 건 하나만 보아도 무엇으로 시작해 어디서 끝났는지를 알 수 있습니다.</a:t>
             </a:r>
           </a:p>
         </p:txBody>
@@ -2143,7 +2143,7 @@
           <a:lstStyle/>
           <a:p>
             <a:r>
-              <a:t>한 처리 건이 실제로 지나간 순서입니다. 지식 그래프와 SOP와 업무 DB를 읽는 일은 첫 행인 에이전트 단계 안에서 끝났습니다. 프로세스는 그 결과를 운전원 승인에 넘기고, 승인된 조치를 냉각 명령에, 명령의 완료를 재관측에 넘겼습니다. 에이전트가 무엇을 읽을지는 에이전트가 정하지만, 그 결과가 어떤 순서로 누구에게 가는지는 프로세스가 정합니다.</a:t>
+              <a:t>작업의 결과가 다음으로 전해지는 방법이 프로세스 변수입니다. 인스턴스는 이름 붙은 값들을 지니고 다니며, 작업이 낸 출력이 여기에 저장됩니다. 8회차에 본 갈림의 조건이 읽던 approval과 recovered가 이 변수입니다. 운전원 승인이 approval을 내고, 재관측이 recovered를 냅니다. 처리 건은 변수마다 그것을 만든 단계를 함께 적어 두므로 값이 어디서 나왔는지를 되짚을 수 있습니다.</a:t>
             </a:r>
           </a:p>
         </p:txBody>
@@ -6296,7 +6296,7 @@
                 <a:ea typeface="맑은 고딕"/>
                 <a:cs typeface="맑은 고딕"/>
               </a:rPr>
-              <a:t>• 결과 보고: 거절</a:t>
+              <a:t>• 결과 보고: 거절(기록의 값은 반려)</a:t>
             </a:r>
           </a:p>
           <a:p>
@@ -6541,7 +6541,7 @@
                 <a:ea typeface="맑은 고딕"/>
                 <a:cs typeface="맑은 고딕"/>
               </a:rPr>
-              <a:t>프로세스 변수: 인스턴스가 지니는 데이터</a:t>
+              <a:t>처리 건 한 건에 남는 기록</a:t>
             </a:r>
           </a:p>
         </p:txBody>
@@ -6580,7 +6580,7 @@
                 <a:ea typeface="맑은 고딕"/>
                 <a:cs typeface="맑은 고딕"/>
               </a:rPr>
-              <a:t>프로세스 변수는 인스턴스가 지니는 데이터로, 앞 작업의 출력이 뒤 작업의 입력과 갈림의 조건이 된다.</a:t>
+              <a:t>처리 건에는 어느 정의의 어느 판본으로, 어느 경보에서 열려, 어느 끝 이벤트에 닿았는지가 남는다.</a:t>
             </a:r>
           </a:p>
         </p:txBody>
@@ -6661,16 +6661,16 @@
         </p:nvSpPr>
         <p:spPr>
           <a:xfrm>
-            <a:off x="548640" y="1961388"/>
-            <a:ext cx="11094415" cy="1316736"/>
+            <a:off x="548640" y="2328291"/>
+            <a:ext cx="6766560" cy="3326129"/>
           </a:xfrm>
           <a:prstGeom prst="roundRect">
             <a:avLst>
-              <a:gd name="adj" fmla="val 6000"/>
+              <a:gd name="adj" fmla="val 3000"/>
             </a:avLst>
           </a:prstGeom>
           <a:solidFill>
-            <a:srgbClr val="E7F3FD"/>
+            <a:srgbClr val="13294B"/>
           </a:solidFill>
           <a:ln>
             <a:noFill/>
@@ -6692,16 +6692,16 @@
         </p:nvSpPr>
         <p:spPr>
           <a:xfrm>
-            <a:off x="640080" y="1933956"/>
-            <a:ext cx="3291839" cy="1371600"/>
-          </a:xfrm>
-          <a:prstGeom prst="rect">
-            <a:avLst/>
-          </a:prstGeom>
-          <a:noFill/>
-        </p:spPr>
-        <p:txBody>
-          <a:bodyPr wrap="square" anchor="ctr"/>
+            <a:off x="731520" y="2465451"/>
+            <a:ext cx="6400800" cy="3051810"/>
+          </a:xfrm>
+          <a:prstGeom prst="rect">
+            <a:avLst/>
+          </a:prstGeom>
+          <a:noFill/>
+        </p:spPr>
+        <p:txBody>
+          <a:bodyPr wrap="square" anchor="t"/>
           <a:lstStyle/>
           <a:p>
             <a:pPr algn="l">
@@ -6713,15 +6713,81 @@
               </a:spcAft>
             </a:pPr>
             <a:r>
-              <a:rPr sz="1800" b="1">
-                <a:solidFill>
-                  <a:srgbClr val="13294B"/>
-                </a:solidFill>
-                <a:latin typeface="맑은 고딕"/>
-                <a:ea typeface="맑은 고딕"/>
-                <a:cs typeface="맑은 고딕"/>
-              </a:rPr>
-              <a:t>프로세스 변수</a:t>
+              <a:rPr sz="1300" b="0">
+                <a:solidFill>
+                  <a:srgbClr val="E8EEF6"/>
+                </a:solidFill>
+                <a:latin typeface="Consolas"/>
+                <a:ea typeface="맑은 고딕"/>
+                <a:cs typeface="맑은 고딕"/>
+              </a:rPr>
+              <a:t>"proc_inst_name": "</a:t>
+            </a:r>
+            <a:r>
+              <a:rPr sz="1300" b="0">
+                <a:solidFill>
+                  <a:srgbClr val="E8EEF6"/>
+                </a:solidFill>
+                <a:latin typeface="맑은 고딕"/>
+                <a:ea typeface="맑은 고딕"/>
+                <a:cs typeface="맑은 고딕"/>
+              </a:rPr>
+              <a:t>냉각</a:t>
+            </a:r>
+            <a:r>
+              <a:rPr sz="1300" b="0">
+                <a:solidFill>
+                  <a:srgbClr val="E8EEF6"/>
+                </a:solidFill>
+                <a:latin typeface="Consolas"/>
+                <a:ea typeface="맑은 고딕"/>
+                <a:cs typeface="맑은 고딕"/>
+              </a:rPr>
+              <a:t> </a:t>
+            </a:r>
+            <a:r>
+              <a:rPr sz="1300" b="0">
+                <a:solidFill>
+                  <a:srgbClr val="E8EEF6"/>
+                </a:solidFill>
+                <a:latin typeface="맑은 고딕"/>
+                <a:ea typeface="맑은 고딕"/>
+                <a:cs typeface="맑은 고딕"/>
+              </a:rPr>
+              <a:t>긴급</a:t>
+            </a:r>
+            <a:r>
+              <a:rPr sz="1300" b="0">
+                <a:solidFill>
+                  <a:srgbClr val="E8EEF6"/>
+                </a:solidFill>
+                <a:latin typeface="Consolas"/>
+                <a:ea typeface="맑은 고딕"/>
+                <a:cs typeface="맑은 고딕"/>
+              </a:rPr>
+              <a:t> </a:t>
+            </a:r>
+            <a:r>
+              <a:rPr sz="1300" b="0">
+                <a:solidFill>
+                  <a:srgbClr val="E8EEF6"/>
+                </a:solidFill>
+                <a:latin typeface="맑은 고딕"/>
+                <a:ea typeface="맑은 고딕"/>
+                <a:cs typeface="맑은 고딕"/>
+              </a:rPr>
+              <a:t>대응</a:t>
+            </a:r>
+            <a:r>
+              <a:rPr sz="1300" b="0">
+                <a:solidFill>
+                  <a:srgbClr val="E8EEF6"/>
+                </a:solidFill>
+                <a:latin typeface="Consolas"/>
+                <a:ea typeface="맑은 고딕"/>
+                <a:cs typeface="맑은 고딕"/>
+              </a:rPr>
+              <a:t> HYD-01",</a:t>
             </a:r>
           </a:p>
           <a:p>
@@ -6734,130 +6800,17 @@
               </a:spcAft>
             </a:pPr>
             <a:r>
-              <a:rPr sz="1150" b="0">
-                <a:solidFill>
-                  <a:srgbClr val="556175"/>
-                </a:solidFill>
-                <a:latin typeface="맑은 고딕"/>
-                <a:ea typeface="맑은 고딕"/>
-                <a:cs typeface="맑은 고딕"/>
-              </a:rPr>
-              <a:t>Process Variable</a:t>
-            </a:r>
-          </a:p>
-        </p:txBody>
-      </p:sp>
-      <p:sp>
-        <p:nvSpPr>
-          <p:cNvPr id="8" name="TextBox 7"/>
-          <p:cNvSpPr txBox="1"/>
-          <p:nvPr/>
-        </p:nvSpPr>
-        <p:spPr>
-          <a:xfrm>
-            <a:off x="4023359" y="1933956"/>
-            <a:ext cx="7528255" cy="1371600"/>
-          </a:xfrm>
-          <a:prstGeom prst="rect">
-            <a:avLst/>
-          </a:prstGeom>
-          <a:noFill/>
-        </p:spPr>
-        <p:txBody>
-          <a:bodyPr wrap="square" anchor="ctr"/>
-          <a:lstStyle/>
-          <a:p>
-            <a:pPr algn="l">
-              <a:lnSpc>
-                <a:spcPct val="110000"/>
-              </a:lnSpc>
-              <a:spcAft>
-                <a:spcPts val="300"/>
-              </a:spcAft>
-            </a:pPr>
-            <a:r>
-              <a:rPr sz="1400" b="0">
-                <a:solidFill>
-                  <a:srgbClr val="1F2A3A"/>
-                </a:solidFill>
-                <a:latin typeface="맑은 고딕"/>
-                <a:ea typeface="맑은 고딕"/>
-                <a:cs typeface="맑은 고딕"/>
-              </a:rPr>
-              <a:t>인스턴스마다 따로 지니는 이름 붙은 값이다.</a:t>
-            </a:r>
-          </a:p>
-          <a:p>
-            <a:pPr algn="l">
-              <a:lnSpc>
-                <a:spcPct val="110000"/>
-              </a:lnSpc>
-              <a:spcAft>
-                <a:spcPts val="300"/>
-              </a:spcAft>
-            </a:pPr>
-            <a:r>
-              <a:rPr sz="1400" b="0">
-                <a:solidFill>
-                  <a:srgbClr val="1F2A3A"/>
-                </a:solidFill>
-                <a:latin typeface="맑은 고딕"/>
-                <a:ea typeface="맑은 고딕"/>
-                <a:cs typeface="맑은 고딕"/>
-              </a:rPr>
-              <a:t>작업이 낸 출력이 변수로 저장되고 뒤의 작업과 게이트웨이가 읽는다.</a:t>
-            </a:r>
-          </a:p>
-        </p:txBody>
-      </p:sp>
-      <p:sp>
-        <p:nvSpPr>
-          <p:cNvPr id="9" name="Rectangle 8"/>
-          <p:cNvSpPr/>
-          <p:nvPr/>
-        </p:nvSpPr>
-        <p:spPr>
-          <a:xfrm>
-            <a:off x="548640" y="3296412"/>
-            <a:ext cx="11094415" cy="13716"/>
-          </a:xfrm>
-          <a:prstGeom prst="rect">
-            <a:avLst/>
-          </a:prstGeom>
-          <a:solidFill>
-            <a:srgbClr val="D3D9E1"/>
-          </a:solidFill>
-          <a:ln>
-            <a:noFill/>
-          </a:ln>
-        </p:spPr>
-        <p:txBody>
-          <a:bodyPr rtlCol="0" anchor="ctr"/>
-          <a:lstStyle/>
-          <a:p>
-            <a:pPr algn="ctr"/>
-          </a:p>
-        </p:txBody>
-      </p:sp>
-      <p:sp>
-        <p:nvSpPr>
-          <p:cNvPr id="10" name="TextBox 9"/>
-          <p:cNvSpPr txBox="1"/>
-          <p:nvPr/>
-        </p:nvSpPr>
-        <p:spPr>
-          <a:xfrm>
-            <a:off x="640080" y="3305556"/>
-            <a:ext cx="3291839" cy="1371600"/>
-          </a:xfrm>
-          <a:prstGeom prst="rect">
-            <a:avLst/>
-          </a:prstGeom>
-          <a:noFill/>
-        </p:spPr>
-        <p:txBody>
-          <a:bodyPr wrap="square" anchor="ctr"/>
-          <a:lstStyle/>
+              <a:rPr sz="1300" b="0">
+                <a:solidFill>
+                  <a:srgbClr val="E8EEF6"/>
+                </a:solidFill>
+                <a:latin typeface="Consolas"/>
+                <a:ea typeface="맑은 고딕"/>
+                <a:cs typeface="맑은 고딕"/>
+              </a:rPr>
+              <a:t>"proc_def_id": "c3_cooling",</a:t>
+            </a:r>
+          </a:p>
           <a:p>
             <a:pPr algn="l">
               <a:lnSpc>
@@ -6868,15 +6821,15 @@
               </a:spcAft>
             </a:pPr>
             <a:r>
-              <a:rPr sz="1800" b="1">
-                <a:solidFill>
-                  <a:srgbClr val="13294B"/>
-                </a:solidFill>
-                <a:latin typeface="맑은 고딕"/>
-                <a:ea typeface="맑은 고딕"/>
-                <a:cs typeface="맑은 고딕"/>
-              </a:rPr>
-              <a:t>갈림의 조건으로</a:t>
+              <a:rPr sz="1300" b="0">
+                <a:solidFill>
+                  <a:srgbClr val="E8EEF6"/>
+                </a:solidFill>
+                <a:latin typeface="Consolas"/>
+                <a:ea typeface="맑은 고딕"/>
+                <a:cs typeface="맑은 고딕"/>
+              </a:rPr>
+              <a:t>"proc_def_version": "9",</a:t>
             </a:r>
           </a:p>
           <a:p>
@@ -6889,130 +6842,17 @@
               </a:spcAft>
             </a:pPr>
             <a:r>
-              <a:rPr sz="1150" b="0">
-                <a:solidFill>
-                  <a:srgbClr val="556175"/>
-                </a:solidFill>
-                <a:latin typeface="맑은 고딕"/>
-                <a:ea typeface="맑은 고딕"/>
-                <a:cs typeface="맑은 고딕"/>
-              </a:rPr>
-              <a:t>approval · recovered</a:t>
-            </a:r>
-          </a:p>
-        </p:txBody>
-      </p:sp>
-      <p:sp>
-        <p:nvSpPr>
-          <p:cNvPr id="11" name="TextBox 10"/>
-          <p:cNvSpPr txBox="1"/>
-          <p:nvPr/>
-        </p:nvSpPr>
-        <p:spPr>
-          <a:xfrm>
-            <a:off x="4023359" y="3305556"/>
-            <a:ext cx="7528255" cy="1371600"/>
-          </a:xfrm>
-          <a:prstGeom prst="rect">
-            <a:avLst/>
-          </a:prstGeom>
-          <a:noFill/>
-        </p:spPr>
-        <p:txBody>
-          <a:bodyPr wrap="square" anchor="ctr"/>
-          <a:lstStyle/>
-          <a:p>
-            <a:pPr algn="l">
-              <a:lnSpc>
-                <a:spcPct val="110000"/>
-              </a:lnSpc>
-              <a:spcAft>
-                <a:spcPts val="300"/>
-              </a:spcAft>
-            </a:pPr>
-            <a:r>
-              <a:rPr sz="1400" b="0">
-                <a:solidFill>
-                  <a:srgbClr val="1F2A3A"/>
-                </a:solidFill>
-                <a:latin typeface="맑은 고딕"/>
-                <a:ea typeface="맑은 고딕"/>
-                <a:cs typeface="맑은 고딕"/>
-              </a:rPr>
-              <a:t>게이트웨이 「승인?」은 운전원 승인이 낸 approval을 읽는다.</a:t>
-            </a:r>
-          </a:p>
-          <a:p>
-            <a:pPr algn="l">
-              <a:lnSpc>
-                <a:spcPct val="110000"/>
-              </a:lnSpc>
-              <a:spcAft>
-                <a:spcPts val="300"/>
-              </a:spcAft>
-            </a:pPr>
-            <a:r>
-              <a:rPr sz="1400" b="0">
-                <a:solidFill>
-                  <a:srgbClr val="1F2A3A"/>
-                </a:solidFill>
-                <a:latin typeface="맑은 고딕"/>
-                <a:ea typeface="맑은 고딕"/>
-                <a:cs typeface="맑은 고딕"/>
-              </a:rPr>
-              <a:t>게이트웨이 「유온 정상?」은 재관측이 낸 recovered를 읽는다.</a:t>
-            </a:r>
-          </a:p>
-        </p:txBody>
-      </p:sp>
-      <p:sp>
-        <p:nvSpPr>
-          <p:cNvPr id="12" name="Rectangle 11"/>
-          <p:cNvSpPr/>
-          <p:nvPr/>
-        </p:nvSpPr>
-        <p:spPr>
-          <a:xfrm>
-            <a:off x="548640" y="4668012"/>
-            <a:ext cx="11094415" cy="13716"/>
-          </a:xfrm>
-          <a:prstGeom prst="rect">
-            <a:avLst/>
-          </a:prstGeom>
-          <a:solidFill>
-            <a:srgbClr val="D3D9E1"/>
-          </a:solidFill>
-          <a:ln>
-            <a:noFill/>
-          </a:ln>
-        </p:spPr>
-        <p:txBody>
-          <a:bodyPr rtlCol="0" anchor="ctr"/>
-          <a:lstStyle/>
-          <a:p>
-            <a:pPr algn="ctr"/>
-          </a:p>
-        </p:txBody>
-      </p:sp>
-      <p:sp>
-        <p:nvSpPr>
-          <p:cNvPr id="13" name="TextBox 12"/>
-          <p:cNvSpPr txBox="1"/>
-          <p:nvPr/>
-        </p:nvSpPr>
-        <p:spPr>
-          <a:xfrm>
-            <a:off x="640080" y="4677156"/>
-            <a:ext cx="3291839" cy="1371600"/>
-          </a:xfrm>
-          <a:prstGeom prst="rect">
-            <a:avLst/>
-          </a:prstGeom>
-          <a:noFill/>
-        </p:spPr>
-        <p:txBody>
-          <a:bodyPr wrap="square" anchor="ctr"/>
-          <a:lstStyle/>
+              <a:rPr sz="1300" b="0">
+                <a:solidFill>
+                  <a:srgbClr val="E8EEF6"/>
+                </a:solidFill>
+                <a:latin typeface="Consolas"/>
+                <a:ea typeface="맑은 고딕"/>
+                <a:cs typeface="맑은 고딕"/>
+              </a:rPr>
+              <a:t>"start_event_id": "ALT-hyd01-0026-767a",</a:t>
+            </a:r>
+          </a:p>
           <a:p>
             <a:pPr algn="l">
               <a:lnSpc>
@@ -7023,15 +6863,15 @@
               </a:spcAft>
             </a:pPr>
             <a:r>
-              <a:rPr sz="1800" b="1">
-                <a:solidFill>
-                  <a:srgbClr val="13294B"/>
-                </a:solidFill>
-                <a:latin typeface="맑은 고딕"/>
-                <a:ea typeface="맑은 고딕"/>
-                <a:cs typeface="맑은 고딕"/>
-              </a:rPr>
-              <a:t>만든 곳의 기록</a:t>
+              <a:rPr sz="1300" b="0">
+                <a:solidFill>
+                  <a:srgbClr val="E8EEF6"/>
+                </a:solidFill>
+                <a:latin typeface="Consolas"/>
+                <a:ea typeface="맑은 고딕"/>
+                <a:cs typeface="맑은 고딕"/>
+              </a:rPr>
+              <a:t>"status": "COMPLETED",</a:t>
             </a:r>
           </a:p>
           <a:p>
@@ -7044,29 +6884,29 @@
               </a:spcAft>
             </a:pPr>
             <a:r>
-              <a:rPr sz="1150" b="0">
-                <a:solidFill>
-                  <a:srgbClr val="556175"/>
-                </a:solidFill>
-                <a:latin typeface="맑은 고딕"/>
-                <a:ea typeface="맑은 고딕"/>
-                <a:cs typeface="맑은 고딕"/>
-              </a:rPr>
-              <a:t>값의 출처</a:t>
-            </a:r>
-          </a:p>
-        </p:txBody>
-      </p:sp>
-      <p:sp>
-        <p:nvSpPr>
-          <p:cNvPr id="14" name="TextBox 13"/>
-          <p:cNvSpPr txBox="1"/>
-          <p:nvPr/>
-        </p:nvSpPr>
-        <p:spPr>
-          <a:xfrm>
-            <a:off x="4023359" y="4677156"/>
-            <a:ext cx="7528255" cy="1371600"/>
+              <a:rPr sz="1300" b="0">
+                <a:solidFill>
+                  <a:srgbClr val="E8EEF6"/>
+                </a:solidFill>
+                <a:latin typeface="Consolas"/>
+                <a:ea typeface="맑은 고딕"/>
+                <a:cs typeface="맑은 고딕"/>
+              </a:rPr>
+              <a:t>"end_event": "E_end"</a:t>
+            </a:r>
+          </a:p>
+        </p:txBody>
+      </p:sp>
+      <p:sp>
+        <p:nvSpPr>
+          <p:cNvPr id="8" name="TextBox 7"/>
+          <p:cNvSpPr txBox="1"/>
+          <p:nvPr/>
+        </p:nvSpPr>
+        <p:spPr>
+          <a:xfrm>
+            <a:off x="7635240" y="2328291"/>
+            <a:ext cx="4007815" cy="1108710"/>
           </a:xfrm>
           <a:prstGeom prst="rect">
             <a:avLst/>
@@ -7082,10 +6922,31 @@
                 <a:spcPct val="110000"/>
               </a:lnSpc>
               <a:spcAft>
-                <a:spcPts val="300"/>
+                <a:spcPts val="400"/>
               </a:spcAft>
             </a:pPr>
             <a:r>
+              <a:rPr sz="1700" b="1">
+                <a:solidFill>
+                  <a:srgbClr val="13294B"/>
+                </a:solidFill>
+                <a:latin typeface="맑은 고딕"/>
+                <a:ea typeface="맑은 고딕"/>
+                <a:cs typeface="맑은 고딕"/>
+              </a:rPr>
+              <a:t>정의와 판본</a:t>
+            </a:r>
+          </a:p>
+          <a:p>
+            <a:pPr algn="l">
+              <a:lnSpc>
+                <a:spcPct val="110000"/>
+              </a:lnSpc>
+              <a:spcAft>
+                <a:spcPts val="400"/>
+              </a:spcAft>
+            </a:pPr>
+            <a:r>
               <a:rPr sz="1400" b="0">
                 <a:solidFill>
                   <a:srgbClr val="1F2A3A"/>
@@ -7094,7 +6955,7 @@
                 <a:ea typeface="맑은 고딕"/>
                 <a:cs typeface="맑은 고딕"/>
               </a:rPr>
-              <a:t>처리 건은 변수마다 그것을 만든 단계를 함께 적어 둔다.</a:t>
+              <a:t>c3_cooling 정의의</a:t>
             </a:r>
           </a:p>
           <a:p>
@@ -7103,7 +6964,7 @@
                 <a:spcPct val="110000"/>
               </a:lnSpc>
               <a:spcAft>
-                <a:spcPts val="300"/>
+                <a:spcPts val="400"/>
               </a:spcAft>
             </a:pPr>
             <a:r>
@@ -7115,7 +6976,175 @@
                 <a:ea typeface="맑은 고딕"/>
                 <a:cs typeface="맑은 고딕"/>
               </a:rPr>
-              <a:t>cause는 에이전트 단계가, 승인된 조치 방법 chosen_skill은 운전원 승인이, work_order는 작업지시 등록이 만들었다.</a:t>
+              <a:t>판본 9로 열렸다.</a:t>
+            </a:r>
+          </a:p>
+        </p:txBody>
+      </p:sp>
+      <p:sp>
+        <p:nvSpPr>
+          <p:cNvPr id="9" name="TextBox 8"/>
+          <p:cNvSpPr txBox="1"/>
+          <p:nvPr/>
+        </p:nvSpPr>
+        <p:spPr>
+          <a:xfrm>
+            <a:off x="7635240" y="3437001"/>
+            <a:ext cx="4007815" cy="1108710"/>
+          </a:xfrm>
+          <a:prstGeom prst="rect">
+            <a:avLst/>
+          </a:prstGeom>
+          <a:noFill/>
+        </p:spPr>
+        <p:txBody>
+          <a:bodyPr wrap="square" anchor="ctr"/>
+          <a:lstStyle/>
+          <a:p>
+            <a:pPr algn="l">
+              <a:lnSpc>
+                <a:spcPct val="110000"/>
+              </a:lnSpc>
+              <a:spcAft>
+                <a:spcPts val="400"/>
+              </a:spcAft>
+            </a:pPr>
+            <a:r>
+              <a:rPr sz="1700" b="1">
+                <a:solidFill>
+                  <a:srgbClr val="13294B"/>
+                </a:solidFill>
+                <a:latin typeface="맑은 고딕"/>
+                <a:ea typeface="맑은 고딕"/>
+                <a:cs typeface="맑은 고딕"/>
+              </a:rPr>
+              <a:t>여는 사건</a:t>
+            </a:r>
+          </a:p>
+          <a:p>
+            <a:pPr algn="l">
+              <a:lnSpc>
+                <a:spcPct val="110000"/>
+              </a:lnSpc>
+              <a:spcAft>
+                <a:spcPts val="400"/>
+              </a:spcAft>
+            </a:pPr>
+            <a:r>
+              <a:rPr sz="1400" b="0">
+                <a:solidFill>
+                  <a:srgbClr val="1F2A3A"/>
+                </a:solidFill>
+                <a:latin typeface="맑은 고딕"/>
+                <a:ea typeface="맑은 고딕"/>
+                <a:cs typeface="맑은 고딕"/>
+              </a:rPr>
+              <a:t>경보 ALT-hyd01-0026-767a가</a:t>
+            </a:r>
+          </a:p>
+          <a:p>
+            <a:pPr algn="l">
+              <a:lnSpc>
+                <a:spcPct val="110000"/>
+              </a:lnSpc>
+              <a:spcAft>
+                <a:spcPts val="400"/>
+              </a:spcAft>
+            </a:pPr>
+            <a:r>
+              <a:rPr sz="1400" b="0">
+                <a:solidFill>
+                  <a:srgbClr val="1F2A3A"/>
+                </a:solidFill>
+                <a:latin typeface="맑은 고딕"/>
+                <a:ea typeface="맑은 고딕"/>
+                <a:cs typeface="맑은 고딕"/>
+              </a:rPr>
+              <a:t>이 처리 건을 열었다.</a:t>
+            </a:r>
+          </a:p>
+        </p:txBody>
+      </p:sp>
+      <p:sp>
+        <p:nvSpPr>
+          <p:cNvPr id="10" name="TextBox 9"/>
+          <p:cNvSpPr txBox="1"/>
+          <p:nvPr/>
+        </p:nvSpPr>
+        <p:spPr>
+          <a:xfrm>
+            <a:off x="7635240" y="4545711"/>
+            <a:ext cx="4007815" cy="1108710"/>
+          </a:xfrm>
+          <a:prstGeom prst="rect">
+            <a:avLst/>
+          </a:prstGeom>
+          <a:noFill/>
+        </p:spPr>
+        <p:txBody>
+          <a:bodyPr wrap="square" anchor="ctr"/>
+          <a:lstStyle/>
+          <a:p>
+            <a:pPr algn="l">
+              <a:lnSpc>
+                <a:spcPct val="110000"/>
+              </a:lnSpc>
+              <a:spcAft>
+                <a:spcPts val="400"/>
+              </a:spcAft>
+            </a:pPr>
+            <a:r>
+              <a:rPr sz="1700" b="1">
+                <a:solidFill>
+                  <a:srgbClr val="13294B"/>
+                </a:solidFill>
+                <a:latin typeface="맑은 고딕"/>
+                <a:ea typeface="맑은 고딕"/>
+                <a:cs typeface="맑은 고딕"/>
+              </a:rPr>
+              <a:t>닫힌 곳</a:t>
+            </a:r>
+          </a:p>
+          <a:p>
+            <a:pPr algn="l">
+              <a:lnSpc>
+                <a:spcPct val="110000"/>
+              </a:lnSpc>
+              <a:spcAft>
+                <a:spcPts val="400"/>
+              </a:spcAft>
+            </a:pPr>
+            <a:r>
+              <a:rPr sz="1400" b="0">
+                <a:solidFill>
+                  <a:srgbClr val="1F2A3A"/>
+                </a:solidFill>
+                <a:latin typeface="맑은 고딕"/>
+                <a:ea typeface="맑은 고딕"/>
+                <a:cs typeface="맑은 고딕"/>
+              </a:rPr>
+              <a:t>끝 이벤트 E_end에 닿아</a:t>
+            </a:r>
+          </a:p>
+          <a:p>
+            <a:pPr algn="l">
+              <a:lnSpc>
+                <a:spcPct val="110000"/>
+              </a:lnSpc>
+              <a:spcAft>
+                <a:spcPts val="400"/>
+              </a:spcAft>
+            </a:pPr>
+            <a:r>
+              <a:rPr sz="1400" b="0">
+                <a:solidFill>
+                  <a:srgbClr val="1F2A3A"/>
+                </a:solidFill>
+                <a:latin typeface="맑은 고딕"/>
+                <a:ea typeface="맑은 고딕"/>
+                <a:cs typeface="맑은 고딕"/>
+              </a:rPr>
+              <a:t>실행이 끝났다.</a:t>
             </a:r>
           </a:p>
         </p:txBody>
@@ -7180,7 +7209,7 @@
                 <a:ea typeface="맑은 고딕"/>
                 <a:cs typeface="맑은 고딕"/>
               </a:rPr>
-              <a:t>프로세스가 에이전트의 결과를 잇는 순서</a:t>
+              <a:t>프로세스 변수: 인스턴스가 지니는 데이터</a:t>
             </a:r>
           </a:p>
         </p:txBody>
@@ -7219,7 +7248,7 @@
                 <a:ea typeface="맑은 고딕"/>
                 <a:cs typeface="맑은 고딕"/>
               </a:rPr>
-              <a:t>지식과 값을 읽는 일은 에이전트 단계 안에서 끝나고, 프로세스는 그 결과를 승인, 명령, 재관측으로 잇는다.</a:t>
+              <a:t>프로세스 변수는 인스턴스가 지니는 데이터로, 앞 작업의 출력이 뒤 작업의 입력과 갈림의 조건이 된다.</a:t>
             </a:r>
           </a:p>
         </p:txBody>
@@ -7300,326 +7329,12 @@
         </p:nvSpPr>
         <p:spPr>
           <a:xfrm>
-            <a:off x="548640" y="1627632"/>
-            <a:ext cx="11094415" cy="347472"/>
+            <a:off x="548640" y="1961388"/>
+            <a:ext cx="11094415" cy="1316736"/>
           </a:xfrm>
           <a:prstGeom prst="roundRect">
             <a:avLst>
-              <a:gd name="adj" fmla="val 12000"/>
-            </a:avLst>
-          </a:prstGeom>
-          <a:solidFill>
-            <a:srgbClr val="13294B"/>
-          </a:solidFill>
-          <a:ln>
-            <a:noFill/>
-          </a:ln>
-        </p:spPr>
-        <p:txBody>
-          <a:bodyPr rtlCol="0" anchor="ctr"/>
-          <a:lstStyle/>
-          <a:p>
-            <a:pPr algn="ctr"/>
-          </a:p>
-        </p:txBody>
-      </p:sp>
-      <p:sp>
-        <p:nvSpPr>
-          <p:cNvPr id="7" name="TextBox 6"/>
-          <p:cNvSpPr txBox="1"/>
-          <p:nvPr/>
-        </p:nvSpPr>
-        <p:spPr>
-          <a:xfrm>
-            <a:off x="685800" y="1627632"/>
-            <a:ext cx="2514600" cy="347472"/>
-          </a:xfrm>
-          <a:prstGeom prst="rect">
-            <a:avLst/>
-          </a:prstGeom>
-          <a:noFill/>
-        </p:spPr>
-        <p:txBody>
-          <a:bodyPr wrap="square" anchor="ctr"/>
-          <a:lstStyle/>
-          <a:p>
-            <a:pPr algn="l">
-              <a:lnSpc>
-                <a:spcPct val="110000"/>
-              </a:lnSpc>
-            </a:pPr>
-            <a:r>
-              <a:rPr sz="1300" b="1">
-                <a:solidFill>
-                  <a:srgbClr val="FFFFFF"/>
-                </a:solidFill>
-                <a:latin typeface="맑은 고딕"/>
-                <a:ea typeface="맑은 고딕"/>
-                <a:cs typeface="맑은 고딕"/>
-              </a:rPr>
-              <a:t>작업</a:t>
-            </a:r>
-          </a:p>
-        </p:txBody>
-      </p:sp>
-      <p:sp>
-        <p:nvSpPr>
-          <p:cNvPr id="8" name="TextBox 7"/>
-          <p:cNvSpPr txBox="1"/>
-          <p:nvPr/>
-        </p:nvSpPr>
-        <p:spPr>
-          <a:xfrm>
-            <a:off x="3200400" y="1627632"/>
-            <a:ext cx="6248095" cy="347472"/>
-          </a:xfrm>
-          <a:prstGeom prst="rect">
-            <a:avLst/>
-          </a:prstGeom>
-          <a:noFill/>
-        </p:spPr>
-        <p:txBody>
-          <a:bodyPr wrap="square" anchor="ctr"/>
-          <a:lstStyle/>
-          <a:p>
-            <a:pPr algn="l">
-              <a:lnSpc>
-                <a:spcPct val="110000"/>
-              </a:lnSpc>
-            </a:pPr>
-            <a:r>
-              <a:rPr sz="1300" b="1">
-                <a:solidFill>
-                  <a:srgbClr val="FFFFFF"/>
-                </a:solidFill>
-                <a:latin typeface="맑은 고딕"/>
-                <a:ea typeface="맑은 고딕"/>
-                <a:cs typeface="맑은 고딕"/>
-              </a:rPr>
-              <a:t>받은 것</a:t>
-            </a:r>
-          </a:p>
-        </p:txBody>
-      </p:sp>
-      <p:sp>
-        <p:nvSpPr>
-          <p:cNvPr id="9" name="TextBox 8"/>
-          <p:cNvSpPr txBox="1"/>
-          <p:nvPr/>
-        </p:nvSpPr>
-        <p:spPr>
-          <a:xfrm>
-            <a:off x="9448495" y="1627632"/>
-            <a:ext cx="2194560" cy="347472"/>
-          </a:xfrm>
-          <a:prstGeom prst="rect">
-            <a:avLst/>
-          </a:prstGeom>
-          <a:noFill/>
-        </p:spPr>
-        <p:txBody>
-          <a:bodyPr wrap="square" anchor="ctr"/>
-          <a:lstStyle/>
-          <a:p>
-            <a:pPr algn="l">
-              <a:lnSpc>
-                <a:spcPct val="110000"/>
-              </a:lnSpc>
-            </a:pPr>
-            <a:r>
-              <a:rPr sz="1300" b="1">
-                <a:solidFill>
-                  <a:srgbClr val="FFFFFF"/>
-                </a:solidFill>
-                <a:latin typeface="맑은 고딕"/>
-                <a:ea typeface="맑은 고딕"/>
-                <a:cs typeface="맑은 고딕"/>
-              </a:rPr>
-              <a:t>낸 것</a:t>
-            </a:r>
-          </a:p>
-        </p:txBody>
-      </p:sp>
-      <p:sp>
-        <p:nvSpPr>
-          <p:cNvPr id="10" name="Rounded Rectangle 9"/>
-          <p:cNvSpPr/>
-          <p:nvPr/>
-        </p:nvSpPr>
-        <p:spPr>
-          <a:xfrm>
-            <a:off x="548640" y="2061972"/>
-            <a:ext cx="11094415" cy="656843"/>
-          </a:xfrm>
-          <a:prstGeom prst="roundRect">
-            <a:avLst>
-              <a:gd name="adj" fmla="val 8000"/>
-            </a:avLst>
-          </a:prstGeom>
-          <a:solidFill>
-            <a:srgbClr val="F3F6F9"/>
-          </a:solidFill>
-          <a:ln>
-            <a:noFill/>
-          </a:ln>
-        </p:spPr>
-        <p:txBody>
-          <a:bodyPr rtlCol="0" anchor="ctr"/>
-          <a:lstStyle/>
-          <a:p>
-            <a:pPr algn="ctr"/>
-          </a:p>
-        </p:txBody>
-      </p:sp>
-      <p:sp>
-        <p:nvSpPr>
-          <p:cNvPr id="11" name="TextBox 10"/>
-          <p:cNvSpPr txBox="1"/>
-          <p:nvPr/>
-        </p:nvSpPr>
-        <p:spPr>
-          <a:xfrm>
-            <a:off x="685800" y="2029968"/>
-            <a:ext cx="2514600" cy="720851"/>
-          </a:xfrm>
-          <a:prstGeom prst="rect">
-            <a:avLst/>
-          </a:prstGeom>
-          <a:noFill/>
-        </p:spPr>
-        <p:txBody>
-          <a:bodyPr wrap="square" anchor="ctr"/>
-          <a:lstStyle/>
-          <a:p>
-            <a:pPr algn="l">
-              <a:lnSpc>
-                <a:spcPct val="110000"/>
-              </a:lnSpc>
-            </a:pPr>
-            <a:r>
-              <a:rPr sz="1600" b="1">
-                <a:solidFill>
-                  <a:srgbClr val="13294B"/>
-                </a:solidFill>
-                <a:latin typeface="맑은 고딕"/>
-                <a:ea typeface="맑은 고딕"/>
-                <a:cs typeface="맑은 고딕"/>
-              </a:rPr>
-              <a:t>원인 진단 · 냉각 조치 제안</a:t>
-            </a:r>
-          </a:p>
-        </p:txBody>
-      </p:sp>
-      <p:sp>
-        <p:nvSpPr>
-          <p:cNvPr id="12" name="TextBox 11"/>
-          <p:cNvSpPr txBox="1"/>
-          <p:nvPr/>
-        </p:nvSpPr>
-        <p:spPr>
-          <a:xfrm>
-            <a:off x="3200400" y="2029968"/>
-            <a:ext cx="6156655" cy="720851"/>
-          </a:xfrm>
-          <a:prstGeom prst="rect">
-            <a:avLst/>
-          </a:prstGeom>
-          <a:noFill/>
-        </p:spPr>
-        <p:txBody>
-          <a:bodyPr wrap="square" anchor="ctr"/>
-          <a:lstStyle/>
-          <a:p>
-            <a:pPr algn="l">
-              <a:lnSpc>
-                <a:spcPct val="110000"/>
-              </a:lnSpc>
-            </a:pPr>
-            <a:r>
-              <a:rPr sz="1400" b="0">
-                <a:solidFill>
-                  <a:srgbClr val="1F2A3A"/>
-                </a:solidFill>
-                <a:latin typeface="맑은 고딕"/>
-                <a:ea typeface="맑은 고딕"/>
-                <a:cs typeface="맑은 고딕"/>
-              </a:rPr>
-              <a:t>경보 ALT-hyd01-0026-767a</a:t>
-            </a:r>
-          </a:p>
-        </p:txBody>
-      </p:sp>
-      <p:sp>
-        <p:nvSpPr>
-          <p:cNvPr id="13" name="TextBox 12"/>
-          <p:cNvSpPr txBox="1"/>
-          <p:nvPr/>
-        </p:nvSpPr>
-        <p:spPr>
-          <a:xfrm>
-            <a:off x="9448495" y="2029968"/>
-            <a:ext cx="2103120" cy="720851"/>
-          </a:xfrm>
-          <a:prstGeom prst="rect">
-            <a:avLst/>
-          </a:prstGeom>
-          <a:noFill/>
-        </p:spPr>
-        <p:txBody>
-          <a:bodyPr wrap="square" anchor="ctr"/>
-          <a:lstStyle/>
-          <a:p>
-            <a:pPr algn="l">
-              <a:lnSpc>
-                <a:spcPct val="110000"/>
-              </a:lnSpc>
-            </a:pPr>
-            <a:r>
-              <a:rPr sz="1250" b="1">
-                <a:solidFill>
-                  <a:srgbClr val="556175"/>
-                </a:solidFill>
-                <a:latin typeface="맑은 고딕"/>
-                <a:ea typeface="맑은 고딕"/>
-                <a:cs typeface="맑은 고딕"/>
-              </a:rPr>
-              <a:t>원인 쿨러 핀 오염</a:t>
-            </a:r>
-          </a:p>
-          <a:p>
-            <a:pPr algn="l">
-              <a:lnSpc>
-                <a:spcPct val="110000"/>
-              </a:lnSpc>
-            </a:pPr>
-            <a:r>
-              <a:rPr sz="1250" b="1">
-                <a:solidFill>
-                  <a:srgbClr val="556175"/>
-                </a:solidFill>
-                <a:latin typeface="맑은 고딕"/>
-                <a:ea typeface="맑은 고딕"/>
-                <a:cs typeface="맑은 고딕"/>
-              </a:rPr>
-              <a:t>추천 SOP-COOL-11</a:t>
-            </a:r>
-          </a:p>
-        </p:txBody>
-      </p:sp>
-      <p:sp>
-        <p:nvSpPr>
-          <p:cNvPr id="14" name="Rounded Rectangle 13"/>
-          <p:cNvSpPr/>
-          <p:nvPr/>
-        </p:nvSpPr>
-        <p:spPr>
-          <a:xfrm>
-            <a:off x="548640" y="2782824"/>
-            <a:ext cx="11094415" cy="656843"/>
-          </a:xfrm>
-          <a:prstGeom prst="roundRect">
-            <a:avLst>
-              <a:gd name="adj" fmla="val 8000"/>
+              <a:gd name="adj" fmla="val 6000"/>
             </a:avLst>
           </a:prstGeom>
           <a:solidFill>
@@ -7639,14 +7354,14 @@
       </p:sp>
       <p:sp>
         <p:nvSpPr>
-          <p:cNvPr id="15" name="TextBox 14"/>
-          <p:cNvSpPr txBox="1"/>
-          <p:nvPr/>
-        </p:nvSpPr>
-        <p:spPr>
-          <a:xfrm>
-            <a:off x="685800" y="2750820"/>
-            <a:ext cx="2514600" cy="720851"/>
+          <p:cNvPr id="7" name="TextBox 6"/>
+          <p:cNvSpPr txBox="1"/>
+          <p:nvPr/>
+        </p:nvSpPr>
+        <p:spPr>
+          <a:xfrm>
+            <a:off x="640080" y="1933956"/>
+            <a:ext cx="3291839" cy="1371600"/>
           </a:xfrm>
           <a:prstGeom prst="rect">
             <a:avLst/>
@@ -7661,9 +7376,12 @@
               <a:lnSpc>
                 <a:spcPct val="110000"/>
               </a:lnSpc>
-            </a:pPr>
-            <a:r>
-              <a:rPr sz="1600" b="1">
+              <a:spcAft>
+                <a:spcPts val="200"/>
+              </a:spcAft>
+            </a:pPr>
+            <a:r>
+              <a:rPr sz="1800" b="1">
                 <a:solidFill>
                   <a:srgbClr val="13294B"/>
                 </a:solidFill>
@@ -7671,21 +7389,42 @@
                 <a:ea typeface="맑은 고딕"/>
                 <a:cs typeface="맑은 고딕"/>
               </a:rPr>
-              <a:t>운전원 승인</a:t>
-            </a:r>
-          </a:p>
-        </p:txBody>
-      </p:sp>
-      <p:sp>
-        <p:nvSpPr>
-          <p:cNvPr id="16" name="TextBox 15"/>
-          <p:cNvSpPr txBox="1"/>
-          <p:nvPr/>
-        </p:nvSpPr>
-        <p:spPr>
-          <a:xfrm>
-            <a:off x="3200400" y="2750820"/>
-            <a:ext cx="6156655" cy="720851"/>
+              <a:t>프로세스 변수</a:t>
+            </a:r>
+          </a:p>
+          <a:p>
+            <a:pPr algn="l">
+              <a:lnSpc>
+                <a:spcPct val="110000"/>
+              </a:lnSpc>
+              <a:spcAft>
+                <a:spcPts val="200"/>
+              </a:spcAft>
+            </a:pPr>
+            <a:r>
+              <a:rPr sz="1150" b="0">
+                <a:solidFill>
+                  <a:srgbClr val="556175"/>
+                </a:solidFill>
+                <a:latin typeface="맑은 고딕"/>
+                <a:ea typeface="맑은 고딕"/>
+                <a:cs typeface="맑은 고딕"/>
+              </a:rPr>
+              <a:t>Process Variable</a:t>
+            </a:r>
+          </a:p>
+        </p:txBody>
+      </p:sp>
+      <p:sp>
+        <p:nvSpPr>
+          <p:cNvPr id="8" name="TextBox 7"/>
+          <p:cNvSpPr txBox="1"/>
+          <p:nvPr/>
+        </p:nvSpPr>
+        <p:spPr>
+          <a:xfrm>
+            <a:off x="4023359" y="1933956"/>
+            <a:ext cx="7528255" cy="1371600"/>
           </a:xfrm>
           <a:prstGeom prst="rect">
             <a:avLst/>
@@ -7700,6 +7439,9 @@
               <a:lnSpc>
                 <a:spcPct val="110000"/>
               </a:lnSpc>
+              <a:spcAft>
+                <a:spcPts val="300"/>
+              </a:spcAft>
             </a:pPr>
             <a:r>
               <a:rPr sz="1400" b="0">
@@ -7710,86 +7452,48 @@
                 <a:ea typeface="맑은 고딕"/>
                 <a:cs typeface="맑은 고딕"/>
               </a:rPr>
-              <a:t>추천 조치와 대안</a:t>
-            </a:r>
-          </a:p>
-        </p:txBody>
-      </p:sp>
-      <p:sp>
-        <p:nvSpPr>
-          <p:cNvPr id="17" name="TextBox 16"/>
-          <p:cNvSpPr txBox="1"/>
-          <p:nvPr/>
-        </p:nvSpPr>
-        <p:spPr>
-          <a:xfrm>
-            <a:off x="9448495" y="2750820"/>
-            <a:ext cx="2103120" cy="720851"/>
-          </a:xfrm>
-          <a:prstGeom prst="rect">
-            <a:avLst/>
-          </a:prstGeom>
-          <a:noFill/>
-        </p:spPr>
-        <p:txBody>
-          <a:bodyPr wrap="square" anchor="ctr"/>
-          <a:lstStyle/>
-          <a:p>
-            <a:pPr algn="l">
-              <a:lnSpc>
-                <a:spcPct val="110000"/>
-              </a:lnSpc>
-            </a:pPr>
-            <a:r>
-              <a:rPr sz="1250" b="1">
-                <a:solidFill>
-                  <a:srgbClr val="1A6FC4"/>
-                </a:solidFill>
-                <a:latin typeface="맑은 고딕"/>
-                <a:ea typeface="맑은 고딕"/>
-                <a:cs typeface="맑은 고딕"/>
-              </a:rPr>
-              <a:t>승인</a:t>
-            </a:r>
-          </a:p>
-          <a:p>
-            <a:pPr algn="l">
-              <a:lnSpc>
-                <a:spcPct val="110000"/>
-              </a:lnSpc>
-            </a:pPr>
-            <a:r>
-              <a:rPr sz="1250" b="1">
-                <a:solidFill>
-                  <a:srgbClr val="1A6FC4"/>
-                </a:solidFill>
-                <a:latin typeface="맑은 고딕"/>
-                <a:ea typeface="맑은 고딕"/>
-                <a:cs typeface="맑은 고딕"/>
-              </a:rPr>
-              <a:t>팬 속도 100 %</a:t>
-            </a:r>
-          </a:p>
-        </p:txBody>
-      </p:sp>
-      <p:sp>
-        <p:nvSpPr>
-          <p:cNvPr id="18" name="Rounded Rectangle 17"/>
+              <a:t>인스턴스마다 따로 지니는 이름 붙은 값이다.</a:t>
+            </a:r>
+          </a:p>
+          <a:p>
+            <a:pPr algn="l">
+              <a:lnSpc>
+                <a:spcPct val="110000"/>
+              </a:lnSpc>
+              <a:spcAft>
+                <a:spcPts val="300"/>
+              </a:spcAft>
+            </a:pPr>
+            <a:r>
+              <a:rPr sz="1400" b="0">
+                <a:solidFill>
+                  <a:srgbClr val="1F2A3A"/>
+                </a:solidFill>
+                <a:latin typeface="맑은 고딕"/>
+                <a:ea typeface="맑은 고딕"/>
+                <a:cs typeface="맑은 고딕"/>
+              </a:rPr>
+              <a:t>작업이 낸 출력이 변수로 저장되고 뒤의 작업과 게이트웨이가 읽는다.</a:t>
+            </a:r>
+          </a:p>
+        </p:txBody>
+      </p:sp>
+      <p:sp>
+        <p:nvSpPr>
+          <p:cNvPr id="9" name="Rectangle 8"/>
           <p:cNvSpPr/>
           <p:nvPr/>
         </p:nvSpPr>
         <p:spPr>
           <a:xfrm>
-            <a:off x="548640" y="3503676"/>
-            <a:ext cx="11094415" cy="656843"/>
-          </a:xfrm>
-          <a:prstGeom prst="roundRect">
-            <a:avLst>
-              <a:gd name="adj" fmla="val 8000"/>
-            </a:avLst>
+            <a:off x="548640" y="3296412"/>
+            <a:ext cx="11094415" cy="13716"/>
+          </a:xfrm>
+          <a:prstGeom prst="rect">
+            <a:avLst/>
           </a:prstGeom>
           <a:solidFill>
-            <a:srgbClr val="F3F6F9"/>
+            <a:srgbClr val="D3D9E1"/>
           </a:solidFill>
           <a:ln>
             <a:noFill/>
@@ -7805,14 +7509,14 @@
       </p:sp>
       <p:sp>
         <p:nvSpPr>
-          <p:cNvPr id="19" name="TextBox 18"/>
-          <p:cNvSpPr txBox="1"/>
-          <p:nvPr/>
-        </p:nvSpPr>
-        <p:spPr>
-          <a:xfrm>
-            <a:off x="685800" y="3471672"/>
-            <a:ext cx="2514600" cy="720851"/>
+          <p:cNvPr id="10" name="TextBox 9"/>
+          <p:cNvSpPr txBox="1"/>
+          <p:nvPr/>
+        </p:nvSpPr>
+        <p:spPr>
+          <a:xfrm>
+            <a:off x="640080" y="3305556"/>
+            <a:ext cx="3291839" cy="1371600"/>
           </a:xfrm>
           <a:prstGeom prst="rect">
             <a:avLst/>
@@ -7827,9 +7531,12 @@
               <a:lnSpc>
                 <a:spcPct val="110000"/>
               </a:lnSpc>
-            </a:pPr>
-            <a:r>
-              <a:rPr sz="1600" b="1">
+              <a:spcAft>
+                <a:spcPts val="200"/>
+              </a:spcAft>
+            </a:pPr>
+            <a:r>
+              <a:rPr sz="1800" b="1">
                 <a:solidFill>
                   <a:srgbClr val="13294B"/>
                 </a:solidFill>
@@ -7837,21 +7544,42 @@
                 <a:ea typeface="맑은 고딕"/>
                 <a:cs typeface="맑은 고딕"/>
               </a:rPr>
-              <a:t>냉각 명령</a:t>
-            </a:r>
-          </a:p>
-        </p:txBody>
-      </p:sp>
-      <p:sp>
-        <p:nvSpPr>
-          <p:cNvPr id="20" name="TextBox 19"/>
-          <p:cNvSpPr txBox="1"/>
-          <p:nvPr/>
-        </p:nvSpPr>
-        <p:spPr>
-          <a:xfrm>
-            <a:off x="3200400" y="3471672"/>
-            <a:ext cx="6156655" cy="720851"/>
+              <a:t>갈림의 조건으로</a:t>
+            </a:r>
+          </a:p>
+          <a:p>
+            <a:pPr algn="l">
+              <a:lnSpc>
+                <a:spcPct val="110000"/>
+              </a:lnSpc>
+              <a:spcAft>
+                <a:spcPts val="200"/>
+              </a:spcAft>
+            </a:pPr>
+            <a:r>
+              <a:rPr sz="1150" b="0">
+                <a:solidFill>
+                  <a:srgbClr val="556175"/>
+                </a:solidFill>
+                <a:latin typeface="맑은 고딕"/>
+                <a:ea typeface="맑은 고딕"/>
+                <a:cs typeface="맑은 고딕"/>
+              </a:rPr>
+              <a:t>approval · recovered</a:t>
+            </a:r>
+          </a:p>
+        </p:txBody>
+      </p:sp>
+      <p:sp>
+        <p:nvSpPr>
+          <p:cNvPr id="11" name="TextBox 10"/>
+          <p:cNvSpPr txBox="1"/>
+          <p:nvPr/>
+        </p:nvSpPr>
+        <p:spPr>
+          <a:xfrm>
+            <a:off x="4023359" y="3305556"/>
+            <a:ext cx="7528255" cy="1371600"/>
           </a:xfrm>
           <a:prstGeom prst="rect">
             <a:avLst/>
@@ -7866,6 +7594,9 @@
               <a:lnSpc>
                 <a:spcPct val="110000"/>
               </a:lnSpc>
+              <a:spcAft>
+                <a:spcPts val="300"/>
+              </a:spcAft>
             </a:pPr>
             <a:r>
               <a:rPr sz="1400" b="0">
@@ -7876,86 +7607,48 @@
                 <a:ea typeface="맑은 고딕"/>
                 <a:cs typeface="맑은 고딕"/>
               </a:rPr>
-              <a:t>승인된 조치</a:t>
-            </a:r>
-          </a:p>
-        </p:txBody>
-      </p:sp>
-      <p:sp>
-        <p:nvSpPr>
-          <p:cNvPr id="21" name="TextBox 20"/>
-          <p:cNvSpPr txBox="1"/>
-          <p:nvPr/>
-        </p:nvSpPr>
-        <p:spPr>
-          <a:xfrm>
-            <a:off x="9448495" y="3471672"/>
-            <a:ext cx="2103120" cy="720851"/>
-          </a:xfrm>
-          <a:prstGeom prst="rect">
-            <a:avLst/>
-          </a:prstGeom>
-          <a:noFill/>
-        </p:spPr>
-        <p:txBody>
-          <a:bodyPr wrap="square" anchor="ctr"/>
-          <a:lstStyle/>
-          <a:p>
-            <a:pPr algn="l">
-              <a:lnSpc>
-                <a:spcPct val="110000"/>
-              </a:lnSpc>
-            </a:pPr>
-            <a:r>
-              <a:rPr sz="1250" b="1">
-                <a:solidFill>
-                  <a:srgbClr val="556175"/>
-                </a:solidFill>
-                <a:latin typeface="맑은 고딕"/>
-                <a:ea typeface="맑은 고딕"/>
-                <a:cs typeface="맑은 고딕"/>
-              </a:rPr>
-              <a:t>CMD-1010-0001-01d1</a:t>
-            </a:r>
-          </a:p>
-          <a:p>
-            <a:pPr algn="l">
-              <a:lnSpc>
-                <a:spcPct val="110000"/>
-              </a:lnSpc>
-            </a:pPr>
-            <a:r>
-              <a:rPr sz="1250" b="1">
-                <a:solidFill>
-                  <a:srgbClr val="556175"/>
-                </a:solidFill>
-                <a:latin typeface="맑은 고딕"/>
-                <a:ea typeface="맑은 고딕"/>
-                <a:cs typeface="맑은 고딕"/>
-              </a:rPr>
-              <a:t>인터록 PASS</a:t>
-            </a:r>
-          </a:p>
-        </p:txBody>
-      </p:sp>
-      <p:sp>
-        <p:nvSpPr>
-          <p:cNvPr id="22" name="Rounded Rectangle 21"/>
+              <a:t>게이트웨이 「승인?」은 운전원 승인이 낸 approval을 읽는다.</a:t>
+            </a:r>
+          </a:p>
+          <a:p>
+            <a:pPr algn="l">
+              <a:lnSpc>
+                <a:spcPct val="110000"/>
+              </a:lnSpc>
+              <a:spcAft>
+                <a:spcPts val="300"/>
+              </a:spcAft>
+            </a:pPr>
+            <a:r>
+              <a:rPr sz="1400" b="0">
+                <a:solidFill>
+                  <a:srgbClr val="1F2A3A"/>
+                </a:solidFill>
+                <a:latin typeface="맑은 고딕"/>
+                <a:ea typeface="맑은 고딕"/>
+                <a:cs typeface="맑은 고딕"/>
+              </a:rPr>
+              <a:t>게이트웨이 「유온 정상?」은 재관측이 낸 recovered를 읽는다.</a:t>
+            </a:r>
+          </a:p>
+        </p:txBody>
+      </p:sp>
+      <p:sp>
+        <p:nvSpPr>
+          <p:cNvPr id="12" name="Rectangle 11"/>
           <p:cNvSpPr/>
           <p:nvPr/>
         </p:nvSpPr>
         <p:spPr>
           <a:xfrm>
-            <a:off x="548640" y="4224528"/>
-            <a:ext cx="11094415" cy="656843"/>
-          </a:xfrm>
-          <a:prstGeom prst="roundRect">
-            <a:avLst>
-              <a:gd name="adj" fmla="val 8000"/>
-            </a:avLst>
+            <a:off x="548640" y="4668012"/>
+            <a:ext cx="11094415" cy="13716"/>
+          </a:xfrm>
+          <a:prstGeom prst="rect">
+            <a:avLst/>
           </a:prstGeom>
           <a:solidFill>
-            <a:srgbClr val="F3F6F9"/>
+            <a:srgbClr val="D3D9E1"/>
           </a:solidFill>
           <a:ln>
             <a:noFill/>
@@ -7971,14 +7664,14 @@
       </p:sp>
       <p:sp>
         <p:nvSpPr>
-          <p:cNvPr id="23" name="TextBox 22"/>
-          <p:cNvSpPr txBox="1"/>
-          <p:nvPr/>
-        </p:nvSpPr>
-        <p:spPr>
-          <a:xfrm>
-            <a:off x="685800" y="4192524"/>
-            <a:ext cx="2514600" cy="720851"/>
+          <p:cNvPr id="13" name="TextBox 12"/>
+          <p:cNvSpPr txBox="1"/>
+          <p:nvPr/>
+        </p:nvSpPr>
+        <p:spPr>
+          <a:xfrm>
+            <a:off x="640080" y="4677156"/>
+            <a:ext cx="3291839" cy="1371600"/>
           </a:xfrm>
           <a:prstGeom prst="rect">
             <a:avLst/>
@@ -7993,9 +7686,12 @@
               <a:lnSpc>
                 <a:spcPct val="110000"/>
               </a:lnSpc>
-            </a:pPr>
-            <a:r>
-              <a:rPr sz="1600" b="1">
+              <a:spcAft>
+                <a:spcPts val="200"/>
+              </a:spcAft>
+            </a:pPr>
+            <a:r>
+              <a:rPr sz="1800" b="1">
                 <a:solidFill>
                   <a:srgbClr val="13294B"/>
                 </a:solidFill>
@@ -8003,21 +7699,42 @@
                 <a:ea typeface="맑은 고딕"/>
                 <a:cs typeface="맑은 고딕"/>
               </a:rPr>
-              <a:t>재관측</a:t>
-            </a:r>
-          </a:p>
-        </p:txBody>
-      </p:sp>
-      <p:sp>
-        <p:nvSpPr>
-          <p:cNvPr id="24" name="TextBox 23"/>
-          <p:cNvSpPr txBox="1"/>
-          <p:nvPr/>
-        </p:nvSpPr>
-        <p:spPr>
-          <a:xfrm>
-            <a:off x="3200400" y="4192524"/>
-            <a:ext cx="6156655" cy="720851"/>
+              <a:t>만든 곳의 기록</a:t>
+            </a:r>
+          </a:p>
+          <a:p>
+            <a:pPr algn="l">
+              <a:lnSpc>
+                <a:spcPct val="110000"/>
+              </a:lnSpc>
+              <a:spcAft>
+                <a:spcPts val="200"/>
+              </a:spcAft>
+            </a:pPr>
+            <a:r>
+              <a:rPr sz="1150" b="0">
+                <a:solidFill>
+                  <a:srgbClr val="556175"/>
+                </a:solidFill>
+                <a:latin typeface="맑은 고딕"/>
+                <a:ea typeface="맑은 고딕"/>
+                <a:cs typeface="맑은 고딕"/>
+              </a:rPr>
+              <a:t>값의 출처</a:t>
+            </a:r>
+          </a:p>
+        </p:txBody>
+      </p:sp>
+      <p:sp>
+        <p:nvSpPr>
+          <p:cNvPr id="14" name="TextBox 13"/>
+          <p:cNvSpPr txBox="1"/>
+          <p:nvPr/>
+        </p:nvSpPr>
+        <p:spPr>
+          <a:xfrm>
+            <a:off x="4023359" y="4677156"/>
+            <a:ext cx="7528255" cy="1371600"/>
           </a:xfrm>
           <a:prstGeom prst="rect">
             <a:avLst/>
@@ -8032,6 +7749,9 @@
               <a:lnSpc>
                 <a:spcPct val="110000"/>
               </a:lnSpc>
+              <a:spcAft>
+                <a:spcPts val="300"/>
+              </a:spcAft>
             </a:pPr>
             <a:r>
               <a:rPr sz="1400" b="0">
@@ -8042,162 +7762,17 @@
                 <a:ea typeface="맑은 고딕"/>
                 <a:cs typeface="맑은 고딕"/>
               </a:rPr>
-              <a:t>명령의 완료</a:t>
-            </a:r>
-          </a:p>
-        </p:txBody>
-      </p:sp>
-      <p:sp>
-        <p:nvSpPr>
-          <p:cNvPr id="25" name="TextBox 24"/>
-          <p:cNvSpPr txBox="1"/>
-          <p:nvPr/>
-        </p:nvSpPr>
-        <p:spPr>
-          <a:xfrm>
-            <a:off x="9448495" y="4192524"/>
-            <a:ext cx="2103120" cy="720851"/>
-          </a:xfrm>
-          <a:prstGeom prst="rect">
-            <a:avLst/>
-          </a:prstGeom>
-          <a:noFill/>
-        </p:spPr>
-        <p:txBody>
-          <a:bodyPr wrap="square" anchor="ctr"/>
-          <a:lstStyle/>
-          <a:p>
-            <a:pPr algn="l">
-              <a:lnSpc>
-                <a:spcPct val="110000"/>
-              </a:lnSpc>
-            </a:pPr>
-            <a:r>
-              <a:rPr sz="1250" b="1">
-                <a:solidFill>
-                  <a:srgbClr val="556175"/>
-                </a:solidFill>
-                <a:latin typeface="맑은 고딕"/>
-                <a:ea typeface="맑은 고딕"/>
-                <a:cs typeface="맑은 고딕"/>
-              </a:rPr>
-              <a:t>유온 51.3 ℃</a:t>
-            </a:r>
-          </a:p>
-          <a:p>
-            <a:pPr algn="l">
-              <a:lnSpc>
-                <a:spcPct val="110000"/>
-              </a:lnSpc>
-            </a:pPr>
-            <a:r>
-              <a:rPr sz="1250" b="1">
-                <a:solidFill>
-                  <a:srgbClr val="556175"/>
-                </a:solidFill>
-                <a:latin typeface="맑은 고딕"/>
-                <a:ea typeface="맑은 고딕"/>
-                <a:cs typeface="맑은 고딕"/>
-              </a:rPr>
-              <a:t>기준 55 ℃ 미만</a:t>
-            </a:r>
-          </a:p>
-        </p:txBody>
-      </p:sp>
-      <p:sp>
-        <p:nvSpPr>
-          <p:cNvPr id="26" name="Rounded Rectangle 25"/>
-          <p:cNvSpPr/>
-          <p:nvPr/>
-        </p:nvSpPr>
-        <p:spPr>
-          <a:xfrm>
-            <a:off x="548640" y="4945380"/>
-            <a:ext cx="11094415" cy="656843"/>
-          </a:xfrm>
-          <a:prstGeom prst="roundRect">
-            <a:avLst>
-              <a:gd name="adj" fmla="val 8000"/>
-            </a:avLst>
-          </a:prstGeom>
-          <a:solidFill>
-            <a:srgbClr val="F3F6F9"/>
-          </a:solidFill>
-          <a:ln>
-            <a:noFill/>
-          </a:ln>
-        </p:spPr>
-        <p:txBody>
-          <a:bodyPr rtlCol="0" anchor="ctr"/>
-          <a:lstStyle/>
-          <a:p>
-            <a:pPr algn="ctr"/>
-          </a:p>
-        </p:txBody>
-      </p:sp>
-      <p:sp>
-        <p:nvSpPr>
-          <p:cNvPr id="27" name="TextBox 26"/>
-          <p:cNvSpPr txBox="1"/>
-          <p:nvPr/>
-        </p:nvSpPr>
-        <p:spPr>
-          <a:xfrm>
-            <a:off x="685800" y="4913376"/>
-            <a:ext cx="2514600" cy="720851"/>
-          </a:xfrm>
-          <a:prstGeom prst="rect">
-            <a:avLst/>
-          </a:prstGeom>
-          <a:noFill/>
-        </p:spPr>
-        <p:txBody>
-          <a:bodyPr wrap="square" anchor="ctr"/>
-          <a:lstStyle/>
-          <a:p>
-            <a:pPr algn="l">
-              <a:lnSpc>
-                <a:spcPct val="110000"/>
-              </a:lnSpc>
-            </a:pPr>
-            <a:r>
-              <a:rPr sz="1600" b="1">
-                <a:solidFill>
-                  <a:srgbClr val="13294B"/>
-                </a:solidFill>
-                <a:latin typeface="맑은 고딕"/>
-                <a:ea typeface="맑은 고딕"/>
-                <a:cs typeface="맑은 고딕"/>
-              </a:rPr>
-              <a:t>작업지시 등록</a:t>
-            </a:r>
-          </a:p>
-        </p:txBody>
-      </p:sp>
-      <p:sp>
-        <p:nvSpPr>
-          <p:cNvPr id="28" name="TextBox 27"/>
-          <p:cNvSpPr txBox="1"/>
-          <p:nvPr/>
-        </p:nvSpPr>
-        <p:spPr>
-          <a:xfrm>
-            <a:off x="3200400" y="4913376"/>
-            <a:ext cx="6156655" cy="720851"/>
-          </a:xfrm>
-          <a:prstGeom prst="rect">
-            <a:avLst/>
-          </a:prstGeom>
-          <a:noFill/>
-        </p:spPr>
-        <p:txBody>
-          <a:bodyPr wrap="square" anchor="ctr"/>
-          <a:lstStyle/>
-          <a:p>
-            <a:pPr algn="l">
-              <a:lnSpc>
-                <a:spcPct val="110000"/>
-              </a:lnSpc>
+              <a:t>처리 건은 변수마다 그것을 만든 단계를 함께 적어 둔다.</a:t>
+            </a:r>
+          </a:p>
+          <a:p>
+            <a:pPr algn="l">
+              <a:lnSpc>
+                <a:spcPct val="110000"/>
+              </a:lnSpc>
+              <a:spcAft>
+                <a:spcPts val="300"/>
+              </a:spcAft>
             </a:pPr>
             <a:r>
               <a:rPr sz="1400" b="0">
@@ -8208,194 +7783,7 @@
                 <a:ea typeface="맑은 고딕"/>
                 <a:cs typeface="맑은 고딕"/>
               </a:rPr>
-              <a:t>회복 판정</a:t>
-            </a:r>
-          </a:p>
-        </p:txBody>
-      </p:sp>
-      <p:sp>
-        <p:nvSpPr>
-          <p:cNvPr id="29" name="TextBox 28"/>
-          <p:cNvSpPr txBox="1"/>
-          <p:nvPr/>
-        </p:nvSpPr>
-        <p:spPr>
-          <a:xfrm>
-            <a:off x="9448495" y="4913376"/>
-            <a:ext cx="2103120" cy="720851"/>
-          </a:xfrm>
-          <a:prstGeom prst="rect">
-            <a:avLst/>
-          </a:prstGeom>
-          <a:noFill/>
-        </p:spPr>
-        <p:txBody>
-          <a:bodyPr wrap="square" anchor="ctr"/>
-          <a:lstStyle/>
-          <a:p>
-            <a:pPr algn="l">
-              <a:lnSpc>
-                <a:spcPct val="110000"/>
-              </a:lnSpc>
-            </a:pPr>
-            <a:r>
-              <a:rPr sz="1250" b="1">
-                <a:solidFill>
-                  <a:srgbClr val="556175"/>
-                </a:solidFill>
-                <a:latin typeface="맑은 고딕"/>
-                <a:ea typeface="맑은 고딕"/>
-                <a:cs typeface="맑은 고딕"/>
-              </a:rPr>
-              <a:t>WO-1010-1198</a:t>
-            </a:r>
-          </a:p>
-        </p:txBody>
-      </p:sp>
-      <p:sp>
-        <p:nvSpPr>
-          <p:cNvPr id="30" name="Rounded Rectangle 29"/>
-          <p:cNvSpPr/>
-          <p:nvPr/>
-        </p:nvSpPr>
-        <p:spPr>
-          <a:xfrm>
-            <a:off x="548640" y="5666232"/>
-            <a:ext cx="11094415" cy="656843"/>
-          </a:xfrm>
-          <a:prstGeom prst="roundRect">
-            <a:avLst>
-              <a:gd name="adj" fmla="val 8000"/>
-            </a:avLst>
-          </a:prstGeom>
-          <a:solidFill>
-            <a:srgbClr val="F3F6F9"/>
-          </a:solidFill>
-          <a:ln>
-            <a:noFill/>
-          </a:ln>
-        </p:spPr>
-        <p:txBody>
-          <a:bodyPr rtlCol="0" anchor="ctr"/>
-          <a:lstStyle/>
-          <a:p>
-            <a:pPr algn="ctr"/>
-          </a:p>
-        </p:txBody>
-      </p:sp>
-      <p:sp>
-        <p:nvSpPr>
-          <p:cNvPr id="31" name="TextBox 30"/>
-          <p:cNvSpPr txBox="1"/>
-          <p:nvPr/>
-        </p:nvSpPr>
-        <p:spPr>
-          <a:xfrm>
-            <a:off x="685800" y="5634228"/>
-            <a:ext cx="2514600" cy="720851"/>
-          </a:xfrm>
-          <a:prstGeom prst="rect">
-            <a:avLst/>
-          </a:prstGeom>
-          <a:noFill/>
-        </p:spPr>
-        <p:txBody>
-          <a:bodyPr wrap="square" anchor="ctr"/>
-          <a:lstStyle/>
-          <a:p>
-            <a:pPr algn="l">
-              <a:lnSpc>
-                <a:spcPct val="110000"/>
-              </a:lnSpc>
-            </a:pPr>
-            <a:r>
-              <a:rPr sz="1600" b="1">
-                <a:solidFill>
-                  <a:srgbClr val="13294B"/>
-                </a:solidFill>
-                <a:latin typeface="맑은 고딕"/>
-                <a:ea typeface="맑은 고딕"/>
-                <a:cs typeface="맑은 고딕"/>
-              </a:rPr>
-              <a:t>결과 보고: 정상</a:t>
-            </a:r>
-          </a:p>
-        </p:txBody>
-      </p:sp>
-      <p:sp>
-        <p:nvSpPr>
-          <p:cNvPr id="32" name="TextBox 31"/>
-          <p:cNvSpPr txBox="1"/>
-          <p:nvPr/>
-        </p:nvSpPr>
-        <p:spPr>
-          <a:xfrm>
-            <a:off x="3200400" y="5634228"/>
-            <a:ext cx="6156655" cy="720851"/>
-          </a:xfrm>
-          <a:prstGeom prst="rect">
-            <a:avLst/>
-          </a:prstGeom>
-          <a:noFill/>
-        </p:spPr>
-        <p:txBody>
-          <a:bodyPr wrap="square" anchor="ctr"/>
-          <a:lstStyle/>
-          <a:p>
-            <a:pPr algn="l">
-              <a:lnSpc>
-                <a:spcPct val="110000"/>
-              </a:lnSpc>
-            </a:pPr>
-            <a:r>
-              <a:rPr sz="1400" b="0">
-                <a:solidFill>
-                  <a:srgbClr val="1F2A3A"/>
-                </a:solidFill>
-                <a:latin typeface="맑은 고딕"/>
-                <a:ea typeface="맑은 고딕"/>
-                <a:cs typeface="맑은 고딕"/>
-              </a:rPr>
-              <a:t>위의 결과 전부</a:t>
-            </a:r>
-          </a:p>
-        </p:txBody>
-      </p:sp>
-      <p:sp>
-        <p:nvSpPr>
-          <p:cNvPr id="33" name="TextBox 32"/>
-          <p:cNvSpPr txBox="1"/>
-          <p:nvPr/>
-        </p:nvSpPr>
-        <p:spPr>
-          <a:xfrm>
-            <a:off x="9448495" y="5634228"/>
-            <a:ext cx="2103120" cy="720851"/>
-          </a:xfrm>
-          <a:prstGeom prst="rect">
-            <a:avLst/>
-          </a:prstGeom>
-          <a:noFill/>
-        </p:spPr>
-        <p:txBody>
-          <a:bodyPr wrap="square" anchor="ctr"/>
-          <a:lstStyle/>
-          <a:p>
-            <a:pPr algn="l">
-              <a:lnSpc>
-                <a:spcPct val="110000"/>
-              </a:lnSpc>
-            </a:pPr>
-            <a:r>
-              <a:rPr sz="1250" b="1">
-                <a:solidFill>
-                  <a:srgbClr val="556175"/>
-                </a:solidFill>
-                <a:latin typeface="맑은 고딕"/>
-                <a:ea typeface="맑은 고딕"/>
-                <a:cs typeface="맑은 고딕"/>
-              </a:rPr>
-              <a:t>유온 정상 · 경보 해제</a:t>
+              <a:t>cause는 에이전트 단계가, 승인된 조치 방법 chosen_skill은 운전원 승인이, work_order는 작업지시 등록이 만들었다.</a:t>
             </a:r>
           </a:p>
         </p:txBody>
@@ -8460,7 +7848,7 @@
                 <a:ea typeface="맑은 고딕"/>
                 <a:cs typeface="맑은 고딕"/>
               </a:rPr>
-              <a:t>실행 기록과 모니터링: 단계마다 남는 시작과 끝</a:t>
+              <a:t>프로세스가 에이전트의 결과를 잇는 순서</a:t>
             </a:r>
           </a:p>
         </p:txBody>
@@ -8499,7 +7887,7 @@
                 <a:ea typeface="맑은 고딕"/>
                 <a:cs typeface="맑은 고딕"/>
               </a:rPr>
-              <a:t>처리 건에는 단계마다 시작과 끝의 시각이 남으며, 이 기록으로 업무의 진행을 지켜보는 일이 모니터링이다.</a:t>
+              <a:t>지식과 값을 읽는 일은 에이전트 단계 안에서 끝나고, 프로세스는 그 결과를 승인, 명령, 재관측으로 잇는다.</a:t>
             </a:r>
           </a:p>
         </p:txBody>
@@ -8580,12 +7968,12 @@
         </p:nvSpPr>
         <p:spPr>
           <a:xfrm>
-            <a:off x="548640" y="2328291"/>
-            <a:ext cx="6766560" cy="3326129"/>
+            <a:off x="548640" y="1627632"/>
+            <a:ext cx="11094415" cy="347472"/>
           </a:xfrm>
           <a:prstGeom prst="roundRect">
             <a:avLst>
-              <a:gd name="adj" fmla="val 3000"/>
+              <a:gd name="adj" fmla="val 12000"/>
             </a:avLst>
           </a:prstGeom>
           <a:solidFill>
@@ -8611,206 +7999,33 @@
         </p:nvSpPr>
         <p:spPr>
           <a:xfrm>
-            <a:off x="731520" y="2465451"/>
-            <a:ext cx="6400800" cy="3051810"/>
-          </a:xfrm>
-          <a:prstGeom prst="rect">
-            <a:avLst/>
-          </a:prstGeom>
-          <a:noFill/>
-        </p:spPr>
-        <p:txBody>
-          <a:bodyPr wrap="square" anchor="t"/>
-          <a:lstStyle/>
-          <a:p>
-            <a:pPr algn="l">
-              <a:lnSpc>
-                <a:spcPct val="110000"/>
-              </a:lnSpc>
-              <a:spcAft>
-                <a:spcPts val="200"/>
-              </a:spcAft>
-            </a:pPr>
-            <a:r>
-              <a:rPr sz="1300" b="0">
-                <a:solidFill>
-                  <a:srgbClr val="E8EEF6"/>
-                </a:solidFill>
-                <a:latin typeface="맑은 고딕"/>
-                <a:ea typeface="맑은 고딕"/>
-                <a:cs typeface="맑은 고딕"/>
-              </a:rPr>
-              <a:t>단계</a:t>
-            </a:r>
-            <a:r>
-              <a:rPr sz="1300" b="0">
-                <a:solidFill>
-                  <a:srgbClr val="E8EEF6"/>
-                </a:solidFill>
-                <a:latin typeface="Consolas"/>
-                <a:ea typeface="맑은 고딕"/>
-                <a:cs typeface="맑은 고딕"/>
-              </a:rPr>
-              <a:t>          </a:t>
-            </a:r>
-            <a:r>
-              <a:rPr sz="1300" b="0">
-                <a:solidFill>
-                  <a:srgbClr val="E8EEF6"/>
-                </a:solidFill>
-                <a:latin typeface="맑은 고딕"/>
-                <a:ea typeface="맑은 고딕"/>
-                <a:cs typeface="맑은 고딕"/>
-              </a:rPr>
-              <a:t>시작</a:t>
-            </a:r>
-            <a:r>
-              <a:rPr sz="1300" b="0">
-                <a:solidFill>
-                  <a:srgbClr val="E8EEF6"/>
-                </a:solidFill>
-                <a:latin typeface="Consolas"/>
-                <a:ea typeface="맑은 고딕"/>
-                <a:cs typeface="맑은 고딕"/>
-              </a:rPr>
-              <a:t>        </a:t>
-            </a:r>
-            <a:r>
-              <a:rPr sz="1300" b="0">
-                <a:solidFill>
-                  <a:srgbClr val="E8EEF6"/>
-                </a:solidFill>
-                <a:latin typeface="맑은 고딕"/>
-                <a:ea typeface="맑은 고딕"/>
-                <a:cs typeface="맑은 고딕"/>
-              </a:rPr>
-              <a:t>끝</a:t>
-            </a:r>
-          </a:p>
-          <a:p>
-            <a:pPr algn="l">
-              <a:lnSpc>
-                <a:spcPct val="110000"/>
-              </a:lnSpc>
-              <a:spcAft>
-                <a:spcPts val="200"/>
-              </a:spcAft>
-            </a:pPr>
-            <a:r>
-              <a:rPr sz="1300" b="0">
-                <a:solidFill>
-                  <a:srgbClr val="E8EEF6"/>
-                </a:solidFill>
-                <a:latin typeface="Consolas"/>
-                <a:ea typeface="맑은 고딕"/>
-                <a:cs typeface="맑은 고딕"/>
-              </a:rPr>
-              <a:t>T_agent     15:22:46    15:24:08</a:t>
-            </a:r>
-          </a:p>
-          <a:p>
-            <a:pPr algn="l">
-              <a:lnSpc>
-                <a:spcPct val="110000"/>
-              </a:lnSpc>
-              <a:spcAft>
-                <a:spcPts val="200"/>
-              </a:spcAft>
-            </a:pPr>
-            <a:r>
-              <a:rPr sz="1300" b="0">
-                <a:solidFill>
-                  <a:srgbClr val="E8EEF6"/>
-                </a:solidFill>
-                <a:latin typeface="Consolas"/>
-                <a:ea typeface="맑은 고딕"/>
-                <a:cs typeface="맑은 고딕"/>
-              </a:rPr>
-              <a:t>T_approve   15:24:08    15:24:09</a:t>
-            </a:r>
-          </a:p>
-          <a:p>
-            <a:pPr algn="l">
-              <a:lnSpc>
-                <a:spcPct val="110000"/>
-              </a:lnSpc>
-              <a:spcAft>
-                <a:spcPts val="200"/>
-              </a:spcAft>
-            </a:pPr>
-            <a:r>
-              <a:rPr sz="1300" b="0">
-                <a:solidFill>
-                  <a:srgbClr val="E8EEF6"/>
-                </a:solidFill>
-                <a:latin typeface="Consolas"/>
-                <a:ea typeface="맑은 고딕"/>
-                <a:cs typeface="맑은 고딕"/>
-              </a:rPr>
-              <a:t>T_cmd       15:24:09    15:24:10</a:t>
-            </a:r>
-          </a:p>
-          <a:p>
-            <a:pPr algn="l">
-              <a:lnSpc>
-                <a:spcPct val="110000"/>
-              </a:lnSpc>
-              <a:spcAft>
-                <a:spcPts val="200"/>
-              </a:spcAft>
-            </a:pPr>
-            <a:r>
-              <a:rPr sz="1300" b="0">
-                <a:solidFill>
-                  <a:srgbClr val="E8EEF6"/>
-                </a:solidFill>
-                <a:latin typeface="Consolas"/>
-                <a:ea typeface="맑은 고딕"/>
-                <a:cs typeface="맑은 고딕"/>
-              </a:rPr>
-              <a:t>T_reobs     15:24:10    15:25:11</a:t>
-            </a:r>
-          </a:p>
-          <a:p>
-            <a:pPr algn="l">
-              <a:lnSpc>
-                <a:spcPct val="110000"/>
-              </a:lnSpc>
-              <a:spcAft>
-                <a:spcPts val="200"/>
-              </a:spcAft>
-            </a:pPr>
-            <a:r>
-              <a:rPr sz="1300" b="0">
-                <a:solidFill>
-                  <a:srgbClr val="E8EEF6"/>
-                </a:solidFill>
-                <a:latin typeface="Consolas"/>
-                <a:ea typeface="맑은 고딕"/>
-                <a:cs typeface="맑은 고딕"/>
-              </a:rPr>
-              <a:t>T_wo        15:25:11    15:25:12</a:t>
-            </a:r>
-          </a:p>
-          <a:p>
-            <a:pPr algn="l">
-              <a:lnSpc>
-                <a:spcPct val="110000"/>
-              </a:lnSpc>
-              <a:spcAft>
-                <a:spcPts val="200"/>
-              </a:spcAft>
-            </a:pPr>
-            <a:r>
-              <a:rPr sz="1300" b="0">
-                <a:solidFill>
-                  <a:srgbClr val="E8EEF6"/>
-                </a:solidFill>
-                <a:latin typeface="Consolas"/>
-                <a:ea typeface="맑은 고딕"/>
-                <a:cs typeface="맑은 고딕"/>
-              </a:rPr>
-              <a:t>R_ok        15:25:12    15:25:12</a:t>
+            <a:off x="685800" y="1627632"/>
+            <a:ext cx="2514600" cy="347472"/>
+          </a:xfrm>
+          <a:prstGeom prst="rect">
+            <a:avLst/>
+          </a:prstGeom>
+          <a:noFill/>
+        </p:spPr>
+        <p:txBody>
+          <a:bodyPr wrap="square" anchor="ctr"/>
+          <a:lstStyle/>
+          <a:p>
+            <a:pPr algn="l">
+              <a:lnSpc>
+                <a:spcPct val="110000"/>
+              </a:lnSpc>
+            </a:pPr>
+            <a:r>
+              <a:rPr sz="1300" b="1">
+                <a:solidFill>
+                  <a:srgbClr val="FFFFFF"/>
+                </a:solidFill>
+                <a:latin typeface="맑은 고딕"/>
+                <a:ea typeface="맑은 고딕"/>
+                <a:cs typeface="맑은 고딕"/>
+              </a:rPr>
+              <a:t>작업</a:t>
             </a:r>
           </a:p>
         </p:txBody>
@@ -8823,8 +8038,8 @@
         </p:nvSpPr>
         <p:spPr>
           <a:xfrm>
-            <a:off x="7635240" y="2328291"/>
-            <a:ext cx="4007815" cy="1108710"/>
+            <a:off x="3200400" y="1627632"/>
+            <a:ext cx="6248095" cy="347472"/>
           </a:xfrm>
           <a:prstGeom prst="rect">
             <a:avLst/>
@@ -8839,12 +8054,118 @@
               <a:lnSpc>
                 <a:spcPct val="110000"/>
               </a:lnSpc>
-              <a:spcAft>
-                <a:spcPts val="400"/>
-              </a:spcAft>
-            </a:pPr>
-            <a:r>
-              <a:rPr sz="1700" b="1">
+            </a:pPr>
+            <a:r>
+              <a:rPr sz="1300" b="1">
+                <a:solidFill>
+                  <a:srgbClr val="FFFFFF"/>
+                </a:solidFill>
+                <a:latin typeface="맑은 고딕"/>
+                <a:ea typeface="맑은 고딕"/>
+                <a:cs typeface="맑은 고딕"/>
+              </a:rPr>
+              <a:t>받은 것</a:t>
+            </a:r>
+          </a:p>
+        </p:txBody>
+      </p:sp>
+      <p:sp>
+        <p:nvSpPr>
+          <p:cNvPr id="9" name="TextBox 8"/>
+          <p:cNvSpPr txBox="1"/>
+          <p:nvPr/>
+        </p:nvSpPr>
+        <p:spPr>
+          <a:xfrm>
+            <a:off x="9448495" y="1627632"/>
+            <a:ext cx="2194560" cy="347472"/>
+          </a:xfrm>
+          <a:prstGeom prst="rect">
+            <a:avLst/>
+          </a:prstGeom>
+          <a:noFill/>
+        </p:spPr>
+        <p:txBody>
+          <a:bodyPr wrap="square" anchor="ctr"/>
+          <a:lstStyle/>
+          <a:p>
+            <a:pPr algn="l">
+              <a:lnSpc>
+                <a:spcPct val="110000"/>
+              </a:lnSpc>
+            </a:pPr>
+            <a:r>
+              <a:rPr sz="1300" b="1">
+                <a:solidFill>
+                  <a:srgbClr val="FFFFFF"/>
+                </a:solidFill>
+                <a:latin typeface="맑은 고딕"/>
+                <a:ea typeface="맑은 고딕"/>
+                <a:cs typeface="맑은 고딕"/>
+              </a:rPr>
+              <a:t>낸 것</a:t>
+            </a:r>
+          </a:p>
+        </p:txBody>
+      </p:sp>
+      <p:sp>
+        <p:nvSpPr>
+          <p:cNvPr id="10" name="Rounded Rectangle 9"/>
+          <p:cNvSpPr/>
+          <p:nvPr/>
+        </p:nvSpPr>
+        <p:spPr>
+          <a:xfrm>
+            <a:off x="548640" y="2061972"/>
+            <a:ext cx="11094415" cy="656843"/>
+          </a:xfrm>
+          <a:prstGeom prst="roundRect">
+            <a:avLst>
+              <a:gd name="adj" fmla="val 8000"/>
+            </a:avLst>
+          </a:prstGeom>
+          <a:solidFill>
+            <a:srgbClr val="F3F6F9"/>
+          </a:solidFill>
+          <a:ln>
+            <a:noFill/>
+          </a:ln>
+        </p:spPr>
+        <p:txBody>
+          <a:bodyPr rtlCol="0" anchor="ctr"/>
+          <a:lstStyle/>
+          <a:p>
+            <a:pPr algn="ctr"/>
+          </a:p>
+        </p:txBody>
+      </p:sp>
+      <p:sp>
+        <p:nvSpPr>
+          <p:cNvPr id="11" name="TextBox 10"/>
+          <p:cNvSpPr txBox="1"/>
+          <p:nvPr/>
+        </p:nvSpPr>
+        <p:spPr>
+          <a:xfrm>
+            <a:off x="685800" y="2029968"/>
+            <a:ext cx="2514600" cy="720851"/>
+          </a:xfrm>
+          <a:prstGeom prst="rect">
+            <a:avLst/>
+          </a:prstGeom>
+          <a:noFill/>
+        </p:spPr>
+        <p:txBody>
+          <a:bodyPr wrap="square" anchor="ctr"/>
+          <a:lstStyle/>
+          <a:p>
+            <a:pPr algn="l">
+              <a:lnSpc>
+                <a:spcPct val="110000"/>
+              </a:lnSpc>
+            </a:pPr>
+            <a:r>
+              <a:rPr sz="1600" b="1">
                 <a:solidFill>
                   <a:srgbClr val="13294B"/>
                 </a:solidFill>
@@ -8852,17 +8173,35 @@
                 <a:ea typeface="맑은 고딕"/>
                 <a:cs typeface="맑은 고딕"/>
               </a:rPr>
-              <a:t>실행 기록</a:t>
-            </a:r>
-          </a:p>
-          <a:p>
-            <a:pPr algn="l">
-              <a:lnSpc>
-                <a:spcPct val="110000"/>
-              </a:lnSpc>
-              <a:spcAft>
-                <a:spcPts val="400"/>
-              </a:spcAft>
+              <a:t>원인 진단 · 냉각 조치 제안</a:t>
+            </a:r>
+          </a:p>
+        </p:txBody>
+      </p:sp>
+      <p:sp>
+        <p:nvSpPr>
+          <p:cNvPr id="12" name="TextBox 11"/>
+          <p:cNvSpPr txBox="1"/>
+          <p:nvPr/>
+        </p:nvSpPr>
+        <p:spPr>
+          <a:xfrm>
+            <a:off x="3200400" y="2029968"/>
+            <a:ext cx="6156655" cy="720851"/>
+          </a:xfrm>
+          <a:prstGeom prst="rect">
+            <a:avLst/>
+          </a:prstGeom>
+          <a:noFill/>
+        </p:spPr>
+        <p:txBody>
+          <a:bodyPr wrap="square" anchor="ctr"/>
+          <a:lstStyle/>
+          <a:p>
+            <a:pPr algn="l">
+              <a:lnSpc>
+                <a:spcPct val="110000"/>
+              </a:lnSpc>
             </a:pPr>
             <a:r>
               <a:rPr sz="1400" b="0">
@@ -8873,17 +8212,162 @@
                 <a:ea typeface="맑은 고딕"/>
                 <a:cs typeface="맑은 고딕"/>
               </a:rPr>
-              <a:t>단계의 시작과 끝, 담당,</a:t>
-            </a:r>
-          </a:p>
-          <a:p>
-            <a:pPr algn="l">
-              <a:lnSpc>
-                <a:spcPct val="110000"/>
-              </a:lnSpc>
-              <a:spcAft>
-                <a:spcPts val="400"/>
-              </a:spcAft>
+              <a:t>경보 ALT-hyd01-0026-767a</a:t>
+            </a:r>
+          </a:p>
+        </p:txBody>
+      </p:sp>
+      <p:sp>
+        <p:nvSpPr>
+          <p:cNvPr id="13" name="TextBox 12"/>
+          <p:cNvSpPr txBox="1"/>
+          <p:nvPr/>
+        </p:nvSpPr>
+        <p:spPr>
+          <a:xfrm>
+            <a:off x="9448495" y="2029968"/>
+            <a:ext cx="2103120" cy="720851"/>
+          </a:xfrm>
+          <a:prstGeom prst="rect">
+            <a:avLst/>
+          </a:prstGeom>
+          <a:noFill/>
+        </p:spPr>
+        <p:txBody>
+          <a:bodyPr wrap="square" anchor="ctr"/>
+          <a:lstStyle/>
+          <a:p>
+            <a:pPr algn="l">
+              <a:lnSpc>
+                <a:spcPct val="110000"/>
+              </a:lnSpc>
+            </a:pPr>
+            <a:r>
+              <a:rPr sz="1250" b="1">
+                <a:solidFill>
+                  <a:srgbClr val="556175"/>
+                </a:solidFill>
+                <a:latin typeface="맑은 고딕"/>
+                <a:ea typeface="맑은 고딕"/>
+                <a:cs typeface="맑은 고딕"/>
+              </a:rPr>
+              <a:t>원인 쿨러 핀 오염</a:t>
+            </a:r>
+          </a:p>
+          <a:p>
+            <a:pPr algn="l">
+              <a:lnSpc>
+                <a:spcPct val="110000"/>
+              </a:lnSpc>
+            </a:pPr>
+            <a:r>
+              <a:rPr sz="1250" b="1">
+                <a:solidFill>
+                  <a:srgbClr val="556175"/>
+                </a:solidFill>
+                <a:latin typeface="맑은 고딕"/>
+                <a:ea typeface="맑은 고딕"/>
+                <a:cs typeface="맑은 고딕"/>
+              </a:rPr>
+              <a:t>추천 SOP-COOL-11</a:t>
+            </a:r>
+          </a:p>
+        </p:txBody>
+      </p:sp>
+      <p:sp>
+        <p:nvSpPr>
+          <p:cNvPr id="14" name="Rounded Rectangle 13"/>
+          <p:cNvSpPr/>
+          <p:nvPr/>
+        </p:nvSpPr>
+        <p:spPr>
+          <a:xfrm>
+            <a:off x="548640" y="2782824"/>
+            <a:ext cx="11094415" cy="656843"/>
+          </a:xfrm>
+          <a:prstGeom prst="roundRect">
+            <a:avLst>
+              <a:gd name="adj" fmla="val 8000"/>
+            </a:avLst>
+          </a:prstGeom>
+          <a:solidFill>
+            <a:srgbClr val="E7F3FD"/>
+          </a:solidFill>
+          <a:ln>
+            <a:noFill/>
+          </a:ln>
+        </p:spPr>
+        <p:txBody>
+          <a:bodyPr rtlCol="0" anchor="ctr"/>
+          <a:lstStyle/>
+          <a:p>
+            <a:pPr algn="ctr"/>
+          </a:p>
+        </p:txBody>
+      </p:sp>
+      <p:sp>
+        <p:nvSpPr>
+          <p:cNvPr id="15" name="TextBox 14"/>
+          <p:cNvSpPr txBox="1"/>
+          <p:nvPr/>
+        </p:nvSpPr>
+        <p:spPr>
+          <a:xfrm>
+            <a:off x="685800" y="2750820"/>
+            <a:ext cx="2514600" cy="720851"/>
+          </a:xfrm>
+          <a:prstGeom prst="rect">
+            <a:avLst/>
+          </a:prstGeom>
+          <a:noFill/>
+        </p:spPr>
+        <p:txBody>
+          <a:bodyPr wrap="square" anchor="ctr"/>
+          <a:lstStyle/>
+          <a:p>
+            <a:pPr algn="l">
+              <a:lnSpc>
+                <a:spcPct val="110000"/>
+              </a:lnSpc>
+            </a:pPr>
+            <a:r>
+              <a:rPr sz="1600" b="1">
+                <a:solidFill>
+                  <a:srgbClr val="13294B"/>
+                </a:solidFill>
+                <a:latin typeface="맑은 고딕"/>
+                <a:ea typeface="맑은 고딕"/>
+                <a:cs typeface="맑은 고딕"/>
+              </a:rPr>
+              <a:t>운전원 승인</a:t>
+            </a:r>
+          </a:p>
+        </p:txBody>
+      </p:sp>
+      <p:sp>
+        <p:nvSpPr>
+          <p:cNvPr id="16" name="TextBox 15"/>
+          <p:cNvSpPr txBox="1"/>
+          <p:nvPr/>
+        </p:nvSpPr>
+        <p:spPr>
+          <a:xfrm>
+            <a:off x="3200400" y="2750820"/>
+            <a:ext cx="6156655" cy="720851"/>
+          </a:xfrm>
+          <a:prstGeom prst="rect">
+            <a:avLst/>
+          </a:prstGeom>
+          <a:noFill/>
+        </p:spPr>
+        <p:txBody>
+          <a:bodyPr wrap="square" anchor="ctr"/>
+          <a:lstStyle/>
+          <a:p>
+            <a:pPr algn="l">
+              <a:lnSpc>
+                <a:spcPct val="110000"/>
+              </a:lnSpc>
             </a:pPr>
             <a:r>
               <a:rPr sz="1400" b="0">
@@ -8894,21 +8378,21 @@
                 <a:ea typeface="맑은 고딕"/>
                 <a:cs typeface="맑은 고딕"/>
               </a:rPr>
-              <a:t>결과가 처리 건에 남는다.</a:t>
-            </a:r>
-          </a:p>
-        </p:txBody>
-      </p:sp>
-      <p:sp>
-        <p:nvSpPr>
-          <p:cNvPr id="9" name="TextBox 8"/>
-          <p:cNvSpPr txBox="1"/>
-          <p:nvPr/>
-        </p:nvSpPr>
-        <p:spPr>
-          <a:xfrm>
-            <a:off x="7635240" y="3437001"/>
-            <a:ext cx="4007815" cy="1108710"/>
+              <a:t>추천안(추천 조치와 대안)</a:t>
+            </a:r>
+          </a:p>
+        </p:txBody>
+      </p:sp>
+      <p:sp>
+        <p:nvSpPr>
+          <p:cNvPr id="17" name="TextBox 16"/>
+          <p:cNvSpPr txBox="1"/>
+          <p:nvPr/>
+        </p:nvSpPr>
+        <p:spPr>
+          <a:xfrm>
+            <a:off x="9448495" y="2750820"/>
+            <a:ext cx="2103120" cy="720851"/>
           </a:xfrm>
           <a:prstGeom prst="rect">
             <a:avLst/>
@@ -8923,12 +8407,97 @@
               <a:lnSpc>
                 <a:spcPct val="110000"/>
               </a:lnSpc>
-              <a:spcAft>
-                <a:spcPts val="400"/>
-              </a:spcAft>
-            </a:pPr>
-            <a:r>
-              <a:rPr sz="1700" b="1">
+            </a:pPr>
+            <a:r>
+              <a:rPr sz="1250" b="1">
+                <a:solidFill>
+                  <a:srgbClr val="1A6FC4"/>
+                </a:solidFill>
+                <a:latin typeface="맑은 고딕"/>
+                <a:ea typeface="맑은 고딕"/>
+                <a:cs typeface="맑은 고딕"/>
+              </a:rPr>
+              <a:t>승인</a:t>
+            </a:r>
+          </a:p>
+          <a:p>
+            <a:pPr algn="l">
+              <a:lnSpc>
+                <a:spcPct val="110000"/>
+              </a:lnSpc>
+            </a:pPr>
+            <a:r>
+              <a:rPr sz="1250" b="1">
+                <a:solidFill>
+                  <a:srgbClr val="1A6FC4"/>
+                </a:solidFill>
+                <a:latin typeface="맑은 고딕"/>
+                <a:ea typeface="맑은 고딕"/>
+                <a:cs typeface="맑은 고딕"/>
+              </a:rPr>
+              <a:t>팬 속도 100 %</a:t>
+            </a:r>
+          </a:p>
+        </p:txBody>
+      </p:sp>
+      <p:sp>
+        <p:nvSpPr>
+          <p:cNvPr id="18" name="Rounded Rectangle 17"/>
+          <p:cNvSpPr/>
+          <p:nvPr/>
+        </p:nvSpPr>
+        <p:spPr>
+          <a:xfrm>
+            <a:off x="548640" y="3503676"/>
+            <a:ext cx="11094415" cy="656843"/>
+          </a:xfrm>
+          <a:prstGeom prst="roundRect">
+            <a:avLst>
+              <a:gd name="adj" fmla="val 8000"/>
+            </a:avLst>
+          </a:prstGeom>
+          <a:solidFill>
+            <a:srgbClr val="F3F6F9"/>
+          </a:solidFill>
+          <a:ln>
+            <a:noFill/>
+          </a:ln>
+        </p:spPr>
+        <p:txBody>
+          <a:bodyPr rtlCol="0" anchor="ctr"/>
+          <a:lstStyle/>
+          <a:p>
+            <a:pPr algn="ctr"/>
+          </a:p>
+        </p:txBody>
+      </p:sp>
+      <p:sp>
+        <p:nvSpPr>
+          <p:cNvPr id="19" name="TextBox 18"/>
+          <p:cNvSpPr txBox="1"/>
+          <p:nvPr/>
+        </p:nvSpPr>
+        <p:spPr>
+          <a:xfrm>
+            <a:off x="685800" y="3471672"/>
+            <a:ext cx="2514600" cy="720851"/>
+          </a:xfrm>
+          <a:prstGeom prst="rect">
+            <a:avLst/>
+          </a:prstGeom>
+          <a:noFill/>
+        </p:spPr>
+        <p:txBody>
+          <a:bodyPr wrap="square" anchor="ctr"/>
+          <a:lstStyle/>
+          <a:p>
+            <a:pPr algn="l">
+              <a:lnSpc>
+                <a:spcPct val="110000"/>
+              </a:lnSpc>
+            </a:pPr>
+            <a:r>
+              <a:rPr sz="1600" b="1">
                 <a:solidFill>
                   <a:srgbClr val="13294B"/>
                 </a:solidFill>
@@ -8936,17 +8505,35 @@
                 <a:ea typeface="맑은 고딕"/>
                 <a:cs typeface="맑은 고딕"/>
               </a:rPr>
-              <a:t>모니터링</a:t>
-            </a:r>
-          </a:p>
-          <a:p>
-            <a:pPr algn="l">
-              <a:lnSpc>
-                <a:spcPct val="110000"/>
-              </a:lnSpc>
-              <a:spcAft>
-                <a:spcPts val="400"/>
-              </a:spcAft>
+              <a:t>냉각 명령</a:t>
+            </a:r>
+          </a:p>
+        </p:txBody>
+      </p:sp>
+      <p:sp>
+        <p:nvSpPr>
+          <p:cNvPr id="20" name="TextBox 19"/>
+          <p:cNvSpPr txBox="1"/>
+          <p:nvPr/>
+        </p:nvSpPr>
+        <p:spPr>
+          <a:xfrm>
+            <a:off x="3200400" y="3471672"/>
+            <a:ext cx="6156655" cy="720851"/>
+          </a:xfrm>
+          <a:prstGeom prst="rect">
+            <a:avLst/>
+          </a:prstGeom>
+          <a:noFill/>
+        </p:spPr>
+        <p:txBody>
+          <a:bodyPr wrap="square" anchor="ctr"/>
+          <a:lstStyle/>
+          <a:p>
+            <a:pPr algn="l">
+              <a:lnSpc>
+                <a:spcPct val="110000"/>
+              </a:lnSpc>
             </a:pPr>
             <a:r>
               <a:rPr sz="1400" b="0">
@@ -8957,17 +8544,162 @@
                 <a:ea typeface="맑은 고딕"/>
                 <a:cs typeface="맑은 고딕"/>
               </a:rPr>
-              <a:t>Monitoring · 이 기록으로</a:t>
-            </a:r>
-          </a:p>
-          <a:p>
-            <a:pPr algn="l">
-              <a:lnSpc>
-                <a:spcPct val="110000"/>
-              </a:lnSpc>
-              <a:spcAft>
-                <a:spcPts val="400"/>
-              </a:spcAft>
+              <a:t>승인된 조치</a:t>
+            </a:r>
+          </a:p>
+        </p:txBody>
+      </p:sp>
+      <p:sp>
+        <p:nvSpPr>
+          <p:cNvPr id="21" name="TextBox 20"/>
+          <p:cNvSpPr txBox="1"/>
+          <p:nvPr/>
+        </p:nvSpPr>
+        <p:spPr>
+          <a:xfrm>
+            <a:off x="9448495" y="3471672"/>
+            <a:ext cx="2103120" cy="720851"/>
+          </a:xfrm>
+          <a:prstGeom prst="rect">
+            <a:avLst/>
+          </a:prstGeom>
+          <a:noFill/>
+        </p:spPr>
+        <p:txBody>
+          <a:bodyPr wrap="square" anchor="ctr"/>
+          <a:lstStyle/>
+          <a:p>
+            <a:pPr algn="l">
+              <a:lnSpc>
+                <a:spcPct val="110000"/>
+              </a:lnSpc>
+            </a:pPr>
+            <a:r>
+              <a:rPr sz="1250" b="1">
+                <a:solidFill>
+                  <a:srgbClr val="556175"/>
+                </a:solidFill>
+                <a:latin typeface="맑은 고딕"/>
+                <a:ea typeface="맑은 고딕"/>
+                <a:cs typeface="맑은 고딕"/>
+              </a:rPr>
+              <a:t>CMD-1010-0001-01d1</a:t>
+            </a:r>
+          </a:p>
+          <a:p>
+            <a:pPr algn="l">
+              <a:lnSpc>
+                <a:spcPct val="110000"/>
+              </a:lnSpc>
+            </a:pPr>
+            <a:r>
+              <a:rPr sz="1250" b="1">
+                <a:solidFill>
+                  <a:srgbClr val="556175"/>
+                </a:solidFill>
+                <a:latin typeface="맑은 고딕"/>
+                <a:ea typeface="맑은 고딕"/>
+                <a:cs typeface="맑은 고딕"/>
+              </a:rPr>
+              <a:t>인터록 PASS</a:t>
+            </a:r>
+          </a:p>
+        </p:txBody>
+      </p:sp>
+      <p:sp>
+        <p:nvSpPr>
+          <p:cNvPr id="22" name="Rounded Rectangle 21"/>
+          <p:cNvSpPr/>
+          <p:nvPr/>
+        </p:nvSpPr>
+        <p:spPr>
+          <a:xfrm>
+            <a:off x="548640" y="4224528"/>
+            <a:ext cx="11094415" cy="656843"/>
+          </a:xfrm>
+          <a:prstGeom prst="roundRect">
+            <a:avLst>
+              <a:gd name="adj" fmla="val 8000"/>
+            </a:avLst>
+          </a:prstGeom>
+          <a:solidFill>
+            <a:srgbClr val="F3F6F9"/>
+          </a:solidFill>
+          <a:ln>
+            <a:noFill/>
+          </a:ln>
+        </p:spPr>
+        <p:txBody>
+          <a:bodyPr rtlCol="0" anchor="ctr"/>
+          <a:lstStyle/>
+          <a:p>
+            <a:pPr algn="ctr"/>
+          </a:p>
+        </p:txBody>
+      </p:sp>
+      <p:sp>
+        <p:nvSpPr>
+          <p:cNvPr id="23" name="TextBox 22"/>
+          <p:cNvSpPr txBox="1"/>
+          <p:nvPr/>
+        </p:nvSpPr>
+        <p:spPr>
+          <a:xfrm>
+            <a:off x="685800" y="4192524"/>
+            <a:ext cx="2514600" cy="720851"/>
+          </a:xfrm>
+          <a:prstGeom prst="rect">
+            <a:avLst/>
+          </a:prstGeom>
+          <a:noFill/>
+        </p:spPr>
+        <p:txBody>
+          <a:bodyPr wrap="square" anchor="ctr"/>
+          <a:lstStyle/>
+          <a:p>
+            <a:pPr algn="l">
+              <a:lnSpc>
+                <a:spcPct val="110000"/>
+              </a:lnSpc>
+            </a:pPr>
+            <a:r>
+              <a:rPr sz="1600" b="1">
+                <a:solidFill>
+                  <a:srgbClr val="13294B"/>
+                </a:solidFill>
+                <a:latin typeface="맑은 고딕"/>
+                <a:ea typeface="맑은 고딕"/>
+                <a:cs typeface="맑은 고딕"/>
+              </a:rPr>
+              <a:t>재관측</a:t>
+            </a:r>
+          </a:p>
+        </p:txBody>
+      </p:sp>
+      <p:sp>
+        <p:nvSpPr>
+          <p:cNvPr id="24" name="TextBox 23"/>
+          <p:cNvSpPr txBox="1"/>
+          <p:nvPr/>
+        </p:nvSpPr>
+        <p:spPr>
+          <a:xfrm>
+            <a:off x="3200400" y="4192524"/>
+            <a:ext cx="6156655" cy="720851"/>
+          </a:xfrm>
+          <a:prstGeom prst="rect">
+            <a:avLst/>
+          </a:prstGeom>
+          <a:noFill/>
+        </p:spPr>
+        <p:txBody>
+          <a:bodyPr wrap="square" anchor="ctr"/>
+          <a:lstStyle/>
+          <a:p>
+            <a:pPr algn="l">
+              <a:lnSpc>
+                <a:spcPct val="110000"/>
+              </a:lnSpc>
             </a:pPr>
             <a:r>
               <a:rPr sz="1400" b="0">
@@ -8978,21 +8710,21 @@
                 <a:ea typeface="맑은 고딕"/>
                 <a:cs typeface="맑은 고딕"/>
               </a:rPr>
-              <a:t>진행과 대기를 지켜본다.</a:t>
-            </a:r>
-          </a:p>
-        </p:txBody>
-      </p:sp>
-      <p:sp>
-        <p:nvSpPr>
-          <p:cNvPr id="10" name="TextBox 9"/>
-          <p:cNvSpPr txBox="1"/>
-          <p:nvPr/>
-        </p:nvSpPr>
-        <p:spPr>
-          <a:xfrm>
-            <a:off x="7635240" y="4545711"/>
-            <a:ext cx="4007815" cy="1108710"/>
+              <a:t>명령의 완료</a:t>
+            </a:r>
+          </a:p>
+        </p:txBody>
+      </p:sp>
+      <p:sp>
+        <p:nvSpPr>
+          <p:cNvPr id="25" name="TextBox 24"/>
+          <p:cNvSpPr txBox="1"/>
+          <p:nvPr/>
+        </p:nvSpPr>
+        <p:spPr>
+          <a:xfrm>
+            <a:off x="9448495" y="4192524"/>
+            <a:ext cx="2103120" cy="720851"/>
           </a:xfrm>
           <a:prstGeom prst="rect">
             <a:avLst/>
@@ -9007,12 +8739,97 @@
               <a:lnSpc>
                 <a:spcPct val="110000"/>
               </a:lnSpc>
-              <a:spcAft>
-                <a:spcPts val="400"/>
-              </a:spcAft>
-            </a:pPr>
-            <a:r>
-              <a:rPr sz="1700" b="1">
+            </a:pPr>
+            <a:r>
+              <a:rPr sz="1250" b="1">
+                <a:solidFill>
+                  <a:srgbClr val="556175"/>
+                </a:solidFill>
+                <a:latin typeface="맑은 고딕"/>
+                <a:ea typeface="맑은 고딕"/>
+                <a:cs typeface="맑은 고딕"/>
+              </a:rPr>
+              <a:t>유온 51.3 ℃</a:t>
+            </a:r>
+          </a:p>
+          <a:p>
+            <a:pPr algn="l">
+              <a:lnSpc>
+                <a:spcPct val="110000"/>
+              </a:lnSpc>
+            </a:pPr>
+            <a:r>
+              <a:rPr sz="1250" b="1">
+                <a:solidFill>
+                  <a:srgbClr val="556175"/>
+                </a:solidFill>
+                <a:latin typeface="맑은 고딕"/>
+                <a:ea typeface="맑은 고딕"/>
+                <a:cs typeface="맑은 고딕"/>
+              </a:rPr>
+              <a:t>기준 55 ℃ 미만</a:t>
+            </a:r>
+          </a:p>
+        </p:txBody>
+      </p:sp>
+      <p:sp>
+        <p:nvSpPr>
+          <p:cNvPr id="26" name="Rounded Rectangle 25"/>
+          <p:cNvSpPr/>
+          <p:nvPr/>
+        </p:nvSpPr>
+        <p:spPr>
+          <a:xfrm>
+            <a:off x="548640" y="4945380"/>
+            <a:ext cx="11094415" cy="656843"/>
+          </a:xfrm>
+          <a:prstGeom prst="roundRect">
+            <a:avLst>
+              <a:gd name="adj" fmla="val 8000"/>
+            </a:avLst>
+          </a:prstGeom>
+          <a:solidFill>
+            <a:srgbClr val="F3F6F9"/>
+          </a:solidFill>
+          <a:ln>
+            <a:noFill/>
+          </a:ln>
+        </p:spPr>
+        <p:txBody>
+          <a:bodyPr rtlCol="0" anchor="ctr"/>
+          <a:lstStyle/>
+          <a:p>
+            <a:pPr algn="ctr"/>
+          </a:p>
+        </p:txBody>
+      </p:sp>
+      <p:sp>
+        <p:nvSpPr>
+          <p:cNvPr id="27" name="TextBox 26"/>
+          <p:cNvSpPr txBox="1"/>
+          <p:nvPr/>
+        </p:nvSpPr>
+        <p:spPr>
+          <a:xfrm>
+            <a:off x="685800" y="4913376"/>
+            <a:ext cx="2514600" cy="720851"/>
+          </a:xfrm>
+          <a:prstGeom prst="rect">
+            <a:avLst/>
+          </a:prstGeom>
+          <a:noFill/>
+        </p:spPr>
+        <p:txBody>
+          <a:bodyPr wrap="square" anchor="ctr"/>
+          <a:lstStyle/>
+          <a:p>
+            <a:pPr algn="l">
+              <a:lnSpc>
+                <a:spcPct val="110000"/>
+              </a:lnSpc>
+            </a:pPr>
+            <a:r>
+              <a:rPr sz="1600" b="1">
                 <a:solidFill>
                   <a:srgbClr val="13294B"/>
                 </a:solidFill>
@@ -9020,17 +8837,35 @@
                 <a:ea typeface="맑은 고딕"/>
                 <a:cs typeface="맑은 고딕"/>
               </a:rPr>
-              <a:t>읽는 법</a:t>
-            </a:r>
-          </a:p>
-          <a:p>
-            <a:pPr algn="l">
-              <a:lnSpc>
-                <a:spcPct val="110000"/>
-              </a:lnSpc>
-              <a:spcAft>
-                <a:spcPts val="400"/>
-              </a:spcAft>
+              <a:t>작업지시 등록</a:t>
+            </a:r>
+          </a:p>
+        </p:txBody>
+      </p:sp>
+      <p:sp>
+        <p:nvSpPr>
+          <p:cNvPr id="28" name="TextBox 27"/>
+          <p:cNvSpPr txBox="1"/>
+          <p:nvPr/>
+        </p:nvSpPr>
+        <p:spPr>
+          <a:xfrm>
+            <a:off x="3200400" y="4913376"/>
+            <a:ext cx="6156655" cy="720851"/>
+          </a:xfrm>
+          <a:prstGeom prst="rect">
+            <a:avLst/>
+          </a:prstGeom>
+          <a:noFill/>
+        </p:spPr>
+        <p:txBody>
+          <a:bodyPr wrap="square" anchor="ctr"/>
+          <a:lstStyle/>
+          <a:p>
+            <a:pPr algn="l">
+              <a:lnSpc>
+                <a:spcPct val="110000"/>
+              </a:lnSpc>
             </a:pPr>
             <a:r>
               <a:rPr sz="1400" b="0">
@@ -9041,17 +8876,144 @@
                 <a:ea typeface="맑은 고딕"/>
                 <a:cs typeface="맑은 고딕"/>
               </a:rPr>
-              <a:t>끝에서 시작을 빼면</a:t>
-            </a:r>
-          </a:p>
-          <a:p>
-            <a:pPr algn="l">
-              <a:lnSpc>
-                <a:spcPct val="110000"/>
-              </a:lnSpc>
-              <a:spcAft>
-                <a:spcPts val="400"/>
-              </a:spcAft>
+              <a:t>회복 판정</a:t>
+            </a:r>
+          </a:p>
+        </p:txBody>
+      </p:sp>
+      <p:sp>
+        <p:nvSpPr>
+          <p:cNvPr id="29" name="TextBox 28"/>
+          <p:cNvSpPr txBox="1"/>
+          <p:nvPr/>
+        </p:nvSpPr>
+        <p:spPr>
+          <a:xfrm>
+            <a:off x="9448495" y="4913376"/>
+            <a:ext cx="2103120" cy="720851"/>
+          </a:xfrm>
+          <a:prstGeom prst="rect">
+            <a:avLst/>
+          </a:prstGeom>
+          <a:noFill/>
+        </p:spPr>
+        <p:txBody>
+          <a:bodyPr wrap="square" anchor="ctr"/>
+          <a:lstStyle/>
+          <a:p>
+            <a:pPr algn="l">
+              <a:lnSpc>
+                <a:spcPct val="110000"/>
+              </a:lnSpc>
+            </a:pPr>
+            <a:r>
+              <a:rPr sz="1250" b="1">
+                <a:solidFill>
+                  <a:srgbClr val="556175"/>
+                </a:solidFill>
+                <a:latin typeface="맑은 고딕"/>
+                <a:ea typeface="맑은 고딕"/>
+                <a:cs typeface="맑은 고딕"/>
+              </a:rPr>
+              <a:t>WO-1010-1198</a:t>
+            </a:r>
+          </a:p>
+        </p:txBody>
+      </p:sp>
+      <p:sp>
+        <p:nvSpPr>
+          <p:cNvPr id="30" name="Rounded Rectangle 29"/>
+          <p:cNvSpPr/>
+          <p:nvPr/>
+        </p:nvSpPr>
+        <p:spPr>
+          <a:xfrm>
+            <a:off x="548640" y="5666232"/>
+            <a:ext cx="11094415" cy="656843"/>
+          </a:xfrm>
+          <a:prstGeom prst="roundRect">
+            <a:avLst>
+              <a:gd name="adj" fmla="val 8000"/>
+            </a:avLst>
+          </a:prstGeom>
+          <a:solidFill>
+            <a:srgbClr val="F3F6F9"/>
+          </a:solidFill>
+          <a:ln>
+            <a:noFill/>
+          </a:ln>
+        </p:spPr>
+        <p:txBody>
+          <a:bodyPr rtlCol="0" anchor="ctr"/>
+          <a:lstStyle/>
+          <a:p>
+            <a:pPr algn="ctr"/>
+          </a:p>
+        </p:txBody>
+      </p:sp>
+      <p:sp>
+        <p:nvSpPr>
+          <p:cNvPr id="31" name="TextBox 30"/>
+          <p:cNvSpPr txBox="1"/>
+          <p:nvPr/>
+        </p:nvSpPr>
+        <p:spPr>
+          <a:xfrm>
+            <a:off x="685800" y="5634228"/>
+            <a:ext cx="2514600" cy="720851"/>
+          </a:xfrm>
+          <a:prstGeom prst="rect">
+            <a:avLst/>
+          </a:prstGeom>
+          <a:noFill/>
+        </p:spPr>
+        <p:txBody>
+          <a:bodyPr wrap="square" anchor="ctr"/>
+          <a:lstStyle/>
+          <a:p>
+            <a:pPr algn="l">
+              <a:lnSpc>
+                <a:spcPct val="110000"/>
+              </a:lnSpc>
+            </a:pPr>
+            <a:r>
+              <a:rPr sz="1600" b="1">
+                <a:solidFill>
+                  <a:srgbClr val="13294B"/>
+                </a:solidFill>
+                <a:latin typeface="맑은 고딕"/>
+                <a:ea typeface="맑은 고딕"/>
+                <a:cs typeface="맑은 고딕"/>
+              </a:rPr>
+              <a:t>결과 보고: 정상</a:t>
+            </a:r>
+          </a:p>
+        </p:txBody>
+      </p:sp>
+      <p:sp>
+        <p:nvSpPr>
+          <p:cNvPr id="32" name="TextBox 31"/>
+          <p:cNvSpPr txBox="1"/>
+          <p:nvPr/>
+        </p:nvSpPr>
+        <p:spPr>
+          <a:xfrm>
+            <a:off x="3200400" y="5634228"/>
+            <a:ext cx="6156655" cy="720851"/>
+          </a:xfrm>
+          <a:prstGeom prst="rect">
+            <a:avLst/>
+          </a:prstGeom>
+          <a:noFill/>
+        </p:spPr>
+        <p:txBody>
+          <a:bodyPr wrap="square" anchor="ctr"/>
+          <a:lstStyle/>
+          <a:p>
+            <a:pPr algn="l">
+              <a:lnSpc>
+                <a:spcPct val="110000"/>
+              </a:lnSpc>
             </a:pPr>
             <a:r>
               <a:rPr sz="1400" b="0">
@@ -9062,7 +9024,46 @@
                 <a:ea typeface="맑은 고딕"/>
                 <a:cs typeface="맑은 고딕"/>
               </a:rPr>
-              <a:t>단계에 걸린 시간이다.</a:t>
+              <a:t>위의 결과 전부</a:t>
+            </a:r>
+          </a:p>
+        </p:txBody>
+      </p:sp>
+      <p:sp>
+        <p:nvSpPr>
+          <p:cNvPr id="33" name="TextBox 32"/>
+          <p:cNvSpPr txBox="1"/>
+          <p:nvPr/>
+        </p:nvSpPr>
+        <p:spPr>
+          <a:xfrm>
+            <a:off x="9448495" y="5634228"/>
+            <a:ext cx="2103120" cy="720851"/>
+          </a:xfrm>
+          <a:prstGeom prst="rect">
+            <a:avLst/>
+          </a:prstGeom>
+          <a:noFill/>
+        </p:spPr>
+        <p:txBody>
+          <a:bodyPr wrap="square" anchor="ctr"/>
+          <a:lstStyle/>
+          <a:p>
+            <a:pPr algn="l">
+              <a:lnSpc>
+                <a:spcPct val="110000"/>
+              </a:lnSpc>
+            </a:pPr>
+            <a:r>
+              <a:rPr sz="1250" b="1">
+                <a:solidFill>
+                  <a:srgbClr val="556175"/>
+                </a:solidFill>
+                <a:latin typeface="맑은 고딕"/>
+                <a:ea typeface="맑은 고딕"/>
+                <a:cs typeface="맑은 고딕"/>
+              </a:rPr>
+              <a:t>유온 정상 · 경보 해제</a:t>
             </a:r>
           </a:p>
         </p:txBody>
@@ -9127,7 +9128,7 @@
                 <a:ea typeface="맑은 고딕"/>
                 <a:cs typeface="맑은 고딕"/>
               </a:rPr>
-              <a:t>감사 기록(Audit Log): 누가 무엇을 결정했는가</a:t>
+              <a:t>실행 기록과 모니터링: 단계마다 남는 시작과 끝</a:t>
             </a:r>
           </a:p>
         </p:txBody>
@@ -9166,7 +9167,7 @@
                 <a:ea typeface="맑은 고딕"/>
                 <a:cs typeface="맑은 고딕"/>
               </a:rPr>
-              <a:t>감사 기록은 누가 무엇을 결정했는지를 나중에 확인하려고 남기는 기록이며, 처리 건의 시작과 승인과 종결이 남는다.</a:t>
+              <a:t>처리 건에는 단계마다 시작과 끝의 시각이 남으며, 이 기록으로 업무의 진행을 지켜보는 일이 모니터링이다.</a:t>
             </a:r>
           </a:p>
         </p:txBody>
@@ -9247,12 +9248,12 @@
         </p:nvSpPr>
         <p:spPr>
           <a:xfrm>
-            <a:off x="548640" y="1627632"/>
-            <a:ext cx="11094415" cy="347472"/>
+            <a:off x="548640" y="2328291"/>
+            <a:ext cx="6766560" cy="3326129"/>
           </a:xfrm>
           <a:prstGeom prst="roundRect">
             <a:avLst>
-              <a:gd name="adj" fmla="val 12000"/>
+              <a:gd name="adj" fmla="val 3000"/>
             </a:avLst>
           </a:prstGeom>
           <a:solidFill>
@@ -9278,8 +9279,220 @@
         </p:nvSpPr>
         <p:spPr>
           <a:xfrm>
-            <a:off x="685800" y="1627632"/>
-            <a:ext cx="2514600" cy="347472"/>
+            <a:off x="731520" y="2465451"/>
+            <a:ext cx="6400800" cy="3051810"/>
+          </a:xfrm>
+          <a:prstGeom prst="rect">
+            <a:avLst/>
+          </a:prstGeom>
+          <a:noFill/>
+        </p:spPr>
+        <p:txBody>
+          <a:bodyPr wrap="square" anchor="t"/>
+          <a:lstStyle/>
+          <a:p>
+            <a:pPr algn="l">
+              <a:lnSpc>
+                <a:spcPct val="110000"/>
+              </a:lnSpc>
+              <a:spcAft>
+                <a:spcPts val="200"/>
+              </a:spcAft>
+            </a:pPr>
+            <a:r>
+              <a:rPr sz="1300" b="0">
+                <a:solidFill>
+                  <a:srgbClr val="E8EEF6"/>
+                </a:solidFill>
+                <a:latin typeface="맑은 고딕"/>
+                <a:ea typeface="맑은 고딕"/>
+                <a:cs typeface="맑은 고딕"/>
+              </a:rPr>
+              <a:t>단계</a:t>
+            </a:r>
+            <a:r>
+              <a:rPr sz="1300" b="0">
+                <a:solidFill>
+                  <a:srgbClr val="E8EEF6"/>
+                </a:solidFill>
+                <a:latin typeface="Consolas"/>
+                <a:ea typeface="맑은 고딕"/>
+                <a:cs typeface="맑은 고딕"/>
+              </a:rPr>
+              <a:t>          </a:t>
+            </a:r>
+            <a:r>
+              <a:rPr sz="1300" b="0">
+                <a:solidFill>
+                  <a:srgbClr val="E8EEF6"/>
+                </a:solidFill>
+                <a:latin typeface="맑은 고딕"/>
+                <a:ea typeface="맑은 고딕"/>
+                <a:cs typeface="맑은 고딕"/>
+              </a:rPr>
+              <a:t>시작</a:t>
+            </a:r>
+            <a:r>
+              <a:rPr sz="1300" b="0">
+                <a:solidFill>
+                  <a:srgbClr val="E8EEF6"/>
+                </a:solidFill>
+                <a:latin typeface="Consolas"/>
+                <a:ea typeface="맑은 고딕"/>
+                <a:cs typeface="맑은 고딕"/>
+              </a:rPr>
+              <a:t>        </a:t>
+            </a:r>
+            <a:r>
+              <a:rPr sz="1300" b="0">
+                <a:solidFill>
+                  <a:srgbClr val="E8EEF6"/>
+                </a:solidFill>
+                <a:latin typeface="맑은 고딕"/>
+                <a:ea typeface="맑은 고딕"/>
+                <a:cs typeface="맑은 고딕"/>
+              </a:rPr>
+              <a:t>끝</a:t>
+            </a:r>
+          </a:p>
+          <a:p>
+            <a:pPr algn="l">
+              <a:lnSpc>
+                <a:spcPct val="110000"/>
+              </a:lnSpc>
+              <a:spcAft>
+                <a:spcPts val="200"/>
+              </a:spcAft>
+            </a:pPr>
+            <a:r>
+              <a:rPr sz="1300" b="0">
+                <a:solidFill>
+                  <a:srgbClr val="E8EEF6"/>
+                </a:solidFill>
+                <a:latin typeface="Consolas"/>
+                <a:ea typeface="맑은 고딕"/>
+                <a:cs typeface="맑은 고딕"/>
+              </a:rPr>
+              <a:t>T_agent     15:22:46    15:24:08</a:t>
+            </a:r>
+          </a:p>
+          <a:p>
+            <a:pPr algn="l">
+              <a:lnSpc>
+                <a:spcPct val="110000"/>
+              </a:lnSpc>
+              <a:spcAft>
+                <a:spcPts val="200"/>
+              </a:spcAft>
+            </a:pPr>
+            <a:r>
+              <a:rPr sz="1300" b="0">
+                <a:solidFill>
+                  <a:srgbClr val="E8EEF6"/>
+                </a:solidFill>
+                <a:latin typeface="Consolas"/>
+                <a:ea typeface="맑은 고딕"/>
+                <a:cs typeface="맑은 고딕"/>
+              </a:rPr>
+              <a:t>T_approve   15:24:08    15:24:09</a:t>
+            </a:r>
+          </a:p>
+          <a:p>
+            <a:pPr algn="l">
+              <a:lnSpc>
+                <a:spcPct val="110000"/>
+              </a:lnSpc>
+              <a:spcAft>
+                <a:spcPts val="200"/>
+              </a:spcAft>
+            </a:pPr>
+            <a:r>
+              <a:rPr sz="1300" b="0">
+                <a:solidFill>
+                  <a:srgbClr val="E8EEF6"/>
+                </a:solidFill>
+                <a:latin typeface="Consolas"/>
+                <a:ea typeface="맑은 고딕"/>
+                <a:cs typeface="맑은 고딕"/>
+              </a:rPr>
+              <a:t>T_cmd       15:24:09    15:24:10</a:t>
+            </a:r>
+          </a:p>
+          <a:p>
+            <a:pPr algn="l">
+              <a:lnSpc>
+                <a:spcPct val="110000"/>
+              </a:lnSpc>
+              <a:spcAft>
+                <a:spcPts val="200"/>
+              </a:spcAft>
+            </a:pPr>
+            <a:r>
+              <a:rPr sz="1300" b="0">
+                <a:solidFill>
+                  <a:srgbClr val="E8EEF6"/>
+                </a:solidFill>
+                <a:latin typeface="Consolas"/>
+                <a:ea typeface="맑은 고딕"/>
+                <a:cs typeface="맑은 고딕"/>
+              </a:rPr>
+              <a:t>T_reobs     15:24:10    15:25:11</a:t>
+            </a:r>
+          </a:p>
+          <a:p>
+            <a:pPr algn="l">
+              <a:lnSpc>
+                <a:spcPct val="110000"/>
+              </a:lnSpc>
+              <a:spcAft>
+                <a:spcPts val="200"/>
+              </a:spcAft>
+            </a:pPr>
+            <a:r>
+              <a:rPr sz="1300" b="0">
+                <a:solidFill>
+                  <a:srgbClr val="E8EEF6"/>
+                </a:solidFill>
+                <a:latin typeface="Consolas"/>
+                <a:ea typeface="맑은 고딕"/>
+                <a:cs typeface="맑은 고딕"/>
+              </a:rPr>
+              <a:t>T_wo        15:25:11    15:25:12</a:t>
+            </a:r>
+          </a:p>
+          <a:p>
+            <a:pPr algn="l">
+              <a:lnSpc>
+                <a:spcPct val="110000"/>
+              </a:lnSpc>
+              <a:spcAft>
+                <a:spcPts val="200"/>
+              </a:spcAft>
+            </a:pPr>
+            <a:r>
+              <a:rPr sz="1300" b="0">
+                <a:solidFill>
+                  <a:srgbClr val="E8EEF6"/>
+                </a:solidFill>
+                <a:latin typeface="Consolas"/>
+                <a:ea typeface="맑은 고딕"/>
+                <a:cs typeface="맑은 고딕"/>
+              </a:rPr>
+              <a:t>R_ok        15:25:12    15:25:12</a:t>
+            </a:r>
+          </a:p>
+        </p:txBody>
+      </p:sp>
+      <p:sp>
+        <p:nvSpPr>
+          <p:cNvPr id="8" name="TextBox 7"/>
+          <p:cNvSpPr txBox="1"/>
+          <p:nvPr/>
+        </p:nvSpPr>
+        <p:spPr>
+          <a:xfrm>
+            <a:off x="7635240" y="2328291"/>
+            <a:ext cx="4007815" cy="1108710"/>
           </a:xfrm>
           <a:prstGeom prst="rect">
             <a:avLst/>
@@ -9294,31 +9507,76 @@
               <a:lnSpc>
                 <a:spcPct val="110000"/>
               </a:lnSpc>
-            </a:pPr>
-            <a:r>
-              <a:rPr sz="1300" b="1">
-                <a:solidFill>
-                  <a:srgbClr val="FFFFFF"/>
-                </a:solidFill>
-                <a:latin typeface="맑은 고딕"/>
-                <a:ea typeface="맑은 고딕"/>
-                <a:cs typeface="맑은 고딕"/>
-              </a:rPr>
-              <a:t>기록</a:t>
-            </a:r>
-          </a:p>
-        </p:txBody>
-      </p:sp>
-      <p:sp>
-        <p:nvSpPr>
-          <p:cNvPr id="8" name="TextBox 7"/>
-          <p:cNvSpPr txBox="1"/>
-          <p:nvPr/>
-        </p:nvSpPr>
-        <p:spPr>
-          <a:xfrm>
-            <a:off x="3200400" y="1627632"/>
-            <a:ext cx="8442655" cy="347472"/>
+              <a:spcAft>
+                <a:spcPts val="400"/>
+              </a:spcAft>
+            </a:pPr>
+            <a:r>
+              <a:rPr sz="1700" b="1">
+                <a:solidFill>
+                  <a:srgbClr val="13294B"/>
+                </a:solidFill>
+                <a:latin typeface="맑은 고딕"/>
+                <a:ea typeface="맑은 고딕"/>
+                <a:cs typeface="맑은 고딕"/>
+              </a:rPr>
+              <a:t>실행 기록</a:t>
+            </a:r>
+          </a:p>
+          <a:p>
+            <a:pPr algn="l">
+              <a:lnSpc>
+                <a:spcPct val="110000"/>
+              </a:lnSpc>
+              <a:spcAft>
+                <a:spcPts val="400"/>
+              </a:spcAft>
+            </a:pPr>
+            <a:r>
+              <a:rPr sz="1400" b="0">
+                <a:solidFill>
+                  <a:srgbClr val="1F2A3A"/>
+                </a:solidFill>
+                <a:latin typeface="맑은 고딕"/>
+                <a:ea typeface="맑은 고딕"/>
+                <a:cs typeface="맑은 고딕"/>
+              </a:rPr>
+              <a:t>단계의 시작과 끝, 담당,</a:t>
+            </a:r>
+          </a:p>
+          <a:p>
+            <a:pPr algn="l">
+              <a:lnSpc>
+                <a:spcPct val="110000"/>
+              </a:lnSpc>
+              <a:spcAft>
+                <a:spcPts val="400"/>
+              </a:spcAft>
+            </a:pPr>
+            <a:r>
+              <a:rPr sz="1400" b="0">
+                <a:solidFill>
+                  <a:srgbClr val="1F2A3A"/>
+                </a:solidFill>
+                <a:latin typeface="맑은 고딕"/>
+                <a:ea typeface="맑은 고딕"/>
+                <a:cs typeface="맑은 고딕"/>
+              </a:rPr>
+              <a:t>결과가 처리 건에 남는다.</a:t>
+            </a:r>
+          </a:p>
+        </p:txBody>
+      </p:sp>
+      <p:sp>
+        <p:nvSpPr>
+          <p:cNvPr id="9" name="TextBox 8"/>
+          <p:cNvSpPr txBox="1"/>
+          <p:nvPr/>
+        </p:nvSpPr>
+        <p:spPr>
+          <a:xfrm>
+            <a:off x="7635240" y="3437001"/>
+            <a:ext cx="4007815" cy="1108710"/>
           </a:xfrm>
           <a:prstGeom prst="rect">
             <a:avLst/>
@@ -9333,49 +9591,63 @@
               <a:lnSpc>
                 <a:spcPct val="110000"/>
               </a:lnSpc>
-            </a:pPr>
-            <a:r>
-              <a:rPr sz="1300" b="1">
-                <a:solidFill>
-                  <a:srgbClr val="FFFFFF"/>
-                </a:solidFill>
-                <a:latin typeface="맑은 고딕"/>
-                <a:ea typeface="맑은 고딕"/>
-                <a:cs typeface="맑은 고딕"/>
-              </a:rPr>
-              <a:t>남는 때</a:t>
-            </a:r>
-          </a:p>
-        </p:txBody>
-      </p:sp>
-      <p:sp>
-        <p:nvSpPr>
-          <p:cNvPr id="9" name="Rounded Rectangle 8"/>
-          <p:cNvSpPr/>
-          <p:nvPr/>
-        </p:nvSpPr>
-        <p:spPr>
-          <a:xfrm>
-            <a:off x="548640" y="2061972"/>
-            <a:ext cx="11094415" cy="801014"/>
-          </a:xfrm>
-          <a:prstGeom prst="roundRect">
-            <a:avLst>
-              <a:gd name="adj" fmla="val 8000"/>
-            </a:avLst>
-          </a:prstGeom>
-          <a:solidFill>
-            <a:srgbClr val="F3F6F9"/>
-          </a:solidFill>
-          <a:ln>
-            <a:noFill/>
-          </a:ln>
-        </p:spPr>
-        <p:txBody>
-          <a:bodyPr rtlCol="0" anchor="ctr"/>
-          <a:lstStyle/>
-          <a:p>
-            <a:pPr algn="ctr"/>
+              <a:spcAft>
+                <a:spcPts val="400"/>
+              </a:spcAft>
+            </a:pPr>
+            <a:r>
+              <a:rPr sz="1700" b="1">
+                <a:solidFill>
+                  <a:srgbClr val="13294B"/>
+                </a:solidFill>
+                <a:latin typeface="맑은 고딕"/>
+                <a:ea typeface="맑은 고딕"/>
+                <a:cs typeface="맑은 고딕"/>
+              </a:rPr>
+              <a:t>모니터링</a:t>
+            </a:r>
+          </a:p>
+          <a:p>
+            <a:pPr algn="l">
+              <a:lnSpc>
+                <a:spcPct val="110000"/>
+              </a:lnSpc>
+              <a:spcAft>
+                <a:spcPts val="400"/>
+              </a:spcAft>
+            </a:pPr>
+            <a:r>
+              <a:rPr sz="1400" b="0">
+                <a:solidFill>
+                  <a:srgbClr val="1F2A3A"/>
+                </a:solidFill>
+                <a:latin typeface="맑은 고딕"/>
+                <a:ea typeface="맑은 고딕"/>
+                <a:cs typeface="맑은 고딕"/>
+              </a:rPr>
+              <a:t>Monitoring · 이 기록으로</a:t>
+            </a:r>
+          </a:p>
+          <a:p>
+            <a:pPr algn="l">
+              <a:lnSpc>
+                <a:spcPct val="110000"/>
+              </a:lnSpc>
+              <a:spcAft>
+                <a:spcPts val="400"/>
+              </a:spcAft>
+            </a:pPr>
+            <a:r>
+              <a:rPr sz="1400" b="0">
+                <a:solidFill>
+                  <a:srgbClr val="1F2A3A"/>
+                </a:solidFill>
+                <a:latin typeface="맑은 고딕"/>
+                <a:ea typeface="맑은 고딕"/>
+                <a:cs typeface="맑은 고딕"/>
+              </a:rPr>
+              <a:t>진행과 대기를 지켜본다.</a:t>
+            </a:r>
           </a:p>
         </p:txBody>
       </p:sp>
@@ -9387,8 +9659,8 @@
         </p:nvSpPr>
         <p:spPr>
           <a:xfrm>
-            <a:off x="685800" y="2029968"/>
-            <a:ext cx="2514600" cy="865022"/>
+            <a:off x="7635240" y="4545711"/>
+            <a:ext cx="4007815" cy="1108710"/>
           </a:xfrm>
           <a:prstGeom prst="rect">
             <a:avLst/>
@@ -9403,9 +9675,12 @@
               <a:lnSpc>
                 <a:spcPct val="110000"/>
               </a:lnSpc>
-            </a:pPr>
-            <a:r>
-              <a:rPr sz="1600" b="1">
+              <a:spcAft>
+                <a:spcPts val="400"/>
+              </a:spcAft>
+            </a:pPr>
+            <a:r>
+              <a:rPr sz="1700" b="1">
                 <a:solidFill>
                   <a:srgbClr val="13294B"/>
                 </a:solidFill>
@@ -9413,35 +9688,17 @@
                 <a:ea typeface="맑은 고딕"/>
                 <a:cs typeface="맑은 고딕"/>
               </a:rPr>
-              <a:t>INSTANCE_STARTED</a:t>
-            </a:r>
-          </a:p>
-        </p:txBody>
-      </p:sp>
-      <p:sp>
-        <p:nvSpPr>
-          <p:cNvPr id="11" name="TextBox 10"/>
-          <p:cNvSpPr txBox="1"/>
-          <p:nvPr/>
-        </p:nvSpPr>
-        <p:spPr>
-          <a:xfrm>
-            <a:off x="3200400" y="2029968"/>
-            <a:ext cx="8351215" cy="865022"/>
-          </a:xfrm>
-          <a:prstGeom prst="rect">
-            <a:avLst/>
-          </a:prstGeom>
-          <a:noFill/>
-        </p:spPr>
-        <p:txBody>
-          <a:bodyPr wrap="square" anchor="ctr"/>
-          <a:lstStyle/>
-          <a:p>
-            <a:pPr algn="l">
-              <a:lnSpc>
-                <a:spcPct val="110000"/>
-              </a:lnSpc>
+              <a:t>읽는 법</a:t>
+            </a:r>
+          </a:p>
+          <a:p>
+            <a:pPr algn="l">
+              <a:lnSpc>
+                <a:spcPct val="110000"/>
+              </a:lnSpc>
+              <a:spcAft>
+                <a:spcPts val="400"/>
+              </a:spcAft>
             </a:pPr>
             <a:r>
               <a:rPr sz="1400" b="0">
@@ -9452,105 +9709,17 @@
                 <a:ea typeface="맑은 고딕"/>
                 <a:cs typeface="맑은 고딕"/>
               </a:rPr>
-              <a:t>처리 건이 열릴 때</a:t>
-            </a:r>
-          </a:p>
-        </p:txBody>
-      </p:sp>
-      <p:sp>
-        <p:nvSpPr>
-          <p:cNvPr id="12" name="Rounded Rectangle 11"/>
-          <p:cNvSpPr/>
-          <p:nvPr/>
-        </p:nvSpPr>
-        <p:spPr>
-          <a:xfrm>
-            <a:off x="548640" y="2926994"/>
-            <a:ext cx="11094415" cy="801014"/>
-          </a:xfrm>
-          <a:prstGeom prst="roundRect">
-            <a:avLst>
-              <a:gd name="adj" fmla="val 8000"/>
-            </a:avLst>
-          </a:prstGeom>
-          <a:solidFill>
-            <a:srgbClr val="F3F6F9"/>
-          </a:solidFill>
-          <a:ln>
-            <a:noFill/>
-          </a:ln>
-        </p:spPr>
-        <p:txBody>
-          <a:bodyPr rtlCol="0" anchor="ctr"/>
-          <a:lstStyle/>
-          <a:p>
-            <a:pPr algn="ctr"/>
-          </a:p>
-        </p:txBody>
-      </p:sp>
-      <p:sp>
-        <p:nvSpPr>
-          <p:cNvPr id="13" name="TextBox 12"/>
-          <p:cNvSpPr txBox="1"/>
-          <p:nvPr/>
-        </p:nvSpPr>
-        <p:spPr>
-          <a:xfrm>
-            <a:off x="685800" y="2894990"/>
-            <a:ext cx="2514600" cy="865022"/>
-          </a:xfrm>
-          <a:prstGeom prst="rect">
-            <a:avLst/>
-          </a:prstGeom>
-          <a:noFill/>
-        </p:spPr>
-        <p:txBody>
-          <a:bodyPr wrap="square" anchor="ctr"/>
-          <a:lstStyle/>
-          <a:p>
-            <a:pPr algn="l">
-              <a:lnSpc>
-                <a:spcPct val="110000"/>
-              </a:lnSpc>
-            </a:pPr>
-            <a:r>
-              <a:rPr sz="1600" b="1">
-                <a:solidFill>
-                  <a:srgbClr val="13294B"/>
-                </a:solidFill>
-                <a:latin typeface="맑은 고딕"/>
-                <a:ea typeface="맑은 고딕"/>
-                <a:cs typeface="맑은 고딕"/>
-              </a:rPr>
-              <a:t>APPROVAL_ACCEPTED</a:t>
-            </a:r>
-          </a:p>
-        </p:txBody>
-      </p:sp>
-      <p:sp>
-        <p:nvSpPr>
-          <p:cNvPr id="14" name="TextBox 13"/>
-          <p:cNvSpPr txBox="1"/>
-          <p:nvPr/>
-        </p:nvSpPr>
-        <p:spPr>
-          <a:xfrm>
-            <a:off x="3200400" y="2894990"/>
-            <a:ext cx="8351215" cy="865022"/>
-          </a:xfrm>
-          <a:prstGeom prst="rect">
-            <a:avLst/>
-          </a:prstGeom>
-          <a:noFill/>
-        </p:spPr>
-        <p:txBody>
-          <a:bodyPr wrap="square" anchor="ctr"/>
-          <a:lstStyle/>
-          <a:p>
-            <a:pPr algn="l">
-              <a:lnSpc>
-                <a:spcPct val="110000"/>
-              </a:lnSpc>
+              <a:t>끝에서 시작을 빼면</a:t>
+            </a:r>
+          </a:p>
+          <a:p>
+            <a:pPr algn="l">
+              <a:lnSpc>
+                <a:spcPct val="110000"/>
+              </a:lnSpc>
+              <a:spcAft>
+                <a:spcPts val="400"/>
+              </a:spcAft>
             </a:pPr>
             <a:r>
               <a:rPr sz="1400" b="0">
@@ -9561,334 +9730,7 @@
                 <a:ea typeface="맑은 고딕"/>
                 <a:cs typeface="맑은 고딕"/>
               </a:rPr>
-              <a:t>승인이 접수될 때. 승인한 역할과 판단 id가 담긴다</a:t>
-            </a:r>
-          </a:p>
-        </p:txBody>
-      </p:sp>
-      <p:sp>
-        <p:nvSpPr>
-          <p:cNvPr id="15" name="Rounded Rectangle 14"/>
-          <p:cNvSpPr/>
-          <p:nvPr/>
-        </p:nvSpPr>
-        <p:spPr>
-          <a:xfrm>
-            <a:off x="548640" y="3792016"/>
-            <a:ext cx="11094415" cy="801014"/>
-          </a:xfrm>
-          <a:prstGeom prst="roundRect">
-            <a:avLst>
-              <a:gd name="adj" fmla="val 8000"/>
-            </a:avLst>
-          </a:prstGeom>
-          <a:solidFill>
-            <a:srgbClr val="F3F6F9"/>
-          </a:solidFill>
-          <a:ln>
-            <a:noFill/>
-          </a:ln>
-        </p:spPr>
-        <p:txBody>
-          <a:bodyPr rtlCol="0" anchor="ctr"/>
-          <a:lstStyle/>
-          <a:p>
-            <a:pPr algn="ctr"/>
-          </a:p>
-        </p:txBody>
-      </p:sp>
-      <p:sp>
-        <p:nvSpPr>
-          <p:cNvPr id="16" name="TextBox 15"/>
-          <p:cNvSpPr txBox="1"/>
-          <p:nvPr/>
-        </p:nvSpPr>
-        <p:spPr>
-          <a:xfrm>
-            <a:off x="685800" y="3760012"/>
-            <a:ext cx="2514600" cy="865022"/>
-          </a:xfrm>
-          <a:prstGeom prst="rect">
-            <a:avLst/>
-          </a:prstGeom>
-          <a:noFill/>
-        </p:spPr>
-        <p:txBody>
-          <a:bodyPr wrap="square" anchor="ctr"/>
-          <a:lstStyle/>
-          <a:p>
-            <a:pPr algn="l">
-              <a:lnSpc>
-                <a:spcPct val="110000"/>
-              </a:lnSpc>
-            </a:pPr>
-            <a:r>
-              <a:rPr sz="1600" b="1">
-                <a:solidFill>
-                  <a:srgbClr val="13294B"/>
-                </a:solidFill>
-                <a:latin typeface="맑은 고딕"/>
-                <a:ea typeface="맑은 고딕"/>
-                <a:cs typeface="맑은 고딕"/>
-              </a:rPr>
-              <a:t>APPROVAL_DELIVERY</a:t>
-            </a:r>
-          </a:p>
-        </p:txBody>
-      </p:sp>
-      <p:sp>
-        <p:nvSpPr>
-          <p:cNvPr id="17" name="TextBox 16"/>
-          <p:cNvSpPr txBox="1"/>
-          <p:nvPr/>
-        </p:nvSpPr>
-        <p:spPr>
-          <a:xfrm>
-            <a:off x="3200400" y="3760012"/>
-            <a:ext cx="8351215" cy="865022"/>
-          </a:xfrm>
-          <a:prstGeom prst="rect">
-            <a:avLst/>
-          </a:prstGeom>
-          <a:noFill/>
-        </p:spPr>
-        <p:txBody>
-          <a:bodyPr wrap="square" anchor="ctr"/>
-          <a:lstStyle/>
-          <a:p>
-            <a:pPr algn="l">
-              <a:lnSpc>
-                <a:spcPct val="110000"/>
-              </a:lnSpc>
-            </a:pPr>
-            <a:r>
-              <a:rPr sz="1400" b="0">
-                <a:solidFill>
-                  <a:srgbClr val="1F2A3A"/>
-                </a:solidFill>
-                <a:latin typeface="맑은 고딕"/>
-                <a:ea typeface="맑은 고딕"/>
-                <a:cs typeface="맑은 고딕"/>
-              </a:rPr>
-              <a:t>승인이 다음 단계로 전달될 때</a:t>
-            </a:r>
-          </a:p>
-        </p:txBody>
-      </p:sp>
-      <p:sp>
-        <p:nvSpPr>
-          <p:cNvPr id="18" name="Rounded Rectangle 17"/>
-          <p:cNvSpPr/>
-          <p:nvPr/>
-        </p:nvSpPr>
-        <p:spPr>
-          <a:xfrm>
-            <a:off x="548640" y="4657039"/>
-            <a:ext cx="11094415" cy="801014"/>
-          </a:xfrm>
-          <a:prstGeom prst="roundRect">
-            <a:avLst>
-              <a:gd name="adj" fmla="val 8000"/>
-            </a:avLst>
-          </a:prstGeom>
-          <a:solidFill>
-            <a:srgbClr val="F3F6F9"/>
-          </a:solidFill>
-          <a:ln>
-            <a:noFill/>
-          </a:ln>
-        </p:spPr>
-        <p:txBody>
-          <a:bodyPr rtlCol="0" anchor="ctr"/>
-          <a:lstStyle/>
-          <a:p>
-            <a:pPr algn="ctr"/>
-          </a:p>
-        </p:txBody>
-      </p:sp>
-      <p:sp>
-        <p:nvSpPr>
-          <p:cNvPr id="19" name="TextBox 18"/>
-          <p:cNvSpPr txBox="1"/>
-          <p:nvPr/>
-        </p:nvSpPr>
-        <p:spPr>
-          <a:xfrm>
-            <a:off x="685800" y="4625035"/>
-            <a:ext cx="2514600" cy="865022"/>
-          </a:xfrm>
-          <a:prstGeom prst="rect">
-            <a:avLst/>
-          </a:prstGeom>
-          <a:noFill/>
-        </p:spPr>
-        <p:txBody>
-          <a:bodyPr wrap="square" anchor="ctr"/>
-          <a:lstStyle/>
-          <a:p>
-            <a:pPr algn="l">
-              <a:lnSpc>
-                <a:spcPct val="110000"/>
-              </a:lnSpc>
-            </a:pPr>
-            <a:r>
-              <a:rPr sz="1600" b="1">
-                <a:solidFill>
-                  <a:srgbClr val="13294B"/>
-                </a:solidFill>
-                <a:latin typeface="맑은 고딕"/>
-                <a:ea typeface="맑은 고딕"/>
-                <a:cs typeface="맑은 고딕"/>
-              </a:rPr>
-              <a:t>RESULT_REPORT</a:t>
-            </a:r>
-          </a:p>
-        </p:txBody>
-      </p:sp>
-      <p:sp>
-        <p:nvSpPr>
-          <p:cNvPr id="20" name="TextBox 19"/>
-          <p:cNvSpPr txBox="1"/>
-          <p:nvPr/>
-        </p:nvSpPr>
-        <p:spPr>
-          <a:xfrm>
-            <a:off x="3200400" y="4625035"/>
-            <a:ext cx="8351215" cy="865022"/>
-          </a:xfrm>
-          <a:prstGeom prst="rect">
-            <a:avLst/>
-          </a:prstGeom>
-          <a:noFill/>
-        </p:spPr>
-        <p:txBody>
-          <a:bodyPr wrap="square" anchor="ctr"/>
-          <a:lstStyle/>
-          <a:p>
-            <a:pPr algn="l">
-              <a:lnSpc>
-                <a:spcPct val="110000"/>
-              </a:lnSpc>
-            </a:pPr>
-            <a:r>
-              <a:rPr sz="1400" b="0">
-                <a:solidFill>
-                  <a:srgbClr val="1F2A3A"/>
-                </a:solidFill>
-                <a:latin typeface="맑은 고딕"/>
-                <a:ea typeface="맑은 고딕"/>
-                <a:cs typeface="맑은 고딕"/>
-              </a:rPr>
-              <a:t>결과 보고가 나갈 때. 보고의 본문이 담긴다</a:t>
-            </a:r>
-          </a:p>
-        </p:txBody>
-      </p:sp>
-      <p:sp>
-        <p:nvSpPr>
-          <p:cNvPr id="21" name="Rounded Rectangle 20"/>
-          <p:cNvSpPr/>
-          <p:nvPr/>
-        </p:nvSpPr>
-        <p:spPr>
-          <a:xfrm>
-            <a:off x="548640" y="5522061"/>
-            <a:ext cx="11094415" cy="801014"/>
-          </a:xfrm>
-          <a:prstGeom prst="roundRect">
-            <a:avLst>
-              <a:gd name="adj" fmla="val 8000"/>
-            </a:avLst>
-          </a:prstGeom>
-          <a:solidFill>
-            <a:srgbClr val="E7F3FD"/>
-          </a:solidFill>
-          <a:ln>
-            <a:noFill/>
-          </a:ln>
-        </p:spPr>
-        <p:txBody>
-          <a:bodyPr rtlCol="0" anchor="ctr"/>
-          <a:lstStyle/>
-          <a:p>
-            <a:pPr algn="ctr"/>
-          </a:p>
-        </p:txBody>
-      </p:sp>
-      <p:sp>
-        <p:nvSpPr>
-          <p:cNvPr id="22" name="TextBox 21"/>
-          <p:cNvSpPr txBox="1"/>
-          <p:nvPr/>
-        </p:nvSpPr>
-        <p:spPr>
-          <a:xfrm>
-            <a:off x="685800" y="5490057"/>
-            <a:ext cx="2514600" cy="865022"/>
-          </a:xfrm>
-          <a:prstGeom prst="rect">
-            <a:avLst/>
-          </a:prstGeom>
-          <a:noFill/>
-        </p:spPr>
-        <p:txBody>
-          <a:bodyPr wrap="square" anchor="ctr"/>
-          <a:lstStyle/>
-          <a:p>
-            <a:pPr algn="l">
-              <a:lnSpc>
-                <a:spcPct val="110000"/>
-              </a:lnSpc>
-            </a:pPr>
-            <a:r>
-              <a:rPr sz="1600" b="1">
-                <a:solidFill>
-                  <a:srgbClr val="13294B"/>
-                </a:solidFill>
-                <a:latin typeface="맑은 고딕"/>
-                <a:ea typeface="맑은 고딕"/>
-                <a:cs typeface="맑은 고딕"/>
-              </a:rPr>
-              <a:t>DECISION_DENIED</a:t>
-            </a:r>
-          </a:p>
-        </p:txBody>
-      </p:sp>
-      <p:sp>
-        <p:nvSpPr>
-          <p:cNvPr id="23" name="TextBox 22"/>
-          <p:cNvSpPr txBox="1"/>
-          <p:nvPr/>
-        </p:nvSpPr>
-        <p:spPr>
-          <a:xfrm>
-            <a:off x="3200400" y="5490057"/>
-            <a:ext cx="8351215" cy="865022"/>
-          </a:xfrm>
-          <a:prstGeom prst="rect">
-            <a:avLst/>
-          </a:prstGeom>
-          <a:noFill/>
-        </p:spPr>
-        <p:txBody>
-          <a:bodyPr wrap="square" anchor="ctr"/>
-          <a:lstStyle/>
-          <a:p>
-            <a:pPr algn="l">
-              <a:lnSpc>
-                <a:spcPct val="110000"/>
-              </a:lnSpc>
-            </a:pPr>
-            <a:r>
-              <a:rPr sz="1400" b="0">
-                <a:solidFill>
-                  <a:srgbClr val="1F2A3A"/>
-                </a:solidFill>
-                <a:latin typeface="맑은 고딕"/>
-                <a:ea typeface="맑은 고딕"/>
-                <a:cs typeface="맑은 고딕"/>
-              </a:rPr>
-              <a:t>승인 역할이 아닌 쪽이 승인을 시도해 거부될 때</a:t>
+              <a:t>단계에 걸린 시간이다.</a:t>
             </a:r>
           </a:p>
         </p:txBody>
@@ -9953,7 +9795,7 @@
                 <a:ea typeface="맑은 고딕"/>
                 <a:cs typeface="맑은 고딕"/>
               </a:rPr>
-              <a:t>처리 건 한 건을 잇는 식별자</a:t>
+              <a:t>감사 기록(Audit Log): 누가 무엇을 결정했는가</a:t>
             </a:r>
           </a:p>
         </p:txBody>
@@ -9992,7 +9834,7 @@
                 <a:ea typeface="맑은 고딕"/>
                 <a:cs typeface="맑은 고딕"/>
               </a:rPr>
-              <a:t>경보, 판단, 승인, 명령, 작업지시가 식별자로 이어져 있어 끝난 업무를 제안과 승인까지 거슬러 읽을 수 있다.</a:t>
+              <a:t>처리 건 안의 진행은 처리 기록에, 처리 건의 시작과 배포와 거부된 승인은 감사 기록에 남아 결정을 뒤에 확인할 수 있다.</a:t>
             </a:r>
           </a:p>
         </p:txBody>
@@ -10073,12 +9915,12 @@
         </p:nvSpPr>
         <p:spPr>
           <a:xfrm>
-            <a:off x="548640" y="2328291"/>
-            <a:ext cx="6766560" cy="3326129"/>
+            <a:off x="548640" y="1627632"/>
+            <a:ext cx="11094415" cy="347472"/>
           </a:xfrm>
           <a:prstGeom prst="roundRect">
             <a:avLst>
-              <a:gd name="adj" fmla="val 3000"/>
+              <a:gd name="adj" fmla="val 12000"/>
             </a:avLst>
           </a:prstGeom>
           <a:solidFill>
@@ -10104,305 +9946,33 @@
         </p:nvSpPr>
         <p:spPr>
           <a:xfrm>
-            <a:off x="731520" y="2465451"/>
-            <a:ext cx="6400800" cy="3051810"/>
-          </a:xfrm>
-          <a:prstGeom prst="rect">
-            <a:avLst/>
-          </a:prstGeom>
-          <a:noFill/>
-        </p:spPr>
-        <p:txBody>
-          <a:bodyPr wrap="square" anchor="t"/>
-          <a:lstStyle/>
-          <a:p>
-            <a:pPr algn="l">
-              <a:lnSpc>
-                <a:spcPct val="110000"/>
-              </a:lnSpc>
-              <a:spcAft>
-                <a:spcPts val="200"/>
-              </a:spcAft>
-            </a:pPr>
-            <a:r>
-              <a:rPr sz="1300" b="0">
-                <a:solidFill>
-                  <a:srgbClr val="E8EEF6"/>
-                </a:solidFill>
-                <a:latin typeface="Consolas"/>
-                <a:ea typeface="맑은 고딕"/>
-                <a:cs typeface="맑은 고딕"/>
-              </a:rPr>
-              <a:t>ALT-hyd01-0026-767a    </a:t>
-            </a:r>
-            <a:r>
-              <a:rPr sz="1300" b="0">
-                <a:solidFill>
-                  <a:srgbClr val="E8EEF6"/>
-                </a:solidFill>
-                <a:latin typeface="맑은 고딕"/>
-                <a:ea typeface="맑은 고딕"/>
-                <a:cs typeface="맑은 고딕"/>
-              </a:rPr>
-              <a:t>경보</a:t>
-            </a:r>
-          </a:p>
-          <a:p>
-            <a:pPr algn="l">
-              <a:lnSpc>
-                <a:spcPct val="110000"/>
-              </a:lnSpc>
-              <a:spcAft>
-                <a:spcPts val="200"/>
-              </a:spcAft>
-            </a:pPr>
-            <a:r>
-              <a:rPr sz="1300" b="0">
-                <a:solidFill>
-                  <a:srgbClr val="E8EEF6"/>
-                </a:solidFill>
-                <a:latin typeface="Consolas"/>
-                <a:ea typeface="맑은 고딕"/>
-                <a:cs typeface="맑은 고딕"/>
-              </a:rPr>
-              <a:t>c3_cooling.32aca7de    </a:t>
-            </a:r>
-            <a:r>
-              <a:rPr sz="1300" b="0">
-                <a:solidFill>
-                  <a:srgbClr val="E8EEF6"/>
-                </a:solidFill>
-                <a:latin typeface="맑은 고딕"/>
-                <a:ea typeface="맑은 고딕"/>
-                <a:cs typeface="맑은 고딕"/>
-              </a:rPr>
-              <a:t>처리</a:t>
-            </a:r>
-            <a:r>
-              <a:rPr sz="1300" b="0">
-                <a:solidFill>
-                  <a:srgbClr val="E8EEF6"/>
-                </a:solidFill>
-                <a:latin typeface="Consolas"/>
-                <a:ea typeface="맑은 고딕"/>
-                <a:cs typeface="맑은 고딕"/>
-              </a:rPr>
-              <a:t> </a:t>
-            </a:r>
-            <a:r>
-              <a:rPr sz="1300" b="0">
-                <a:solidFill>
-                  <a:srgbClr val="E8EEF6"/>
-                </a:solidFill>
-                <a:latin typeface="맑은 고딕"/>
-                <a:ea typeface="맑은 고딕"/>
-                <a:cs typeface="맑은 고딕"/>
-              </a:rPr>
-              <a:t>건</a:t>
-            </a:r>
-          </a:p>
-          <a:p>
-            <a:pPr algn="l">
-              <a:lnSpc>
-                <a:spcPct val="110000"/>
-              </a:lnSpc>
-              <a:spcAft>
-                <a:spcPts val="200"/>
-              </a:spcAft>
-            </a:pPr>
-            <a:r>
-              <a:rPr sz="1300" b="0">
-                <a:solidFill>
-                  <a:srgbClr val="E8EEF6"/>
-                </a:solidFill>
-                <a:latin typeface="Consolas"/>
-                <a:ea typeface="맑은 고딕"/>
-                <a:cs typeface="맑은 고딕"/>
-              </a:rPr>
-              <a:t>DEC-1010-058-88a6      </a:t>
-            </a:r>
-            <a:r>
-              <a:rPr sz="1300" b="0">
-                <a:solidFill>
-                  <a:srgbClr val="E8EEF6"/>
-                </a:solidFill>
-                <a:latin typeface="맑은 고딕"/>
-                <a:ea typeface="맑은 고딕"/>
-                <a:cs typeface="맑은 고딕"/>
-              </a:rPr>
-              <a:t>판단</a:t>
-            </a:r>
-          </a:p>
-          <a:p>
-            <a:pPr algn="l">
-              <a:lnSpc>
-                <a:spcPct val="110000"/>
-              </a:lnSpc>
-              <a:spcAft>
-                <a:spcPts val="200"/>
-              </a:spcAft>
-            </a:pPr>
-            <a:r>
-              <a:rPr sz="1300" b="0">
-                <a:solidFill>
-                  <a:srgbClr val="E8EEF6"/>
-                </a:solidFill>
-                <a:latin typeface="Consolas"/>
-                <a:ea typeface="맑은 고딕"/>
-                <a:cs typeface="맑은 고딕"/>
-              </a:rPr>
-              <a:t>role:operator          </a:t>
-            </a:r>
-            <a:r>
-              <a:rPr sz="1300" b="0">
-                <a:solidFill>
-                  <a:srgbClr val="E8EEF6"/>
-                </a:solidFill>
-                <a:latin typeface="맑은 고딕"/>
-                <a:ea typeface="맑은 고딕"/>
-                <a:cs typeface="맑은 고딕"/>
-              </a:rPr>
-              <a:t>승인</a:t>
-            </a:r>
-          </a:p>
-          <a:p>
-            <a:pPr algn="l">
-              <a:lnSpc>
-                <a:spcPct val="110000"/>
-              </a:lnSpc>
-              <a:spcAft>
-                <a:spcPts val="200"/>
-              </a:spcAft>
-            </a:pPr>
-            <a:r>
-              <a:rPr sz="1300" b="0">
-                <a:solidFill>
-                  <a:srgbClr val="E8EEF6"/>
-                </a:solidFill>
-                <a:latin typeface="Consolas"/>
-                <a:ea typeface="맑은 고딕"/>
-                <a:cs typeface="맑은 고딕"/>
-              </a:rPr>
-              <a:t>CMD-1010-0001-01d1     </a:t>
-            </a:r>
-            <a:r>
-              <a:rPr sz="1300" b="0">
-                <a:solidFill>
-                  <a:srgbClr val="E8EEF6"/>
-                </a:solidFill>
-                <a:latin typeface="맑은 고딕"/>
-                <a:ea typeface="맑은 고딕"/>
-                <a:cs typeface="맑은 고딕"/>
-              </a:rPr>
-              <a:t>설비</a:t>
-            </a:r>
-            <a:r>
-              <a:rPr sz="1300" b="0">
-                <a:solidFill>
-                  <a:srgbClr val="E8EEF6"/>
-                </a:solidFill>
-                <a:latin typeface="Consolas"/>
-                <a:ea typeface="맑은 고딕"/>
-                <a:cs typeface="맑은 고딕"/>
-              </a:rPr>
-              <a:t> </a:t>
-            </a:r>
-            <a:r>
-              <a:rPr sz="1300" b="0">
-                <a:solidFill>
-                  <a:srgbClr val="E8EEF6"/>
-                </a:solidFill>
-                <a:latin typeface="맑은 고딕"/>
-                <a:ea typeface="맑은 고딕"/>
-                <a:cs typeface="맑은 고딕"/>
-              </a:rPr>
-              <a:t>명령</a:t>
-            </a:r>
-          </a:p>
-          <a:p>
-            <a:pPr algn="l">
-              <a:lnSpc>
-                <a:spcPct val="110000"/>
-              </a:lnSpc>
-              <a:spcAft>
-                <a:spcPts val="200"/>
-              </a:spcAft>
-            </a:pPr>
-            <a:r>
-              <a:rPr sz="1300" b="0">
-                <a:solidFill>
-                  <a:srgbClr val="E8EEF6"/>
-                </a:solidFill>
-                <a:latin typeface="Consolas"/>
-                <a:ea typeface="맑은 고딕"/>
-                <a:cs typeface="맑은 고딕"/>
-              </a:rPr>
-              <a:t>WO-1010-1198           </a:t>
-            </a:r>
-            <a:r>
-              <a:rPr sz="1300" b="0">
-                <a:solidFill>
-                  <a:srgbClr val="E8EEF6"/>
-                </a:solidFill>
-                <a:latin typeface="맑은 고딕"/>
-                <a:ea typeface="맑은 고딕"/>
-                <a:cs typeface="맑은 고딕"/>
-              </a:rPr>
-              <a:t>작업지시</a:t>
-            </a:r>
-          </a:p>
-          <a:p>
-            <a:pPr algn="l">
-              <a:lnSpc>
-                <a:spcPct val="110000"/>
-              </a:lnSpc>
-              <a:spcAft>
-                <a:spcPts val="200"/>
-              </a:spcAft>
-            </a:pPr>
-            <a:r>
-              <a:rPr sz="1300" b="0">
-                <a:solidFill>
-                  <a:srgbClr val="E8EEF6"/>
-                </a:solidFill>
-                <a:latin typeface="Consolas"/>
-                <a:ea typeface="맑은 고딕"/>
-                <a:cs typeface="맑은 고딕"/>
-              </a:rPr>
-              <a:t>E_end                  </a:t>
-            </a:r>
-            <a:r>
-              <a:rPr sz="1300" b="0">
-                <a:solidFill>
-                  <a:srgbClr val="E8EEF6"/>
-                </a:solidFill>
-                <a:latin typeface="맑은 고딕"/>
-                <a:ea typeface="맑은 고딕"/>
-                <a:cs typeface="맑은 고딕"/>
-              </a:rPr>
-              <a:t>끝</a:t>
-            </a:r>
-            <a:r>
-              <a:rPr sz="1300" b="0">
-                <a:solidFill>
-                  <a:srgbClr val="E8EEF6"/>
-                </a:solidFill>
-                <a:latin typeface="Consolas"/>
-                <a:ea typeface="맑은 고딕"/>
-                <a:cs typeface="맑은 고딕"/>
-              </a:rPr>
-              <a:t> </a:t>
-            </a:r>
-            <a:r>
-              <a:rPr sz="1300" b="0">
-                <a:solidFill>
-                  <a:srgbClr val="E8EEF6"/>
-                </a:solidFill>
-                <a:latin typeface="맑은 고딕"/>
-                <a:ea typeface="맑은 고딕"/>
-                <a:cs typeface="맑은 고딕"/>
-              </a:rPr>
-              <a:t>이벤트</a:t>
+            <a:off x="685800" y="1627632"/>
+            <a:ext cx="2514600" cy="347472"/>
+          </a:xfrm>
+          <a:prstGeom prst="rect">
+            <a:avLst/>
+          </a:prstGeom>
+          <a:noFill/>
+        </p:spPr>
+        <p:txBody>
+          <a:bodyPr wrap="square" anchor="ctr"/>
+          <a:lstStyle/>
+          <a:p>
+            <a:pPr algn="l">
+              <a:lnSpc>
+                <a:spcPct val="110000"/>
+              </a:lnSpc>
+            </a:pPr>
+            <a:r>
+              <a:rPr sz="1300" b="1">
+                <a:solidFill>
+                  <a:srgbClr val="FFFFFF"/>
+                </a:solidFill>
+                <a:latin typeface="맑은 고딕"/>
+                <a:ea typeface="맑은 고딕"/>
+                <a:cs typeface="맑은 고딕"/>
+              </a:rPr>
+              <a:t>기록</a:t>
             </a:r>
           </a:p>
         </p:txBody>
@@ -10415,8 +9985,8 @@
         </p:nvSpPr>
         <p:spPr>
           <a:xfrm>
-            <a:off x="7635240" y="2328291"/>
-            <a:ext cx="4007815" cy="1108710"/>
+            <a:off x="3200400" y="1627632"/>
+            <a:ext cx="6248095" cy="347472"/>
           </a:xfrm>
           <a:prstGeom prst="rect">
             <a:avLst/>
@@ -10431,12 +10001,118 @@
               <a:lnSpc>
                 <a:spcPct val="110000"/>
               </a:lnSpc>
-              <a:spcAft>
-                <a:spcPts val="400"/>
-              </a:spcAft>
-            </a:pPr>
-            <a:r>
-              <a:rPr sz="1700" b="1">
+            </a:pPr>
+            <a:r>
+              <a:rPr sz="1300" b="1">
+                <a:solidFill>
+                  <a:srgbClr val="FFFFFF"/>
+                </a:solidFill>
+                <a:latin typeface="맑은 고딕"/>
+                <a:ea typeface="맑은 고딕"/>
+                <a:cs typeface="맑은 고딕"/>
+              </a:rPr>
+              <a:t>남는 때</a:t>
+            </a:r>
+          </a:p>
+        </p:txBody>
+      </p:sp>
+      <p:sp>
+        <p:nvSpPr>
+          <p:cNvPr id="9" name="TextBox 8"/>
+          <p:cNvSpPr txBox="1"/>
+          <p:nvPr/>
+        </p:nvSpPr>
+        <p:spPr>
+          <a:xfrm>
+            <a:off x="9448495" y="1627632"/>
+            <a:ext cx="2194560" cy="347472"/>
+          </a:xfrm>
+          <a:prstGeom prst="rect">
+            <a:avLst/>
+          </a:prstGeom>
+          <a:noFill/>
+        </p:spPr>
+        <p:txBody>
+          <a:bodyPr wrap="square" anchor="ctr"/>
+          <a:lstStyle/>
+          <a:p>
+            <a:pPr algn="l">
+              <a:lnSpc>
+                <a:spcPct val="110000"/>
+              </a:lnSpc>
+            </a:pPr>
+            <a:r>
+              <a:rPr sz="1300" b="1">
+                <a:solidFill>
+                  <a:srgbClr val="FFFFFF"/>
+                </a:solidFill>
+                <a:latin typeface="맑은 고딕"/>
+                <a:ea typeface="맑은 고딕"/>
+                <a:cs typeface="맑은 고딕"/>
+              </a:rPr>
+              <a:t>구분</a:t>
+            </a:r>
+          </a:p>
+        </p:txBody>
+      </p:sp>
+      <p:sp>
+        <p:nvSpPr>
+          <p:cNvPr id="10" name="Rounded Rectangle 9"/>
+          <p:cNvSpPr/>
+          <p:nvPr/>
+        </p:nvSpPr>
+        <p:spPr>
+          <a:xfrm>
+            <a:off x="548640" y="2061972"/>
+            <a:ext cx="11094415" cy="656843"/>
+          </a:xfrm>
+          <a:prstGeom prst="roundRect">
+            <a:avLst>
+              <a:gd name="adj" fmla="val 8000"/>
+            </a:avLst>
+          </a:prstGeom>
+          <a:solidFill>
+            <a:srgbClr val="F3F6F9"/>
+          </a:solidFill>
+          <a:ln>
+            <a:noFill/>
+          </a:ln>
+        </p:spPr>
+        <p:txBody>
+          <a:bodyPr rtlCol="0" anchor="ctr"/>
+          <a:lstStyle/>
+          <a:p>
+            <a:pPr algn="ctr"/>
+          </a:p>
+        </p:txBody>
+      </p:sp>
+      <p:sp>
+        <p:nvSpPr>
+          <p:cNvPr id="11" name="TextBox 10"/>
+          <p:cNvSpPr txBox="1"/>
+          <p:nvPr/>
+        </p:nvSpPr>
+        <p:spPr>
+          <a:xfrm>
+            <a:off x="685800" y="2029968"/>
+            <a:ext cx="2514600" cy="720851"/>
+          </a:xfrm>
+          <a:prstGeom prst="rect">
+            <a:avLst/>
+          </a:prstGeom>
+          <a:noFill/>
+        </p:spPr>
+        <p:txBody>
+          <a:bodyPr wrap="square" anchor="ctr"/>
+          <a:lstStyle/>
+          <a:p>
+            <a:pPr algn="l">
+              <a:lnSpc>
+                <a:spcPct val="110000"/>
+              </a:lnSpc>
+            </a:pPr>
+            <a:r>
+              <a:rPr sz="1600" b="1">
                 <a:solidFill>
                   <a:srgbClr val="13294B"/>
                 </a:solidFill>
@@ -10444,17 +10120,35 @@
                 <a:ea typeface="맑은 고딕"/>
                 <a:cs typeface="맑은 고딕"/>
               </a:rPr>
-              <a:t>제안의 근거</a:t>
-            </a:r>
-          </a:p>
-          <a:p>
-            <a:pPr algn="l">
-              <a:lnSpc>
-                <a:spcPct val="110000"/>
-              </a:lnSpc>
-              <a:spcAft>
-                <a:spcPts val="400"/>
-              </a:spcAft>
+              <a:t>APPROVAL_ACCEPTED</a:t>
+            </a:r>
+          </a:p>
+        </p:txBody>
+      </p:sp>
+      <p:sp>
+        <p:nvSpPr>
+          <p:cNvPr id="12" name="TextBox 11"/>
+          <p:cNvSpPr txBox="1"/>
+          <p:nvPr/>
+        </p:nvSpPr>
+        <p:spPr>
+          <a:xfrm>
+            <a:off x="3200400" y="2029968"/>
+            <a:ext cx="6156655" cy="720851"/>
+          </a:xfrm>
+          <a:prstGeom prst="rect">
+            <a:avLst/>
+          </a:prstGeom>
+          <a:noFill/>
+        </p:spPr>
+        <p:txBody>
+          <a:bodyPr wrap="square" anchor="ctr"/>
+          <a:lstStyle/>
+          <a:p>
+            <a:pPr algn="l">
+              <a:lnSpc>
+                <a:spcPct val="110000"/>
+              </a:lnSpc>
             </a:pPr>
             <a:r>
               <a:rPr sz="1400" b="0">
@@ -10465,17 +10159,144 @@
                 <a:ea typeface="맑은 고딕"/>
                 <a:cs typeface="맑은 고딕"/>
               </a:rPr>
-              <a:t>판단의 식별자로 에이전트가</a:t>
-            </a:r>
-          </a:p>
-          <a:p>
-            <a:pPr algn="l">
-              <a:lnSpc>
-                <a:spcPct val="110000"/>
-              </a:lnSpc>
-              <a:spcAft>
-                <a:spcPts val="400"/>
-              </a:spcAft>
+              <a:t>승인이 접수될 때. 승인한 역할과 판단 id가 담긴다</a:t>
+            </a:r>
+          </a:p>
+        </p:txBody>
+      </p:sp>
+      <p:sp>
+        <p:nvSpPr>
+          <p:cNvPr id="13" name="TextBox 12"/>
+          <p:cNvSpPr txBox="1"/>
+          <p:nvPr/>
+        </p:nvSpPr>
+        <p:spPr>
+          <a:xfrm>
+            <a:off x="9448495" y="2029968"/>
+            <a:ext cx="2103120" cy="720851"/>
+          </a:xfrm>
+          <a:prstGeom prst="rect">
+            <a:avLst/>
+          </a:prstGeom>
+          <a:noFill/>
+        </p:spPr>
+        <p:txBody>
+          <a:bodyPr wrap="square" anchor="ctr"/>
+          <a:lstStyle/>
+          <a:p>
+            <a:pPr algn="l">
+              <a:lnSpc>
+                <a:spcPct val="110000"/>
+              </a:lnSpc>
+            </a:pPr>
+            <a:r>
+              <a:rPr sz="1250" b="1">
+                <a:solidFill>
+                  <a:srgbClr val="556175"/>
+                </a:solidFill>
+                <a:latin typeface="맑은 고딕"/>
+                <a:ea typeface="맑은 고딕"/>
+                <a:cs typeface="맑은 고딕"/>
+              </a:rPr>
+              <a:t>처리 기록</a:t>
+            </a:r>
+          </a:p>
+        </p:txBody>
+      </p:sp>
+      <p:sp>
+        <p:nvSpPr>
+          <p:cNvPr id="14" name="Rounded Rectangle 13"/>
+          <p:cNvSpPr/>
+          <p:nvPr/>
+        </p:nvSpPr>
+        <p:spPr>
+          <a:xfrm>
+            <a:off x="548640" y="2782824"/>
+            <a:ext cx="11094415" cy="656843"/>
+          </a:xfrm>
+          <a:prstGeom prst="roundRect">
+            <a:avLst>
+              <a:gd name="adj" fmla="val 8000"/>
+            </a:avLst>
+          </a:prstGeom>
+          <a:solidFill>
+            <a:srgbClr val="F3F6F9"/>
+          </a:solidFill>
+          <a:ln>
+            <a:noFill/>
+          </a:ln>
+        </p:spPr>
+        <p:txBody>
+          <a:bodyPr rtlCol="0" anchor="ctr"/>
+          <a:lstStyle/>
+          <a:p>
+            <a:pPr algn="ctr"/>
+          </a:p>
+        </p:txBody>
+      </p:sp>
+      <p:sp>
+        <p:nvSpPr>
+          <p:cNvPr id="15" name="TextBox 14"/>
+          <p:cNvSpPr txBox="1"/>
+          <p:nvPr/>
+        </p:nvSpPr>
+        <p:spPr>
+          <a:xfrm>
+            <a:off x="685800" y="2750820"/>
+            <a:ext cx="2514600" cy="720851"/>
+          </a:xfrm>
+          <a:prstGeom prst="rect">
+            <a:avLst/>
+          </a:prstGeom>
+          <a:noFill/>
+        </p:spPr>
+        <p:txBody>
+          <a:bodyPr wrap="square" anchor="ctr"/>
+          <a:lstStyle/>
+          <a:p>
+            <a:pPr algn="l">
+              <a:lnSpc>
+                <a:spcPct val="110000"/>
+              </a:lnSpc>
+            </a:pPr>
+            <a:r>
+              <a:rPr sz="1600" b="1">
+                <a:solidFill>
+                  <a:srgbClr val="13294B"/>
+                </a:solidFill>
+                <a:latin typeface="맑은 고딕"/>
+                <a:ea typeface="맑은 고딕"/>
+                <a:cs typeface="맑은 고딕"/>
+              </a:rPr>
+              <a:t>APPROVAL_DELIVERY</a:t>
+            </a:r>
+          </a:p>
+        </p:txBody>
+      </p:sp>
+      <p:sp>
+        <p:nvSpPr>
+          <p:cNvPr id="16" name="TextBox 15"/>
+          <p:cNvSpPr txBox="1"/>
+          <p:nvPr/>
+        </p:nvSpPr>
+        <p:spPr>
+          <a:xfrm>
+            <a:off x="3200400" y="2750820"/>
+            <a:ext cx="6156655" cy="720851"/>
+          </a:xfrm>
+          <a:prstGeom prst="rect">
+            <a:avLst/>
+          </a:prstGeom>
+          <a:noFill/>
+        </p:spPr>
+        <p:txBody>
+          <a:bodyPr wrap="square" anchor="ctr"/>
+          <a:lstStyle/>
+          <a:p>
+            <a:pPr algn="l">
+              <a:lnSpc>
+                <a:spcPct val="110000"/>
+              </a:lnSpc>
             </a:pPr>
             <a:r>
               <a:rPr sz="1400" b="0">
@@ -10486,21 +10307,21 @@
                 <a:ea typeface="맑은 고딕"/>
                 <a:cs typeface="맑은 고딕"/>
               </a:rPr>
-              <a:t>낸 원인과 추천을 찾는다.</a:t>
-            </a:r>
-          </a:p>
-        </p:txBody>
-      </p:sp>
-      <p:sp>
-        <p:nvSpPr>
-          <p:cNvPr id="9" name="TextBox 8"/>
-          <p:cNvSpPr txBox="1"/>
-          <p:nvPr/>
-        </p:nvSpPr>
-        <p:spPr>
-          <a:xfrm>
-            <a:off x="7635240" y="3437001"/>
-            <a:ext cx="4007815" cy="1108710"/>
+              <a:t>승인이 다음 단계로 전달될 때</a:t>
+            </a:r>
+          </a:p>
+        </p:txBody>
+      </p:sp>
+      <p:sp>
+        <p:nvSpPr>
+          <p:cNvPr id="17" name="TextBox 16"/>
+          <p:cNvSpPr txBox="1"/>
+          <p:nvPr/>
+        </p:nvSpPr>
+        <p:spPr>
+          <a:xfrm>
+            <a:off x="9448495" y="2750820"/>
+            <a:ext cx="2103120" cy="720851"/>
           </a:xfrm>
           <a:prstGeom prst="rect">
             <a:avLst/>
@@ -10515,12 +10336,79 @@
               <a:lnSpc>
                 <a:spcPct val="110000"/>
               </a:lnSpc>
-              <a:spcAft>
-                <a:spcPts val="400"/>
-              </a:spcAft>
-            </a:pPr>
-            <a:r>
-              <a:rPr sz="1700" b="1">
+            </a:pPr>
+            <a:r>
+              <a:rPr sz="1250" b="1">
+                <a:solidFill>
+                  <a:srgbClr val="556175"/>
+                </a:solidFill>
+                <a:latin typeface="맑은 고딕"/>
+                <a:ea typeface="맑은 고딕"/>
+                <a:cs typeface="맑은 고딕"/>
+              </a:rPr>
+              <a:t>처리 기록</a:t>
+            </a:r>
+          </a:p>
+        </p:txBody>
+      </p:sp>
+      <p:sp>
+        <p:nvSpPr>
+          <p:cNvPr id="18" name="Rounded Rectangle 17"/>
+          <p:cNvSpPr/>
+          <p:nvPr/>
+        </p:nvSpPr>
+        <p:spPr>
+          <a:xfrm>
+            <a:off x="548640" y="3503676"/>
+            <a:ext cx="11094415" cy="656843"/>
+          </a:xfrm>
+          <a:prstGeom prst="roundRect">
+            <a:avLst>
+              <a:gd name="adj" fmla="val 8000"/>
+            </a:avLst>
+          </a:prstGeom>
+          <a:solidFill>
+            <a:srgbClr val="F3F6F9"/>
+          </a:solidFill>
+          <a:ln>
+            <a:noFill/>
+          </a:ln>
+        </p:spPr>
+        <p:txBody>
+          <a:bodyPr rtlCol="0" anchor="ctr"/>
+          <a:lstStyle/>
+          <a:p>
+            <a:pPr algn="ctr"/>
+          </a:p>
+        </p:txBody>
+      </p:sp>
+      <p:sp>
+        <p:nvSpPr>
+          <p:cNvPr id="19" name="TextBox 18"/>
+          <p:cNvSpPr txBox="1"/>
+          <p:nvPr/>
+        </p:nvSpPr>
+        <p:spPr>
+          <a:xfrm>
+            <a:off x="685800" y="3471672"/>
+            <a:ext cx="2514600" cy="720851"/>
+          </a:xfrm>
+          <a:prstGeom prst="rect">
+            <a:avLst/>
+          </a:prstGeom>
+          <a:noFill/>
+        </p:spPr>
+        <p:txBody>
+          <a:bodyPr wrap="square" anchor="ctr"/>
+          <a:lstStyle/>
+          <a:p>
+            <a:pPr algn="l">
+              <a:lnSpc>
+                <a:spcPct val="110000"/>
+              </a:lnSpc>
+            </a:pPr>
+            <a:r>
+              <a:rPr sz="1600" b="1">
                 <a:solidFill>
                   <a:srgbClr val="13294B"/>
                 </a:solidFill>
@@ -10528,17 +10416,35 @@
                 <a:ea typeface="맑은 고딕"/>
                 <a:cs typeface="맑은 고딕"/>
               </a:rPr>
-              <a:t>결정의 책임</a:t>
-            </a:r>
-          </a:p>
-          <a:p>
-            <a:pPr algn="l">
-              <a:lnSpc>
-                <a:spcPct val="110000"/>
-              </a:lnSpc>
-              <a:spcAft>
-                <a:spcPts val="400"/>
-              </a:spcAft>
+              <a:t>RESULT_REPORT</a:t>
+            </a:r>
+          </a:p>
+        </p:txBody>
+      </p:sp>
+      <p:sp>
+        <p:nvSpPr>
+          <p:cNvPr id="20" name="TextBox 19"/>
+          <p:cNvSpPr txBox="1"/>
+          <p:nvPr/>
+        </p:nvSpPr>
+        <p:spPr>
+          <a:xfrm>
+            <a:off x="3200400" y="3471672"/>
+            <a:ext cx="6156655" cy="720851"/>
+          </a:xfrm>
+          <a:prstGeom prst="rect">
+            <a:avLst/>
+          </a:prstGeom>
+          <a:noFill/>
+        </p:spPr>
+        <p:txBody>
+          <a:bodyPr wrap="square" anchor="ctr"/>
+          <a:lstStyle/>
+          <a:p>
+            <a:pPr algn="l">
+              <a:lnSpc>
+                <a:spcPct val="110000"/>
+              </a:lnSpc>
             </a:pPr>
             <a:r>
               <a:rPr sz="1400" b="0">
@@ -10549,17 +10455,144 @@
                 <a:ea typeface="맑은 고딕"/>
                 <a:cs typeface="맑은 고딕"/>
               </a:rPr>
-              <a:t>승인 기록에 승인한 역할과</a:t>
-            </a:r>
-          </a:p>
-          <a:p>
-            <a:pPr algn="l">
-              <a:lnSpc>
-                <a:spcPct val="110000"/>
-              </a:lnSpc>
-              <a:spcAft>
-                <a:spcPts val="400"/>
-              </a:spcAft>
+              <a:t>결과 보고가 나갈 때. 보고의 본문이 담긴다</a:t>
+            </a:r>
+          </a:p>
+        </p:txBody>
+      </p:sp>
+      <p:sp>
+        <p:nvSpPr>
+          <p:cNvPr id="21" name="TextBox 20"/>
+          <p:cNvSpPr txBox="1"/>
+          <p:nvPr/>
+        </p:nvSpPr>
+        <p:spPr>
+          <a:xfrm>
+            <a:off x="9448495" y="3471672"/>
+            <a:ext cx="2103120" cy="720851"/>
+          </a:xfrm>
+          <a:prstGeom prst="rect">
+            <a:avLst/>
+          </a:prstGeom>
+          <a:noFill/>
+        </p:spPr>
+        <p:txBody>
+          <a:bodyPr wrap="square" anchor="ctr"/>
+          <a:lstStyle/>
+          <a:p>
+            <a:pPr algn="l">
+              <a:lnSpc>
+                <a:spcPct val="110000"/>
+              </a:lnSpc>
+            </a:pPr>
+            <a:r>
+              <a:rPr sz="1250" b="1">
+                <a:solidFill>
+                  <a:srgbClr val="556175"/>
+                </a:solidFill>
+                <a:latin typeface="맑은 고딕"/>
+                <a:ea typeface="맑은 고딕"/>
+                <a:cs typeface="맑은 고딕"/>
+              </a:rPr>
+              <a:t>처리 기록</a:t>
+            </a:r>
+          </a:p>
+        </p:txBody>
+      </p:sp>
+      <p:sp>
+        <p:nvSpPr>
+          <p:cNvPr id="22" name="Rounded Rectangle 21"/>
+          <p:cNvSpPr/>
+          <p:nvPr/>
+        </p:nvSpPr>
+        <p:spPr>
+          <a:xfrm>
+            <a:off x="548640" y="4224528"/>
+            <a:ext cx="11094415" cy="656843"/>
+          </a:xfrm>
+          <a:prstGeom prst="roundRect">
+            <a:avLst>
+              <a:gd name="adj" fmla="val 8000"/>
+            </a:avLst>
+          </a:prstGeom>
+          <a:solidFill>
+            <a:srgbClr val="F3F6F9"/>
+          </a:solidFill>
+          <a:ln>
+            <a:noFill/>
+          </a:ln>
+        </p:spPr>
+        <p:txBody>
+          <a:bodyPr rtlCol="0" anchor="ctr"/>
+          <a:lstStyle/>
+          <a:p>
+            <a:pPr algn="ctr"/>
+          </a:p>
+        </p:txBody>
+      </p:sp>
+      <p:sp>
+        <p:nvSpPr>
+          <p:cNvPr id="23" name="TextBox 22"/>
+          <p:cNvSpPr txBox="1"/>
+          <p:nvPr/>
+        </p:nvSpPr>
+        <p:spPr>
+          <a:xfrm>
+            <a:off x="685800" y="4192524"/>
+            <a:ext cx="2514600" cy="720851"/>
+          </a:xfrm>
+          <a:prstGeom prst="rect">
+            <a:avLst/>
+          </a:prstGeom>
+          <a:noFill/>
+        </p:spPr>
+        <p:txBody>
+          <a:bodyPr wrap="square" anchor="ctr"/>
+          <a:lstStyle/>
+          <a:p>
+            <a:pPr algn="l">
+              <a:lnSpc>
+                <a:spcPct val="110000"/>
+              </a:lnSpc>
+            </a:pPr>
+            <a:r>
+              <a:rPr sz="1600" b="1">
+                <a:solidFill>
+                  <a:srgbClr val="13294B"/>
+                </a:solidFill>
+                <a:latin typeface="맑은 고딕"/>
+                <a:ea typeface="맑은 고딕"/>
+                <a:cs typeface="맑은 고딕"/>
+              </a:rPr>
+              <a:t>INSTANCE_STARTED</a:t>
+            </a:r>
+          </a:p>
+        </p:txBody>
+      </p:sp>
+      <p:sp>
+        <p:nvSpPr>
+          <p:cNvPr id="24" name="TextBox 23"/>
+          <p:cNvSpPr txBox="1"/>
+          <p:nvPr/>
+        </p:nvSpPr>
+        <p:spPr>
+          <a:xfrm>
+            <a:off x="3200400" y="4192524"/>
+            <a:ext cx="6156655" cy="720851"/>
+          </a:xfrm>
+          <a:prstGeom prst="rect">
+            <a:avLst/>
+          </a:prstGeom>
+          <a:noFill/>
+        </p:spPr>
+        <p:txBody>
+          <a:bodyPr wrap="square" anchor="ctr"/>
+          <a:lstStyle/>
+          <a:p>
+            <a:pPr algn="l">
+              <a:lnSpc>
+                <a:spcPct val="110000"/>
+              </a:lnSpc>
             </a:pPr>
             <a:r>
               <a:rPr sz="1400" b="0">
@@ -10570,21 +10603,21 @@
                 <a:ea typeface="맑은 고딕"/>
                 <a:cs typeface="맑은 고딕"/>
               </a:rPr>
-              <a:t>판단의 식별자가 남는다.</a:t>
-            </a:r>
-          </a:p>
-        </p:txBody>
-      </p:sp>
-      <p:sp>
-        <p:nvSpPr>
-          <p:cNvPr id="10" name="TextBox 9"/>
-          <p:cNvSpPr txBox="1"/>
-          <p:nvPr/>
-        </p:nvSpPr>
-        <p:spPr>
-          <a:xfrm>
-            <a:off x="7635240" y="4545711"/>
-            <a:ext cx="4007815" cy="1108710"/>
+              <a:t>처리 건이 열릴 때</a:t>
+            </a:r>
+          </a:p>
+        </p:txBody>
+      </p:sp>
+      <p:sp>
+        <p:nvSpPr>
+          <p:cNvPr id="25" name="TextBox 24"/>
+          <p:cNvSpPr txBox="1"/>
+          <p:nvPr/>
+        </p:nvSpPr>
+        <p:spPr>
+          <a:xfrm>
+            <a:off x="9448495" y="4192524"/>
+            <a:ext cx="2103120" cy="720851"/>
           </a:xfrm>
           <a:prstGeom prst="rect">
             <a:avLst/>
@@ -10599,12 +10632,79 @@
               <a:lnSpc>
                 <a:spcPct val="110000"/>
               </a:lnSpc>
-              <a:spcAft>
-                <a:spcPts val="400"/>
-              </a:spcAft>
-            </a:pPr>
-            <a:r>
-              <a:rPr sz="1700" b="1">
+            </a:pPr>
+            <a:r>
+              <a:rPr sz="1250" b="1">
+                <a:solidFill>
+                  <a:srgbClr val="556175"/>
+                </a:solidFill>
+                <a:latin typeface="맑은 고딕"/>
+                <a:ea typeface="맑은 고딕"/>
+                <a:cs typeface="맑은 고딕"/>
+              </a:rPr>
+              <a:t>감사 기록</a:t>
+            </a:r>
+          </a:p>
+        </p:txBody>
+      </p:sp>
+      <p:sp>
+        <p:nvSpPr>
+          <p:cNvPr id="26" name="Rounded Rectangle 25"/>
+          <p:cNvSpPr/>
+          <p:nvPr/>
+        </p:nvSpPr>
+        <p:spPr>
+          <a:xfrm>
+            <a:off x="548640" y="4945380"/>
+            <a:ext cx="11094415" cy="656843"/>
+          </a:xfrm>
+          <a:prstGeom prst="roundRect">
+            <a:avLst>
+              <a:gd name="adj" fmla="val 8000"/>
+            </a:avLst>
+          </a:prstGeom>
+          <a:solidFill>
+            <a:srgbClr val="F3F6F9"/>
+          </a:solidFill>
+          <a:ln>
+            <a:noFill/>
+          </a:ln>
+        </p:spPr>
+        <p:txBody>
+          <a:bodyPr rtlCol="0" anchor="ctr"/>
+          <a:lstStyle/>
+          <a:p>
+            <a:pPr algn="ctr"/>
+          </a:p>
+        </p:txBody>
+      </p:sp>
+      <p:sp>
+        <p:nvSpPr>
+          <p:cNvPr id="27" name="TextBox 26"/>
+          <p:cNvSpPr txBox="1"/>
+          <p:nvPr/>
+        </p:nvSpPr>
+        <p:spPr>
+          <a:xfrm>
+            <a:off x="685800" y="4913376"/>
+            <a:ext cx="2514600" cy="720851"/>
+          </a:xfrm>
+          <a:prstGeom prst="rect">
+            <a:avLst/>
+          </a:prstGeom>
+          <a:noFill/>
+        </p:spPr>
+        <p:txBody>
+          <a:bodyPr wrap="square" anchor="ctr"/>
+          <a:lstStyle/>
+          <a:p>
+            <a:pPr algn="l">
+              <a:lnSpc>
+                <a:spcPct val="110000"/>
+              </a:lnSpc>
+            </a:pPr>
+            <a:r>
+              <a:rPr sz="1600" b="1">
                 <a:solidFill>
                   <a:srgbClr val="13294B"/>
                 </a:solidFill>
@@ -10612,17 +10712,35 @@
                 <a:ea typeface="맑은 고딕"/>
                 <a:cs typeface="맑은 고딕"/>
               </a:rPr>
-              <a:t>실행의 결과</a:t>
-            </a:r>
-          </a:p>
-          <a:p>
-            <a:pPr algn="l">
-              <a:lnSpc>
-                <a:spcPct val="110000"/>
-              </a:lnSpc>
-              <a:spcAft>
-                <a:spcPts val="400"/>
-              </a:spcAft>
+              <a:t>DEFINITION_DEPLOYED</a:t>
+            </a:r>
+          </a:p>
+        </p:txBody>
+      </p:sp>
+      <p:sp>
+        <p:nvSpPr>
+          <p:cNvPr id="28" name="TextBox 27"/>
+          <p:cNvSpPr txBox="1"/>
+          <p:nvPr/>
+        </p:nvSpPr>
+        <p:spPr>
+          <a:xfrm>
+            <a:off x="3200400" y="4913376"/>
+            <a:ext cx="6156655" cy="720851"/>
+          </a:xfrm>
+          <a:prstGeom prst="rect">
+            <a:avLst/>
+          </a:prstGeom>
+          <a:noFill/>
+        </p:spPr>
+        <p:txBody>
+          <a:bodyPr wrap="square" anchor="ctr"/>
+          <a:lstStyle/>
+          <a:p>
+            <a:pPr algn="l">
+              <a:lnSpc>
+                <a:spcPct val="110000"/>
+              </a:lnSpc>
             </a:pPr>
             <a:r>
               <a:rPr sz="1400" b="0">
@@ -10633,17 +10751,144 @@
                 <a:ea typeface="맑은 고딕"/>
                 <a:cs typeface="맑은 고딕"/>
               </a:rPr>
-              <a:t>명령과 작업지시의 번호가</a:t>
-            </a:r>
-          </a:p>
-          <a:p>
-            <a:pPr algn="l">
-              <a:lnSpc>
-                <a:spcPct val="110000"/>
-              </a:lnSpc>
-              <a:spcAft>
-                <a:spcPts val="400"/>
-              </a:spcAft>
+              <a:t>프로세스 정의의 판본이 배포될 때</a:t>
+            </a:r>
+          </a:p>
+        </p:txBody>
+      </p:sp>
+      <p:sp>
+        <p:nvSpPr>
+          <p:cNvPr id="29" name="TextBox 28"/>
+          <p:cNvSpPr txBox="1"/>
+          <p:nvPr/>
+        </p:nvSpPr>
+        <p:spPr>
+          <a:xfrm>
+            <a:off x="9448495" y="4913376"/>
+            <a:ext cx="2103120" cy="720851"/>
+          </a:xfrm>
+          <a:prstGeom prst="rect">
+            <a:avLst/>
+          </a:prstGeom>
+          <a:noFill/>
+        </p:spPr>
+        <p:txBody>
+          <a:bodyPr wrap="square" anchor="ctr"/>
+          <a:lstStyle/>
+          <a:p>
+            <a:pPr algn="l">
+              <a:lnSpc>
+                <a:spcPct val="110000"/>
+              </a:lnSpc>
+            </a:pPr>
+            <a:r>
+              <a:rPr sz="1250" b="1">
+                <a:solidFill>
+                  <a:srgbClr val="556175"/>
+                </a:solidFill>
+                <a:latin typeface="맑은 고딕"/>
+                <a:ea typeface="맑은 고딕"/>
+                <a:cs typeface="맑은 고딕"/>
+              </a:rPr>
+              <a:t>감사 기록</a:t>
+            </a:r>
+          </a:p>
+        </p:txBody>
+      </p:sp>
+      <p:sp>
+        <p:nvSpPr>
+          <p:cNvPr id="30" name="Rounded Rectangle 29"/>
+          <p:cNvSpPr/>
+          <p:nvPr/>
+        </p:nvSpPr>
+        <p:spPr>
+          <a:xfrm>
+            <a:off x="548640" y="5666232"/>
+            <a:ext cx="11094415" cy="656843"/>
+          </a:xfrm>
+          <a:prstGeom prst="roundRect">
+            <a:avLst>
+              <a:gd name="adj" fmla="val 8000"/>
+            </a:avLst>
+          </a:prstGeom>
+          <a:solidFill>
+            <a:srgbClr val="E7F3FD"/>
+          </a:solidFill>
+          <a:ln>
+            <a:noFill/>
+          </a:ln>
+        </p:spPr>
+        <p:txBody>
+          <a:bodyPr rtlCol="0" anchor="ctr"/>
+          <a:lstStyle/>
+          <a:p>
+            <a:pPr algn="ctr"/>
+          </a:p>
+        </p:txBody>
+      </p:sp>
+      <p:sp>
+        <p:nvSpPr>
+          <p:cNvPr id="31" name="TextBox 30"/>
+          <p:cNvSpPr txBox="1"/>
+          <p:nvPr/>
+        </p:nvSpPr>
+        <p:spPr>
+          <a:xfrm>
+            <a:off x="685800" y="5634228"/>
+            <a:ext cx="2514600" cy="720851"/>
+          </a:xfrm>
+          <a:prstGeom prst="rect">
+            <a:avLst/>
+          </a:prstGeom>
+          <a:noFill/>
+        </p:spPr>
+        <p:txBody>
+          <a:bodyPr wrap="square" anchor="ctr"/>
+          <a:lstStyle/>
+          <a:p>
+            <a:pPr algn="l">
+              <a:lnSpc>
+                <a:spcPct val="110000"/>
+              </a:lnSpc>
+            </a:pPr>
+            <a:r>
+              <a:rPr sz="1600" b="1">
+                <a:solidFill>
+                  <a:srgbClr val="13294B"/>
+                </a:solidFill>
+                <a:latin typeface="맑은 고딕"/>
+                <a:ea typeface="맑은 고딕"/>
+                <a:cs typeface="맑은 고딕"/>
+              </a:rPr>
+              <a:t>DECISION_DENIED</a:t>
+            </a:r>
+          </a:p>
+        </p:txBody>
+      </p:sp>
+      <p:sp>
+        <p:nvSpPr>
+          <p:cNvPr id="32" name="TextBox 31"/>
+          <p:cNvSpPr txBox="1"/>
+          <p:nvPr/>
+        </p:nvSpPr>
+        <p:spPr>
+          <a:xfrm>
+            <a:off x="3200400" y="5634228"/>
+            <a:ext cx="6156655" cy="720851"/>
+          </a:xfrm>
+          <a:prstGeom prst="rect">
+            <a:avLst/>
+          </a:prstGeom>
+          <a:noFill/>
+        </p:spPr>
+        <p:txBody>
+          <a:bodyPr wrap="square" anchor="ctr"/>
+          <a:lstStyle/>
+          <a:p>
+            <a:pPr algn="l">
+              <a:lnSpc>
+                <a:spcPct val="110000"/>
+              </a:lnSpc>
             </a:pPr>
             <a:r>
               <a:rPr sz="1400" b="0">
@@ -10654,7 +10899,46 @@
                 <a:ea typeface="맑은 고딕"/>
                 <a:cs typeface="맑은 고딕"/>
               </a:rPr>
-              <a:t>업무 시스템의 기록을 가리킨다.</a:t>
+              <a:t>승인 역할이 아닌 쪽이 승인을 시도해 거부될 때</a:t>
+            </a:r>
+          </a:p>
+        </p:txBody>
+      </p:sp>
+      <p:sp>
+        <p:nvSpPr>
+          <p:cNvPr id="33" name="TextBox 32"/>
+          <p:cNvSpPr txBox="1"/>
+          <p:nvPr/>
+        </p:nvSpPr>
+        <p:spPr>
+          <a:xfrm>
+            <a:off x="9448495" y="5634228"/>
+            <a:ext cx="2103120" cy="720851"/>
+          </a:xfrm>
+          <a:prstGeom prst="rect">
+            <a:avLst/>
+          </a:prstGeom>
+          <a:noFill/>
+        </p:spPr>
+        <p:txBody>
+          <a:bodyPr wrap="square" anchor="ctr"/>
+          <a:lstStyle/>
+          <a:p>
+            <a:pPr algn="l">
+              <a:lnSpc>
+                <a:spcPct val="110000"/>
+              </a:lnSpc>
+            </a:pPr>
+            <a:r>
+              <a:rPr sz="1250" b="1">
+                <a:solidFill>
+                  <a:srgbClr val="1A6FC4"/>
+                </a:solidFill>
+                <a:latin typeface="맑은 고딕"/>
+                <a:ea typeface="맑은 고딕"/>
+                <a:cs typeface="맑은 고딕"/>
+              </a:rPr>
+              <a:t>감사 기록</a:t>
             </a:r>
           </a:p>
         </p:txBody>
@@ -10719,7 +11003,7 @@
                 <a:ea typeface="맑은 고딕"/>
                 <a:cs typeface="맑은 고딕"/>
               </a:rPr>
-              <a:t>처리 건 한 건에 남는 기록</a:t>
+              <a:t>처리 건 한 건을 잇는 식별자</a:t>
             </a:r>
           </a:p>
         </p:txBody>
@@ -10758,7 +11042,7 @@
                 <a:ea typeface="맑은 고딕"/>
                 <a:cs typeface="맑은 고딕"/>
               </a:rPr>
-              <a:t>처리 건에는 어느 정의의 어느 판본으로, 어느 경보에서 열려, 어느 끝 이벤트에 닿았는지가 남는다.</a:t>
+              <a:t>쿨러 성능 저하 경보 한 건은 경보에서 끝까지의 자리를 차례로 지났고, 자리마다 식별자가 붙은 기록이 남았다.</a:t>
             </a:r>
           </a:p>
         </p:txBody>
@@ -10831,37 +11115,30 @@
           </a:p>
         </p:txBody>
       </p:sp>
-      <p:sp>
-        <p:nvSpPr>
-          <p:cNvPr id="6" name="Rounded Rectangle 5"/>
-          <p:cNvSpPr/>
-          <p:nvPr/>
-        </p:nvSpPr>
-        <p:spPr>
-          <a:xfrm>
-            <a:off x="548640" y="2328291"/>
-            <a:ext cx="6766560" cy="3326129"/>
-          </a:xfrm>
-          <a:prstGeom prst="roundRect">
-            <a:avLst>
-              <a:gd name="adj" fmla="val 3000"/>
-            </a:avLst>
-          </a:prstGeom>
-          <a:solidFill>
-            <a:srgbClr val="13294B"/>
-          </a:solidFill>
-          <a:ln>
-            <a:noFill/>
-          </a:ln>
-        </p:spPr>
-        <p:txBody>
-          <a:bodyPr rtlCol="0" anchor="ctr"/>
-          <a:lstStyle/>
-          <a:p>
-            <a:pPr algn="ctr"/>
-          </a:p>
-        </p:txBody>
-      </p:sp>
+      <p:pic>
+        <p:nvPicPr>
+          <p:cNvPr id="6" name="삽화:사건선_전체.svg" descr="illust_4338746720933726929_1791770778.png"/>
+          <p:cNvPicPr>
+            <a:picLocks noChangeAspect="1"/>
+          </p:cNvPicPr>
+          <p:nvPr/>
+        </p:nvPicPr>
+        <p:blipFill>
+          <a:blip r:embed="rId3"/>
+          <a:stretch>
+            <a:fillRect/>
+          </a:stretch>
+        </p:blipFill>
+        <p:spPr>
+          <a:xfrm>
+            <a:off x="641100" y="1627632"/>
+            <a:ext cx="10909495" cy="4727448"/>
+          </a:xfrm>
+          <a:prstGeom prst="rect">
+            <a:avLst/>
+          </a:prstGeom>
+        </p:spPr>
+      </p:pic>
       <p:sp>
         <p:nvSpPr>
           <p:cNvPr id="7" name="TextBox 6"/>
@@ -10870,8 +11147,8 @@
         </p:nvSpPr>
         <p:spPr>
           <a:xfrm>
-            <a:off x="731520" y="2465451"/>
-            <a:ext cx="6400800" cy="3051810"/>
+            <a:off x="2495714" y="2194925"/>
+            <a:ext cx="7200266" cy="507618"/>
           </a:xfrm>
           <a:prstGeom prst="rect">
             <a:avLst/>
@@ -10882,229 +11159,205 @@
           <a:bodyPr wrap="square" anchor="t"/>
           <a:lstStyle/>
           <a:p>
-            <a:pPr algn="l">
+            <a:pPr algn="ctr">
               <a:lnSpc>
                 <a:spcPct val="110000"/>
               </a:lnSpc>
               <a:spcAft>
-                <a:spcPts val="200"/>
+                <a:spcPts val="100"/>
               </a:spcAft>
             </a:pPr>
             <a:r>
-              <a:rPr sz="1300" b="0">
-                <a:solidFill>
-                  <a:srgbClr val="E8EEF6"/>
-                </a:solidFill>
-                <a:latin typeface="Consolas"/>
-                <a:ea typeface="맑은 고딕"/>
-                <a:cs typeface="맑은 고딕"/>
-              </a:rPr>
-              <a:t>"proc_inst_name": "</a:t>
-            </a:r>
-            <a:r>
-              <a:rPr sz="1300" b="0">
-                <a:solidFill>
-                  <a:srgbClr val="E8EEF6"/>
-                </a:solidFill>
-                <a:latin typeface="맑은 고딕"/>
-                <a:ea typeface="맑은 고딕"/>
-                <a:cs typeface="맑은 고딕"/>
-              </a:rPr>
-              <a:t>냉각</a:t>
-            </a:r>
-            <a:r>
-              <a:rPr sz="1300" b="0">
-                <a:solidFill>
-                  <a:srgbClr val="E8EEF6"/>
-                </a:solidFill>
-                <a:latin typeface="Consolas"/>
-                <a:ea typeface="맑은 고딕"/>
-                <a:cs typeface="맑은 고딕"/>
-              </a:rPr>
-              <a:t> </a:t>
-            </a:r>
-            <a:r>
-              <a:rPr sz="1300" b="0">
-                <a:solidFill>
-                  <a:srgbClr val="E8EEF6"/>
-                </a:solidFill>
-                <a:latin typeface="맑은 고딕"/>
-                <a:ea typeface="맑은 고딕"/>
-                <a:cs typeface="맑은 고딕"/>
-              </a:rPr>
-              <a:t>긴급</a:t>
-            </a:r>
-            <a:r>
-              <a:rPr sz="1300" b="0">
-                <a:solidFill>
-                  <a:srgbClr val="E8EEF6"/>
-                </a:solidFill>
-                <a:latin typeface="Consolas"/>
-                <a:ea typeface="맑은 고딕"/>
-                <a:cs typeface="맑은 고딕"/>
-              </a:rPr>
-              <a:t> </a:t>
-            </a:r>
-            <a:r>
-              <a:rPr sz="1300" b="0">
-                <a:solidFill>
-                  <a:srgbClr val="E8EEF6"/>
-                </a:solidFill>
-                <a:latin typeface="맑은 고딕"/>
-                <a:ea typeface="맑은 고딕"/>
-                <a:cs typeface="맑은 고딕"/>
-              </a:rPr>
-              <a:t>대응</a:t>
-            </a:r>
-            <a:r>
-              <a:rPr sz="1300" b="0">
-                <a:solidFill>
-                  <a:srgbClr val="E8EEF6"/>
-                </a:solidFill>
-                <a:latin typeface="Consolas"/>
-                <a:ea typeface="맑은 고딕"/>
-                <a:cs typeface="맑은 고딕"/>
-              </a:rPr>
-              <a:t> HYD-01",</a:t>
-            </a:r>
-          </a:p>
-          <a:p>
-            <a:pPr algn="l">
+              <a:rPr sz="1350" b="1">
+                <a:solidFill>
+                  <a:srgbClr val="1A6FC4"/>
+                </a:solidFill>
+                <a:latin typeface="맑은 고딕"/>
+                <a:ea typeface="맑은 고딕"/>
+                <a:cs typeface="맑은 고딕"/>
+              </a:rPr>
+              <a:t>긴급 대응 프로세스의 처리 건 한 건</a:t>
+            </a:r>
+          </a:p>
+          <a:p>
+            <a:pPr algn="ctr">
               <a:lnSpc>
                 <a:spcPct val="110000"/>
               </a:lnSpc>
               <a:spcAft>
-                <a:spcPts val="200"/>
+                <a:spcPts val="100"/>
               </a:spcAft>
             </a:pPr>
             <a:r>
-              <a:rPr sz="1300" b="0">
-                <a:solidFill>
-                  <a:srgbClr val="E8EEF6"/>
-                </a:solidFill>
-                <a:latin typeface="Consolas"/>
-                <a:ea typeface="맑은 고딕"/>
-                <a:cs typeface="맑은 고딕"/>
-              </a:rPr>
-              <a:t>"proc_def_id": "c3_cooling",</a:t>
-            </a:r>
-          </a:p>
-          <a:p>
-            <a:pPr algn="l">
+              <a:rPr sz="1100" b="0">
+                <a:solidFill>
+                  <a:srgbClr val="556175"/>
+                </a:solidFill>
+                <a:latin typeface="맑은 고딕"/>
+                <a:ea typeface="맑은 고딕"/>
+                <a:cs typeface="맑은 고딕"/>
+              </a:rPr>
+              <a:t>자리마다 남은 식별자로 끝난 업무를 거슬러 읽는다</a:t>
+            </a:r>
+          </a:p>
+        </p:txBody>
+      </p:sp>
+      <p:sp>
+        <p:nvSpPr>
+          <p:cNvPr id="8" name="TextBox 7"/>
+          <p:cNvSpPr txBox="1"/>
+          <p:nvPr/>
+        </p:nvSpPr>
+        <p:spPr>
+          <a:xfrm>
+            <a:off x="646554" y="4275002"/>
+            <a:ext cx="1352777" cy="678053"/>
+          </a:xfrm>
+          <a:prstGeom prst="rect">
+            <a:avLst/>
+          </a:prstGeom>
+          <a:noFill/>
+        </p:spPr>
+        <p:txBody>
+          <a:bodyPr wrap="square" anchor="t"/>
+          <a:lstStyle/>
+          <a:p>
+            <a:pPr algn="ctr">
               <a:lnSpc>
                 <a:spcPct val="110000"/>
               </a:lnSpc>
               <a:spcAft>
-                <a:spcPts val="200"/>
+                <a:spcPts val="100"/>
               </a:spcAft>
             </a:pPr>
             <a:r>
-              <a:rPr sz="1300" b="0">
-                <a:solidFill>
-                  <a:srgbClr val="E8EEF6"/>
-                </a:solidFill>
-                <a:latin typeface="Consolas"/>
-                <a:ea typeface="맑은 고딕"/>
-                <a:cs typeface="맑은 고딕"/>
-              </a:rPr>
-              <a:t>"proc_def_version": "9",</a:t>
-            </a:r>
-          </a:p>
-          <a:p>
-            <a:pPr algn="l">
+              <a:rPr sz="1350" b="1">
+                <a:solidFill>
+                  <a:srgbClr val="13294B"/>
+                </a:solidFill>
+                <a:latin typeface="맑은 고딕"/>
+                <a:ea typeface="맑은 고딕"/>
+                <a:cs typeface="맑은 고딕"/>
+              </a:rPr>
+              <a:t>경보</a:t>
+            </a:r>
+          </a:p>
+          <a:p>
+            <a:pPr algn="ctr">
               <a:lnSpc>
                 <a:spcPct val="110000"/>
               </a:lnSpc>
               <a:spcAft>
-                <a:spcPts val="200"/>
+                <a:spcPts val="100"/>
               </a:spcAft>
             </a:pPr>
             <a:r>
-              <a:rPr sz="1300" b="0">
-                <a:solidFill>
-                  <a:srgbClr val="E8EEF6"/>
-                </a:solidFill>
-                <a:latin typeface="Consolas"/>
-                <a:ea typeface="맑은 고딕"/>
-                <a:cs typeface="맑은 고딕"/>
-              </a:rPr>
-              <a:t>"start_event_id": "ALT-hyd01-0026-767a",</a:t>
-            </a:r>
-          </a:p>
-          <a:p>
-            <a:pPr algn="l">
+              <a:rPr sz="1100" b="0">
+                <a:solidFill>
+                  <a:srgbClr val="556175"/>
+                </a:solidFill>
+                <a:latin typeface="맑은 고딕"/>
+                <a:ea typeface="맑은 고딕"/>
+                <a:cs typeface="맑은 고딕"/>
+              </a:rPr>
+              <a:t>ALT-hyd01-0026-767a</a:t>
+            </a:r>
+          </a:p>
+        </p:txBody>
+      </p:sp>
+      <p:sp>
+        <p:nvSpPr>
+          <p:cNvPr id="9" name="TextBox 8"/>
+          <p:cNvSpPr txBox="1"/>
+          <p:nvPr/>
+        </p:nvSpPr>
+        <p:spPr>
+          <a:xfrm>
+            <a:off x="2010241" y="4275002"/>
+            <a:ext cx="1352777" cy="678053"/>
+          </a:xfrm>
+          <a:prstGeom prst="rect">
+            <a:avLst/>
+          </a:prstGeom>
+          <a:noFill/>
+        </p:spPr>
+        <p:txBody>
+          <a:bodyPr wrap="square" anchor="t"/>
+          <a:lstStyle/>
+          <a:p>
+            <a:pPr algn="ctr">
               <a:lnSpc>
                 <a:spcPct val="110000"/>
               </a:lnSpc>
               <a:spcAft>
-                <a:spcPts val="200"/>
+                <a:spcPts val="100"/>
               </a:spcAft>
             </a:pPr>
             <a:r>
-              <a:rPr sz="1300" b="0">
-                <a:solidFill>
-                  <a:srgbClr val="E8EEF6"/>
-                </a:solidFill>
-                <a:latin typeface="Consolas"/>
-                <a:ea typeface="맑은 고딕"/>
-                <a:cs typeface="맑은 고딕"/>
-              </a:rPr>
-              <a:t>"status": "COMPLETED",</a:t>
-            </a:r>
-          </a:p>
-          <a:p>
-            <a:pPr algn="l">
+              <a:rPr sz="1350" b="1">
+                <a:solidFill>
+                  <a:srgbClr val="13294B"/>
+                </a:solidFill>
+                <a:latin typeface="맑은 고딕"/>
+                <a:ea typeface="맑은 고딕"/>
+                <a:cs typeface="맑은 고딕"/>
+              </a:rPr>
+              <a:t>진단 · 제안</a:t>
+            </a:r>
+          </a:p>
+          <a:p>
+            <a:pPr algn="ctr">
               <a:lnSpc>
                 <a:spcPct val="110000"/>
               </a:lnSpc>
               <a:spcAft>
-                <a:spcPts val="200"/>
+                <a:spcPts val="100"/>
               </a:spcAft>
             </a:pPr>
             <a:r>
-              <a:rPr sz="1300" b="0">
-                <a:solidFill>
-                  <a:srgbClr val="E8EEF6"/>
-                </a:solidFill>
-                <a:latin typeface="Consolas"/>
-                <a:ea typeface="맑은 고딕"/>
-                <a:cs typeface="맑은 고딕"/>
-              </a:rPr>
-              <a:t>"end_event": "E_end"</a:t>
-            </a:r>
-          </a:p>
-        </p:txBody>
-      </p:sp>
-      <p:sp>
-        <p:nvSpPr>
-          <p:cNvPr id="8" name="TextBox 7"/>
-          <p:cNvSpPr txBox="1"/>
-          <p:nvPr/>
-        </p:nvSpPr>
-        <p:spPr>
-          <a:xfrm>
-            <a:off x="7635240" y="2328291"/>
-            <a:ext cx="4007815" cy="1108710"/>
-          </a:xfrm>
-          <a:prstGeom prst="rect">
-            <a:avLst/>
-          </a:prstGeom>
-          <a:noFill/>
-        </p:spPr>
-        <p:txBody>
-          <a:bodyPr wrap="square" anchor="ctr"/>
-          <a:lstStyle/>
-          <a:p>
-            <a:pPr algn="l">
+              <a:rPr sz="1100" b="0">
+                <a:solidFill>
+                  <a:srgbClr val="556175"/>
+                </a:solidFill>
+                <a:latin typeface="맑은 고딕"/>
+                <a:ea typeface="맑은 고딕"/>
+                <a:cs typeface="맑은 고딕"/>
+              </a:rPr>
+              <a:t>DEC-1010-058-88a6</a:t>
+            </a:r>
+          </a:p>
+        </p:txBody>
+      </p:sp>
+      <p:sp>
+        <p:nvSpPr>
+          <p:cNvPr id="10" name="TextBox 9"/>
+          <p:cNvSpPr txBox="1"/>
+          <p:nvPr/>
+        </p:nvSpPr>
+        <p:spPr>
+          <a:xfrm>
+            <a:off x="3395747" y="4275002"/>
+            <a:ext cx="1309139" cy="507618"/>
+          </a:xfrm>
+          <a:prstGeom prst="rect">
+            <a:avLst/>
+          </a:prstGeom>
+          <a:noFill/>
+        </p:spPr>
+        <p:txBody>
+          <a:bodyPr wrap="square" anchor="t"/>
+          <a:lstStyle/>
+          <a:p>
+            <a:pPr algn="ctr">
               <a:lnSpc>
                 <a:spcPct val="110000"/>
               </a:lnSpc>
               <a:spcAft>
-                <a:spcPts val="400"/>
+                <a:spcPts val="100"/>
               </a:spcAft>
             </a:pPr>
             <a:r>
-              <a:rPr sz="1700" b="1">
+              <a:rPr sz="1350" b="1">
                 <a:solidFill>
                   <a:srgbClr val="13294B"/>
                 </a:solidFill>
@@ -11112,83 +11365,125 @@
                 <a:ea typeface="맑은 고딕"/>
                 <a:cs typeface="맑은 고딕"/>
               </a:rPr>
-              <a:t>정의와 판본</a:t>
-            </a:r>
-          </a:p>
-          <a:p>
-            <a:pPr algn="l">
+              <a:t>승인</a:t>
+            </a:r>
+          </a:p>
+          <a:p>
+            <a:pPr algn="ctr">
               <a:lnSpc>
                 <a:spcPct val="110000"/>
               </a:lnSpc>
               <a:spcAft>
-                <a:spcPts val="400"/>
+                <a:spcPts val="100"/>
               </a:spcAft>
             </a:pPr>
             <a:r>
-              <a:rPr sz="1400" b="0">
-                <a:solidFill>
-                  <a:srgbClr val="1F2A3A"/>
-                </a:solidFill>
-                <a:latin typeface="맑은 고딕"/>
-                <a:ea typeface="맑은 고딕"/>
-                <a:cs typeface="맑은 고딕"/>
-              </a:rPr>
-              <a:t>c3_cooling 정의의</a:t>
-            </a:r>
-          </a:p>
-          <a:p>
-            <a:pPr algn="l">
+              <a:rPr sz="1100" b="0">
+                <a:solidFill>
+                  <a:srgbClr val="556175"/>
+                </a:solidFill>
+                <a:latin typeface="맑은 고딕"/>
+                <a:ea typeface="맑은 고딕"/>
+                <a:cs typeface="맑은 고딕"/>
+              </a:rPr>
+              <a:t>운전원</a:t>
+            </a:r>
+          </a:p>
+        </p:txBody>
+      </p:sp>
+      <p:sp>
+        <p:nvSpPr>
+          <p:cNvPr id="11" name="TextBox 10"/>
+          <p:cNvSpPr txBox="1"/>
+          <p:nvPr/>
+        </p:nvSpPr>
+        <p:spPr>
+          <a:xfrm>
+            <a:off x="4737615" y="4275002"/>
+            <a:ext cx="1352777" cy="678053"/>
+          </a:xfrm>
+          <a:prstGeom prst="rect">
+            <a:avLst/>
+          </a:prstGeom>
+          <a:noFill/>
+        </p:spPr>
+        <p:txBody>
+          <a:bodyPr wrap="square" anchor="t"/>
+          <a:lstStyle/>
+          <a:p>
+            <a:pPr algn="ctr">
               <a:lnSpc>
                 <a:spcPct val="110000"/>
               </a:lnSpc>
               <a:spcAft>
-                <a:spcPts val="400"/>
+                <a:spcPts val="100"/>
               </a:spcAft>
             </a:pPr>
             <a:r>
-              <a:rPr sz="1400" b="0">
-                <a:solidFill>
-                  <a:srgbClr val="1F2A3A"/>
-                </a:solidFill>
-                <a:latin typeface="맑은 고딕"/>
-                <a:ea typeface="맑은 고딕"/>
-                <a:cs typeface="맑은 고딕"/>
-              </a:rPr>
-              <a:t>판본 9로 열렸다.</a:t>
-            </a:r>
-          </a:p>
-        </p:txBody>
-      </p:sp>
-      <p:sp>
-        <p:nvSpPr>
-          <p:cNvPr id="9" name="TextBox 8"/>
-          <p:cNvSpPr txBox="1"/>
-          <p:nvPr/>
-        </p:nvSpPr>
-        <p:spPr>
-          <a:xfrm>
-            <a:off x="7635240" y="3437001"/>
-            <a:ext cx="4007815" cy="1108710"/>
-          </a:xfrm>
-          <a:prstGeom prst="rect">
-            <a:avLst/>
-          </a:prstGeom>
-          <a:noFill/>
-        </p:spPr>
-        <p:txBody>
-          <a:bodyPr wrap="square" anchor="ctr"/>
-          <a:lstStyle/>
-          <a:p>
-            <a:pPr algn="l">
+              <a:rPr sz="1350" b="1">
+                <a:solidFill>
+                  <a:srgbClr val="13294B"/>
+                </a:solidFill>
+                <a:latin typeface="맑은 고딕"/>
+                <a:ea typeface="맑은 고딕"/>
+                <a:cs typeface="맑은 고딕"/>
+              </a:rPr>
+              <a:t>냉각 명령</a:t>
+            </a:r>
+          </a:p>
+          <a:p>
+            <a:pPr algn="ctr">
               <a:lnSpc>
                 <a:spcPct val="110000"/>
               </a:lnSpc>
               <a:spcAft>
-                <a:spcPts val="400"/>
+                <a:spcPts val="100"/>
               </a:spcAft>
             </a:pPr>
             <a:r>
-              <a:rPr sz="1700" b="1">
+              <a:rPr sz="1100" b="0">
+                <a:solidFill>
+                  <a:srgbClr val="556175"/>
+                </a:solidFill>
+                <a:latin typeface="맑은 고딕"/>
+                <a:ea typeface="맑은 고딕"/>
+                <a:cs typeface="맑은 고딕"/>
+              </a:rPr>
+              <a:t>CMD-1010-0001-01d1</a:t>
+            </a:r>
+          </a:p>
+        </p:txBody>
+      </p:sp>
+      <p:sp>
+        <p:nvSpPr>
+          <p:cNvPr id="12" name="TextBox 11"/>
+          <p:cNvSpPr txBox="1"/>
+          <p:nvPr/>
+        </p:nvSpPr>
+        <p:spPr>
+          <a:xfrm>
+            <a:off x="6123121" y="4275002"/>
+            <a:ext cx="1309139" cy="507618"/>
+          </a:xfrm>
+          <a:prstGeom prst="rect">
+            <a:avLst/>
+          </a:prstGeom>
+          <a:noFill/>
+        </p:spPr>
+        <p:txBody>
+          <a:bodyPr wrap="square" anchor="t"/>
+          <a:lstStyle/>
+          <a:p>
+            <a:pPr algn="ctr">
+              <a:lnSpc>
+                <a:spcPct val="110000"/>
+              </a:lnSpc>
+              <a:spcAft>
+                <a:spcPts val="100"/>
+              </a:spcAft>
+            </a:pPr>
+            <a:r>
+              <a:rPr sz="1350" b="1">
                 <a:solidFill>
                   <a:srgbClr val="13294B"/>
                 </a:solidFill>
@@ -11196,83 +11491,125 @@
                 <a:ea typeface="맑은 고딕"/>
                 <a:cs typeface="맑은 고딕"/>
               </a:rPr>
-              <a:t>여는 사건</a:t>
-            </a:r>
-          </a:p>
-          <a:p>
-            <a:pPr algn="l">
+              <a:t>재관측</a:t>
+            </a:r>
+          </a:p>
+          <a:p>
+            <a:pPr algn="ctr">
               <a:lnSpc>
                 <a:spcPct val="110000"/>
               </a:lnSpc>
               <a:spcAft>
-                <a:spcPts val="400"/>
+                <a:spcPts val="100"/>
               </a:spcAft>
             </a:pPr>
             <a:r>
-              <a:rPr sz="1400" b="0">
-                <a:solidFill>
-                  <a:srgbClr val="1F2A3A"/>
-                </a:solidFill>
-                <a:latin typeface="맑은 고딕"/>
-                <a:ea typeface="맑은 고딕"/>
-                <a:cs typeface="맑은 고딕"/>
-              </a:rPr>
-              <a:t>경보 ALT-hyd01-0026-767a가</a:t>
-            </a:r>
-          </a:p>
-          <a:p>
-            <a:pPr algn="l">
+              <a:rPr sz="1100" b="0">
+                <a:solidFill>
+                  <a:srgbClr val="556175"/>
+                </a:solidFill>
+                <a:latin typeface="맑은 고딕"/>
+                <a:ea typeface="맑은 고딕"/>
+                <a:cs typeface="맑은 고딕"/>
+              </a:rPr>
+              <a:t>유온 51.3 ℃</a:t>
+            </a:r>
+          </a:p>
+        </p:txBody>
+      </p:sp>
+      <p:sp>
+        <p:nvSpPr>
+          <p:cNvPr id="13" name="TextBox 12"/>
+          <p:cNvSpPr txBox="1"/>
+          <p:nvPr/>
+        </p:nvSpPr>
+        <p:spPr>
+          <a:xfrm>
+            <a:off x="7486808" y="4275002"/>
+            <a:ext cx="1309139" cy="507618"/>
+          </a:xfrm>
+          <a:prstGeom prst="rect">
+            <a:avLst/>
+          </a:prstGeom>
+          <a:noFill/>
+        </p:spPr>
+        <p:txBody>
+          <a:bodyPr wrap="square" anchor="t"/>
+          <a:lstStyle/>
+          <a:p>
+            <a:pPr algn="ctr">
               <a:lnSpc>
                 <a:spcPct val="110000"/>
               </a:lnSpc>
               <a:spcAft>
-                <a:spcPts val="400"/>
+                <a:spcPts val="100"/>
               </a:spcAft>
             </a:pPr>
             <a:r>
-              <a:rPr sz="1400" b="0">
-                <a:solidFill>
-                  <a:srgbClr val="1F2A3A"/>
-                </a:solidFill>
-                <a:latin typeface="맑은 고딕"/>
-                <a:ea typeface="맑은 고딕"/>
-                <a:cs typeface="맑은 고딕"/>
-              </a:rPr>
-              <a:t>이 처리 건을 열었다.</a:t>
-            </a:r>
-          </a:p>
-        </p:txBody>
-      </p:sp>
-      <p:sp>
-        <p:nvSpPr>
-          <p:cNvPr id="10" name="TextBox 9"/>
-          <p:cNvSpPr txBox="1"/>
-          <p:nvPr/>
-        </p:nvSpPr>
-        <p:spPr>
-          <a:xfrm>
-            <a:off x="7635240" y="4545711"/>
-            <a:ext cx="4007815" cy="1108710"/>
-          </a:xfrm>
-          <a:prstGeom prst="rect">
-            <a:avLst/>
-          </a:prstGeom>
-          <a:noFill/>
-        </p:spPr>
-        <p:txBody>
-          <a:bodyPr wrap="square" anchor="ctr"/>
-          <a:lstStyle/>
-          <a:p>
-            <a:pPr algn="l">
+              <a:rPr sz="1350" b="1">
+                <a:solidFill>
+                  <a:srgbClr val="13294B"/>
+                </a:solidFill>
+                <a:latin typeface="맑은 고딕"/>
+                <a:ea typeface="맑은 고딕"/>
+                <a:cs typeface="맑은 고딕"/>
+              </a:rPr>
+              <a:t>작업지시 등록</a:t>
+            </a:r>
+          </a:p>
+          <a:p>
+            <a:pPr algn="ctr">
               <a:lnSpc>
                 <a:spcPct val="110000"/>
               </a:lnSpc>
               <a:spcAft>
-                <a:spcPts val="400"/>
+                <a:spcPts val="100"/>
               </a:spcAft>
             </a:pPr>
             <a:r>
-              <a:rPr sz="1700" b="1">
+              <a:rPr sz="1100" b="0">
+                <a:solidFill>
+                  <a:srgbClr val="556175"/>
+                </a:solidFill>
+                <a:latin typeface="맑은 고딕"/>
+                <a:ea typeface="맑은 고딕"/>
+                <a:cs typeface="맑은 고딕"/>
+              </a:rPr>
+              <a:t>WO-1010-1198</a:t>
+            </a:r>
+          </a:p>
+        </p:txBody>
+      </p:sp>
+      <p:sp>
+        <p:nvSpPr>
+          <p:cNvPr id="14" name="TextBox 13"/>
+          <p:cNvSpPr txBox="1"/>
+          <p:nvPr/>
+        </p:nvSpPr>
+        <p:spPr>
+          <a:xfrm>
+            <a:off x="8828676" y="4275002"/>
+            <a:ext cx="1352777" cy="678053"/>
+          </a:xfrm>
+          <a:prstGeom prst="rect">
+            <a:avLst/>
+          </a:prstGeom>
+          <a:noFill/>
+        </p:spPr>
+        <p:txBody>
+          <a:bodyPr wrap="square" anchor="t"/>
+          <a:lstStyle/>
+          <a:p>
+            <a:pPr algn="ctr">
+              <a:lnSpc>
+                <a:spcPct val="110000"/>
+              </a:lnSpc>
+              <a:spcAft>
+                <a:spcPts val="100"/>
+              </a:spcAft>
+            </a:pPr>
+            <a:r>
+              <a:rPr sz="1350" b="1">
                 <a:solidFill>
                   <a:srgbClr val="13294B"/>
                 </a:solidFill>
@@ -11280,49 +11617,70 @@
                 <a:ea typeface="맑은 고딕"/>
                 <a:cs typeface="맑은 고딕"/>
               </a:rPr>
-              <a:t>닫힌 곳</a:t>
-            </a:r>
-          </a:p>
-          <a:p>
-            <a:pPr algn="l">
+              <a:t>결과 보고</a:t>
+            </a:r>
+          </a:p>
+          <a:p>
+            <a:pPr algn="ctr">
               <a:lnSpc>
                 <a:spcPct val="110000"/>
               </a:lnSpc>
               <a:spcAft>
-                <a:spcPts val="400"/>
+                <a:spcPts val="100"/>
               </a:spcAft>
             </a:pPr>
             <a:r>
-              <a:rPr sz="1400" b="0">
-                <a:solidFill>
-                  <a:srgbClr val="1F2A3A"/>
-                </a:solidFill>
-                <a:latin typeface="맑은 고딕"/>
-                <a:ea typeface="맑은 고딕"/>
-                <a:cs typeface="맑은 고딕"/>
-              </a:rPr>
-              <a:t>끝 이벤트 E_end에 닿아</a:t>
-            </a:r>
-          </a:p>
-          <a:p>
-            <a:pPr algn="l">
+              <a:rPr sz="1100" b="0">
+                <a:solidFill>
+                  <a:srgbClr val="556175"/>
+                </a:solidFill>
+                <a:latin typeface="맑은 고딕"/>
+                <a:ea typeface="맑은 고딕"/>
+                <a:cs typeface="맑은 고딕"/>
+              </a:rPr>
+              <a:t>유온 정상 · 경보 해제</a:t>
+            </a:r>
+          </a:p>
+        </p:txBody>
+      </p:sp>
+      <p:sp>
+        <p:nvSpPr>
+          <p:cNvPr id="15" name="TextBox 14"/>
+          <p:cNvSpPr txBox="1"/>
+          <p:nvPr/>
+        </p:nvSpPr>
+        <p:spPr>
+          <a:xfrm>
+            <a:off x="10323276" y="4275002"/>
+            <a:ext cx="1090949" cy="337185"/>
+          </a:xfrm>
+          <a:prstGeom prst="rect">
+            <a:avLst/>
+          </a:prstGeom>
+          <a:noFill/>
+        </p:spPr>
+        <p:txBody>
+          <a:bodyPr wrap="square" anchor="t"/>
+          <a:lstStyle/>
+          <a:p>
+            <a:pPr algn="ctr">
               <a:lnSpc>
                 <a:spcPct val="110000"/>
               </a:lnSpc>
               <a:spcAft>
-                <a:spcPts val="400"/>
+                <a:spcPts val="100"/>
               </a:spcAft>
             </a:pPr>
             <a:r>
-              <a:rPr sz="1400" b="0">
-                <a:solidFill>
-                  <a:srgbClr val="1F2A3A"/>
-                </a:solidFill>
-                <a:latin typeface="맑은 고딕"/>
-                <a:ea typeface="맑은 고딕"/>
-                <a:cs typeface="맑은 고딕"/>
-              </a:rPr>
-              <a:t>실행이 끝났다.</a:t>
+              <a:rPr sz="1350" b="1">
+                <a:solidFill>
+                  <a:srgbClr val="13294B"/>
+                </a:solidFill>
+                <a:latin typeface="맑은 고딕"/>
+                <a:ea typeface="맑은 고딕"/>
+                <a:cs typeface="맑은 고딕"/>
+              </a:rPr>
+              <a:t>끝</a:t>
             </a:r>
           </a:p>
         </p:txBody>
@@ -11387,7 +11745,7 @@
                 <a:ea typeface="맑은 고딕"/>
                 <a:cs typeface="맑은 고딕"/>
               </a:rPr>
-              <a:t>지식, 에이전트, 프로세스가 맡는 것</a:t>
+              <a:t>세 영역이 주고받는 것</a:t>
             </a:r>
           </a:p>
         </p:txBody>
@@ -11426,7 +11784,7 @@
                 <a:ea typeface="맑은 고딕"/>
                 <a:cs typeface="맑은 고딕"/>
               </a:rPr>
-              <a:t>지식 그래프가 판단의 재료를, 에이전트가 판단을, 프로세스가 순서와 책임과 기록을 맡아 경보 한 건이 끝난 업무가 된다.</a:t>
+              <a:t>지식은 에이전트에게 재료를, 에이전트는 프로세스에게 추천안을 넘기고, 프로세스는 승인과 실행을 기록으로 남긴다.</a:t>
             </a:r>
           </a:p>
         </p:txBody>
@@ -11499,71 +11857,9 @@
           </a:p>
         </p:txBody>
       </p:sp>
-      <p:sp>
-        <p:nvSpPr>
-          <p:cNvPr id="6" name="Rounded Rectangle 5"/>
-          <p:cNvSpPr/>
-          <p:nvPr/>
-        </p:nvSpPr>
-        <p:spPr>
-          <a:xfrm>
-            <a:off x="548640" y="2620010"/>
-            <a:ext cx="3515258" cy="2742692"/>
-          </a:xfrm>
-          <a:prstGeom prst="roundRect">
-            <a:avLst>
-              <a:gd name="adj" fmla="val 4000"/>
-            </a:avLst>
-          </a:prstGeom>
-          <a:solidFill>
-            <a:srgbClr val="FFFFFF"/>
-          </a:solidFill>
-          <a:ln w="15875">
-            <a:solidFill>
-              <a:srgbClr val="D3D9E1"/>
-            </a:solidFill>
-          </a:ln>
-        </p:spPr>
-        <p:txBody>
-          <a:bodyPr rtlCol="0" anchor="ctr"/>
-          <a:lstStyle/>
-          <a:p>
-            <a:pPr algn="ctr"/>
-          </a:p>
-        </p:txBody>
-      </p:sp>
-      <p:sp>
-        <p:nvSpPr>
-          <p:cNvPr id="7" name="Oval 6"/>
-          <p:cNvSpPr/>
-          <p:nvPr/>
-        </p:nvSpPr>
-        <p:spPr>
-          <a:xfrm>
-            <a:off x="777240" y="2821178"/>
-            <a:ext cx="731520" cy="731520"/>
-          </a:xfrm>
-          <a:prstGeom prst="ellipse">
-            <a:avLst/>
-          </a:prstGeom>
-          <a:solidFill>
-            <a:srgbClr val="E7F3FD"/>
-          </a:solidFill>
-          <a:ln>
-            <a:noFill/>
-          </a:ln>
-        </p:spPr>
-        <p:txBody>
-          <a:bodyPr rtlCol="0" anchor="ctr"/>
-          <a:lstStyle/>
-          <a:p>
-            <a:pPr algn="ctr"/>
-          </a:p>
-        </p:txBody>
-      </p:sp>
       <p:pic>
         <p:nvPicPr>
-          <p:cNvPr id="8" name="아이콘:topology-star-3" descr="topology-star-3_13294B_1.6.png"/>
+          <p:cNvPr id="6" name="삽화:세영역.svg" descr="illust_2875965704278617918_1791770778.png"/>
           <p:cNvPicPr>
             <a:picLocks noChangeAspect="1"/>
           </p:cNvPicPr>
@@ -11577,8 +11873,8 @@
         </p:blipFill>
         <p:spPr>
           <a:xfrm>
-            <a:off x="930859" y="2974797"/>
-            <a:ext cx="424281" cy="424281"/>
+            <a:off x="641100" y="1627632"/>
+            <a:ext cx="10909495" cy="4727448"/>
           </a:xfrm>
           <a:prstGeom prst="rect">
             <a:avLst/>
@@ -11587,14 +11883,140 @@
       </p:pic>
       <p:sp>
         <p:nvSpPr>
+          <p:cNvPr id="7" name="TextBox 6"/>
+          <p:cNvSpPr txBox="1"/>
+          <p:nvPr/>
+        </p:nvSpPr>
+        <p:spPr>
+          <a:xfrm>
+            <a:off x="913837" y="2053102"/>
+            <a:ext cx="2181899" cy="577342"/>
+          </a:xfrm>
+          <a:prstGeom prst="rect">
+            <a:avLst/>
+          </a:prstGeom>
+          <a:noFill/>
+        </p:spPr>
+        <p:txBody>
+          <a:bodyPr wrap="square" anchor="t"/>
+          <a:lstStyle/>
+          <a:p>
+            <a:pPr algn="ctr">
+              <a:lnSpc>
+                <a:spcPct val="110000"/>
+              </a:lnSpc>
+              <a:spcAft>
+                <a:spcPts val="100"/>
+              </a:spcAft>
+            </a:pPr>
+            <a:r>
+              <a:rPr sz="1600" b="1">
+                <a:solidFill>
+                  <a:srgbClr val="1A6FC4"/>
+                </a:solidFill>
+                <a:latin typeface="맑은 고딕"/>
+                <a:ea typeface="맑은 고딕"/>
+                <a:cs typeface="맑은 고딕"/>
+              </a:rPr>
+              <a:t>지식</a:t>
+            </a:r>
+          </a:p>
+          <a:p>
+            <a:pPr algn="ctr">
+              <a:lnSpc>
+                <a:spcPct val="110000"/>
+              </a:lnSpc>
+              <a:spcAft>
+                <a:spcPts val="100"/>
+              </a:spcAft>
+            </a:pPr>
+            <a:r>
+              <a:rPr sz="1300" b="0">
+                <a:solidFill>
+                  <a:srgbClr val="556175"/>
+                </a:solidFill>
+                <a:latin typeface="맑은 고딕"/>
+                <a:ea typeface="맑은 고딕"/>
+                <a:cs typeface="맑은 고딕"/>
+              </a:rPr>
+              <a:t>1~4회차</a:t>
+            </a:r>
+          </a:p>
+        </p:txBody>
+      </p:sp>
+      <p:sp>
+        <p:nvSpPr>
+          <p:cNvPr id="8" name="TextBox 7"/>
+          <p:cNvSpPr txBox="1"/>
+          <p:nvPr/>
+        </p:nvSpPr>
+        <p:spPr>
+          <a:xfrm>
+            <a:off x="5004898" y="2053102"/>
+            <a:ext cx="2181899" cy="577342"/>
+          </a:xfrm>
+          <a:prstGeom prst="rect">
+            <a:avLst/>
+          </a:prstGeom>
+          <a:noFill/>
+        </p:spPr>
+        <p:txBody>
+          <a:bodyPr wrap="square" anchor="t"/>
+          <a:lstStyle/>
+          <a:p>
+            <a:pPr algn="ctr">
+              <a:lnSpc>
+                <a:spcPct val="110000"/>
+              </a:lnSpc>
+              <a:spcAft>
+                <a:spcPts val="100"/>
+              </a:spcAft>
+            </a:pPr>
+            <a:r>
+              <a:rPr sz="1600" b="1">
+                <a:solidFill>
+                  <a:srgbClr val="1A6FC4"/>
+                </a:solidFill>
+                <a:latin typeface="맑은 고딕"/>
+                <a:ea typeface="맑은 고딕"/>
+                <a:cs typeface="맑은 고딕"/>
+              </a:rPr>
+              <a:t>에이전트</a:t>
+            </a:r>
+          </a:p>
+          <a:p>
+            <a:pPr algn="ctr">
+              <a:lnSpc>
+                <a:spcPct val="110000"/>
+              </a:lnSpc>
+              <a:spcAft>
+                <a:spcPts val="100"/>
+              </a:spcAft>
+            </a:pPr>
+            <a:r>
+              <a:rPr sz="1300" b="0">
+                <a:solidFill>
+                  <a:srgbClr val="556175"/>
+                </a:solidFill>
+                <a:latin typeface="맑은 고딕"/>
+                <a:ea typeface="맑은 고딕"/>
+                <a:cs typeface="맑은 고딕"/>
+              </a:rPr>
+              <a:t>5~7회차</a:t>
+            </a:r>
+          </a:p>
+        </p:txBody>
+      </p:sp>
+      <p:sp>
+        <p:nvSpPr>
           <p:cNvPr id="9" name="TextBox 8"/>
           <p:cNvSpPr txBox="1"/>
           <p:nvPr/>
         </p:nvSpPr>
         <p:spPr>
           <a:xfrm>
-            <a:off x="713232" y="3644138"/>
-            <a:ext cx="3186074" cy="1215644"/>
+            <a:off x="9095958" y="2053102"/>
+            <a:ext cx="2181899" cy="577342"/>
           </a:xfrm>
           <a:prstGeom prst="rect">
             <a:avLst/>
@@ -11605,16 +12027,79 @@
           <a:bodyPr wrap="square" anchor="t"/>
           <a:lstStyle/>
           <a:p>
-            <a:pPr algn="l">
+            <a:pPr algn="ctr">
               <a:lnSpc>
                 <a:spcPct val="110000"/>
               </a:lnSpc>
               <a:spcAft>
-                <a:spcPts val="400"/>
+                <a:spcPts val="100"/>
               </a:spcAft>
             </a:pPr>
             <a:r>
-              <a:rPr sz="1800" b="1">
+              <a:rPr sz="1600" b="1">
+                <a:solidFill>
+                  <a:srgbClr val="1A6FC4"/>
+                </a:solidFill>
+                <a:latin typeface="맑은 고딕"/>
+                <a:ea typeface="맑은 고딕"/>
+                <a:cs typeface="맑은 고딕"/>
+              </a:rPr>
+              <a:t>프로세스</a:t>
+            </a:r>
+          </a:p>
+          <a:p>
+            <a:pPr algn="ctr">
+              <a:lnSpc>
+                <a:spcPct val="110000"/>
+              </a:lnSpc>
+              <a:spcAft>
+                <a:spcPts val="100"/>
+              </a:spcAft>
+            </a:pPr>
+            <a:r>
+              <a:rPr sz="1300" b="0">
+                <a:solidFill>
+                  <a:srgbClr val="556175"/>
+                </a:solidFill>
+                <a:latin typeface="맑은 고딕"/>
+                <a:ea typeface="맑은 고딕"/>
+                <a:cs typeface="맑은 고딕"/>
+              </a:rPr>
+              <a:t>8~10회차</a:t>
+            </a:r>
+          </a:p>
+        </p:txBody>
+      </p:sp>
+      <p:sp>
+        <p:nvSpPr>
+          <p:cNvPr id="10" name="TextBox 9"/>
+          <p:cNvSpPr txBox="1"/>
+          <p:nvPr/>
+        </p:nvSpPr>
+        <p:spPr>
+          <a:xfrm>
+            <a:off x="859290" y="4275002"/>
+            <a:ext cx="2290993" cy="623824"/>
+          </a:xfrm>
+          <a:prstGeom prst="rect">
+            <a:avLst/>
+          </a:prstGeom>
+          <a:noFill/>
+        </p:spPr>
+        <p:txBody>
+          <a:bodyPr wrap="square" anchor="t"/>
+          <a:lstStyle/>
+          <a:p>
+            <a:pPr algn="ctr">
+              <a:lnSpc>
+                <a:spcPct val="110000"/>
+              </a:lnSpc>
+              <a:spcAft>
+                <a:spcPts val="100"/>
+              </a:spcAft>
+            </a:pPr>
+            <a:r>
+              <a:rPr sz="1600" b="1">
                 <a:solidFill>
                   <a:srgbClr val="13294B"/>
                 </a:solidFill>
@@ -11622,90 +12107,83 @@
                 <a:ea typeface="맑은 고딕"/>
                 <a:cs typeface="맑은 고딕"/>
               </a:rPr>
-              <a:t>지식</a:t>
-            </a:r>
-          </a:p>
-          <a:p>
-            <a:pPr algn="l">
+              <a:t>스키마, SOP, 규칙, 출처</a:t>
+            </a:r>
+          </a:p>
+        </p:txBody>
+      </p:sp>
+      <p:sp>
+        <p:nvSpPr>
+          <p:cNvPr id="11" name="TextBox 10"/>
+          <p:cNvSpPr txBox="1"/>
+          <p:nvPr/>
+        </p:nvSpPr>
+        <p:spPr>
+          <a:xfrm>
+            <a:off x="4950350" y="4275002"/>
+            <a:ext cx="2290993" cy="623824"/>
+          </a:xfrm>
+          <a:prstGeom prst="rect">
+            <a:avLst/>
+          </a:prstGeom>
+          <a:noFill/>
+        </p:spPr>
+        <p:txBody>
+          <a:bodyPr wrap="square" anchor="t"/>
+          <a:lstStyle/>
+          <a:p>
+            <a:pPr algn="ctr">
               <a:lnSpc>
                 <a:spcPct val="110000"/>
               </a:lnSpc>
               <a:spcAft>
-                <a:spcPts val="400"/>
+                <a:spcPts val="100"/>
               </a:spcAft>
             </a:pPr>
             <a:r>
-              <a:rPr sz="1400" b="0">
-                <a:solidFill>
-                  <a:srgbClr val="1F2A3A"/>
-                </a:solidFill>
-                <a:latin typeface="맑은 고딕"/>
-                <a:ea typeface="맑은 고딕"/>
-                <a:cs typeface="맑은 고딕"/>
-              </a:rPr>
-              <a:t>원인과 조치의 관계, 판단 규칙, 값이 놓인 자리</a:t>
-            </a:r>
-          </a:p>
-        </p:txBody>
-      </p:sp>
-      <p:sp>
-        <p:nvSpPr>
-          <p:cNvPr id="10" name="Rounded Rectangle 9"/>
-          <p:cNvSpPr/>
-          <p:nvPr/>
-        </p:nvSpPr>
-        <p:spPr>
-          <a:xfrm>
-            <a:off x="777240" y="4932934"/>
-            <a:ext cx="822960" cy="292608"/>
-          </a:xfrm>
-          <a:prstGeom prst="roundRect">
-            <a:avLst>
-              <a:gd name="adj" fmla="val 50000"/>
-            </a:avLst>
-          </a:prstGeom>
-          <a:solidFill>
-            <a:srgbClr val="D3D9E1"/>
-          </a:solidFill>
-          <a:ln>
-            <a:noFill/>
-          </a:ln>
-        </p:spPr>
-        <p:txBody>
-          <a:bodyPr rtlCol="0" anchor="ctr"/>
-          <a:lstStyle/>
-          <a:p>
-            <a:pPr algn="ctr"/>
-          </a:p>
-        </p:txBody>
-      </p:sp>
-      <p:sp>
-        <p:nvSpPr>
-          <p:cNvPr id="11" name="TextBox 10"/>
-          <p:cNvSpPr txBox="1"/>
-          <p:nvPr/>
-        </p:nvSpPr>
-        <p:spPr>
-          <a:xfrm>
-            <a:off x="777240" y="4932934"/>
-            <a:ext cx="822960" cy="292608"/>
-          </a:xfrm>
-          <a:prstGeom prst="rect">
-            <a:avLst/>
-          </a:prstGeom>
-          <a:noFill/>
-        </p:spPr>
-        <p:txBody>
-          <a:bodyPr wrap="square" anchor="ctr"/>
+              <a:rPr sz="1600" b="1">
+                <a:solidFill>
+                  <a:srgbClr val="13294B"/>
+                </a:solidFill>
+                <a:latin typeface="맑은 고딕"/>
+                <a:ea typeface="맑은 고딕"/>
+                <a:cs typeface="맑은 고딕"/>
+              </a:rPr>
+              <a:t>스킬, MCP, 명세, 시나리오</a:t>
+            </a:r>
+          </a:p>
+        </p:txBody>
+      </p:sp>
+      <p:sp>
+        <p:nvSpPr>
+          <p:cNvPr id="12" name="TextBox 11"/>
+          <p:cNvSpPr txBox="1"/>
+          <p:nvPr/>
+        </p:nvSpPr>
+        <p:spPr>
+          <a:xfrm>
+            <a:off x="9041411" y="4275002"/>
+            <a:ext cx="2290993" cy="623824"/>
+          </a:xfrm>
+          <a:prstGeom prst="rect">
+            <a:avLst/>
+          </a:prstGeom>
+          <a:noFill/>
+        </p:spPr>
+        <p:txBody>
+          <a:bodyPr wrap="square" anchor="t"/>
           <a:lstStyle/>
           <a:p>
             <a:pPr algn="ctr">
               <a:lnSpc>
                 <a:spcPct val="110000"/>
               </a:lnSpc>
-            </a:pPr>
-            <a:r>
-              <a:rPr sz="1200" b="1">
+              <a:spcAft>
+                <a:spcPts val="100"/>
+              </a:spcAft>
+            </a:pPr>
+            <a:r>
+              <a:rPr sz="1600" b="1">
                 <a:solidFill>
                   <a:srgbClr val="13294B"/>
                 </a:solidFill>
@@ -11713,97 +12191,137 @@
                 <a:ea typeface="맑은 고딕"/>
                 <a:cs typeface="맑은 고딕"/>
               </a:rPr>
+              <a:t>정의, 인스턴스, 승인, 실행</a:t>
+            </a:r>
+          </a:p>
+        </p:txBody>
+      </p:sp>
+      <p:sp>
+        <p:nvSpPr>
+          <p:cNvPr id="13" name="TextBox 12"/>
+          <p:cNvSpPr txBox="1"/>
+          <p:nvPr/>
+        </p:nvSpPr>
+        <p:spPr>
+          <a:xfrm>
+            <a:off x="3232105" y="2904042"/>
+            <a:ext cx="1636424" cy="577342"/>
+          </a:xfrm>
+          <a:prstGeom prst="rect">
+            <a:avLst/>
+          </a:prstGeom>
+          <a:noFill/>
+        </p:spPr>
+        <p:txBody>
+          <a:bodyPr wrap="square" anchor="t"/>
+          <a:lstStyle/>
+          <a:p>
+            <a:pPr algn="ctr">
+              <a:lnSpc>
+                <a:spcPct val="110000"/>
+              </a:lnSpc>
+              <a:spcAft>
+                <a:spcPts val="100"/>
+              </a:spcAft>
+            </a:pPr>
+            <a:r>
+              <a:rPr sz="1600" b="1">
+                <a:solidFill>
+                  <a:srgbClr val="13294B"/>
+                </a:solidFill>
+                <a:latin typeface="맑은 고딕"/>
+                <a:ea typeface="맑은 고딕"/>
+                <a:cs typeface="맑은 고딕"/>
+              </a:rPr>
               <a:t>재료</a:t>
             </a:r>
           </a:p>
-        </p:txBody>
-      </p:sp>
-      <p:sp>
-        <p:nvSpPr>
-          <p:cNvPr id="12" name="Rounded Rectangle 11"/>
-          <p:cNvSpPr/>
-          <p:nvPr/>
-        </p:nvSpPr>
-        <p:spPr>
-          <a:xfrm>
-            <a:off x="4338218" y="2620010"/>
-            <a:ext cx="3515258" cy="2742692"/>
-          </a:xfrm>
-          <a:prstGeom prst="roundRect">
-            <a:avLst>
-              <a:gd name="adj" fmla="val 4000"/>
-            </a:avLst>
-          </a:prstGeom>
-          <a:solidFill>
-            <a:srgbClr val="FFFFFF"/>
-          </a:solidFill>
-          <a:ln w="15875">
-            <a:solidFill>
-              <a:srgbClr val="D3D9E1"/>
-            </a:solidFill>
-          </a:ln>
-        </p:spPr>
-        <p:txBody>
-          <a:bodyPr rtlCol="0" anchor="ctr"/>
-          <a:lstStyle/>
-          <a:p>
-            <a:pPr algn="ctr"/>
-          </a:p>
-        </p:txBody>
-      </p:sp>
-      <p:sp>
-        <p:nvSpPr>
-          <p:cNvPr id="13" name="Oval 12"/>
-          <p:cNvSpPr/>
-          <p:nvPr/>
-        </p:nvSpPr>
-        <p:spPr>
-          <a:xfrm>
-            <a:off x="4566818" y="2821178"/>
-            <a:ext cx="731520" cy="731520"/>
-          </a:xfrm>
-          <a:prstGeom prst="ellipse">
-            <a:avLst/>
-          </a:prstGeom>
-          <a:solidFill>
-            <a:srgbClr val="E7F3FD"/>
-          </a:solidFill>
-          <a:ln>
-            <a:noFill/>
-          </a:ln>
-        </p:spPr>
-        <p:txBody>
-          <a:bodyPr rtlCol="0" anchor="ctr"/>
-          <a:lstStyle/>
-          <a:p>
-            <a:pPr algn="ctr"/>
-          </a:p>
-        </p:txBody>
-      </p:sp>
-      <p:pic>
-        <p:nvPicPr>
-          <p:cNvPr id="14" name="아이콘:robot" descr="robot_13294B_1.6.png"/>
-          <p:cNvPicPr>
-            <a:picLocks noChangeAspect="1"/>
-          </p:cNvPicPr>
-          <p:nvPr/>
-        </p:nvPicPr>
-        <p:blipFill>
-          <a:blip r:embed="rId4"/>
-          <a:stretch>
-            <a:fillRect/>
-          </a:stretch>
-        </p:blipFill>
-        <p:spPr>
-          <a:xfrm>
-            <a:off x="4720437" y="2974797"/>
-            <a:ext cx="424281" cy="424281"/>
-          </a:xfrm>
-          <a:prstGeom prst="rect">
-            <a:avLst/>
-          </a:prstGeom>
-        </p:spPr>
-      </p:pic>
+          <a:p>
+            <a:pPr algn="ctr">
+              <a:lnSpc>
+                <a:spcPct val="110000"/>
+              </a:lnSpc>
+              <a:spcAft>
+                <a:spcPts val="100"/>
+              </a:spcAft>
+            </a:pPr>
+            <a:r>
+              <a:rPr sz="1300" b="0">
+                <a:solidFill>
+                  <a:srgbClr val="556175"/>
+                </a:solidFill>
+                <a:latin typeface="맑은 고딕"/>
+                <a:ea typeface="맑은 고딕"/>
+                <a:cs typeface="맑은 고딕"/>
+              </a:rPr>
+              <a:t>관계 · 기준</a:t>
+            </a:r>
+          </a:p>
+        </p:txBody>
+      </p:sp>
+      <p:sp>
+        <p:nvSpPr>
+          <p:cNvPr id="14" name="TextBox 13"/>
+          <p:cNvSpPr txBox="1"/>
+          <p:nvPr/>
+        </p:nvSpPr>
+        <p:spPr>
+          <a:xfrm>
+            <a:off x="7323165" y="2904042"/>
+            <a:ext cx="1636424" cy="577342"/>
+          </a:xfrm>
+          <a:prstGeom prst="rect">
+            <a:avLst/>
+          </a:prstGeom>
+          <a:noFill/>
+        </p:spPr>
+        <p:txBody>
+          <a:bodyPr wrap="square" anchor="t"/>
+          <a:lstStyle/>
+          <a:p>
+            <a:pPr algn="ctr">
+              <a:lnSpc>
+                <a:spcPct val="110000"/>
+              </a:lnSpc>
+              <a:spcAft>
+                <a:spcPts val="100"/>
+              </a:spcAft>
+            </a:pPr>
+            <a:r>
+              <a:rPr sz="1600" b="1">
+                <a:solidFill>
+                  <a:srgbClr val="13294B"/>
+                </a:solidFill>
+                <a:latin typeface="맑은 고딕"/>
+                <a:ea typeface="맑은 고딕"/>
+                <a:cs typeface="맑은 고딕"/>
+              </a:rPr>
+              <a:t>추천안</a:t>
+            </a:r>
+          </a:p>
+          <a:p>
+            <a:pPr algn="ctr">
+              <a:lnSpc>
+                <a:spcPct val="110000"/>
+              </a:lnSpc>
+              <a:spcAft>
+                <a:spcPts val="100"/>
+              </a:spcAft>
+            </a:pPr>
+            <a:r>
+              <a:rPr sz="1300" b="0">
+                <a:solidFill>
+                  <a:srgbClr val="556175"/>
+                </a:solidFill>
+                <a:latin typeface="맑은 고딕"/>
+                <a:ea typeface="맑은 고딕"/>
+                <a:cs typeface="맑은 고딕"/>
+              </a:rPr>
+              <a:t>추천과 대안</a:t>
+            </a:r>
+          </a:p>
+        </p:txBody>
+      </p:sp>
       <p:sp>
         <p:nvSpPr>
           <p:cNvPr id="15" name="TextBox 14"/>
@@ -11812,8 +12330,8 @@
         </p:nvSpPr>
         <p:spPr>
           <a:xfrm>
-            <a:off x="4502810" y="3644138"/>
-            <a:ext cx="3186074" cy="1215644"/>
+            <a:off x="6750417" y="5598688"/>
+            <a:ext cx="2400088" cy="375920"/>
           </a:xfrm>
           <a:prstGeom prst="rect">
             <a:avLst/>
@@ -11824,16 +12342,16 @@
           <a:bodyPr wrap="square" anchor="t"/>
           <a:lstStyle/>
           <a:p>
-            <a:pPr algn="l">
+            <a:pPr algn="ctr">
               <a:lnSpc>
                 <a:spcPct val="110000"/>
               </a:lnSpc>
               <a:spcAft>
-                <a:spcPts val="400"/>
+                <a:spcPts val="100"/>
               </a:spcAft>
             </a:pPr>
             <a:r>
-              <a:rPr sz="1800" b="1">
+              <a:rPr sz="1600" b="1">
                 <a:solidFill>
                   <a:srgbClr val="13294B"/>
                 </a:solidFill>
@@ -11841,317 +12359,7 @@
                 <a:ea typeface="맑은 고딕"/>
                 <a:cs typeface="맑은 고딕"/>
               </a:rPr>
-              <a:t>에이전트</a:t>
-            </a:r>
-          </a:p>
-          <a:p>
-            <a:pPr algn="l">
-              <a:lnSpc>
-                <a:spcPct val="110000"/>
-              </a:lnSpc>
-              <a:spcAft>
-                <a:spcPts val="400"/>
-              </a:spcAft>
-            </a:pPr>
-            <a:r>
-              <a:rPr sz="1400" b="0">
-                <a:solidFill>
-                  <a:srgbClr val="1F2A3A"/>
-                </a:solidFill>
-                <a:latin typeface="맑은 고딕"/>
-                <a:ea typeface="맑은 고딕"/>
-                <a:cs typeface="맑은 고딕"/>
-              </a:rPr>
-              <a:t>지식과 값을 읽어 원인을 가리고 조치를 추천한다</a:t>
-            </a:r>
-          </a:p>
-        </p:txBody>
-      </p:sp>
-      <p:sp>
-        <p:nvSpPr>
-          <p:cNvPr id="16" name="Rounded Rectangle 15"/>
-          <p:cNvSpPr/>
-          <p:nvPr/>
-        </p:nvSpPr>
-        <p:spPr>
-          <a:xfrm>
-            <a:off x="4566818" y="4932934"/>
-            <a:ext cx="822960" cy="292608"/>
-          </a:xfrm>
-          <a:prstGeom prst="roundRect">
-            <a:avLst>
-              <a:gd name="adj" fmla="val 50000"/>
-            </a:avLst>
-          </a:prstGeom>
-          <a:solidFill>
-            <a:srgbClr val="D3D9E1"/>
-          </a:solidFill>
-          <a:ln>
-            <a:noFill/>
-          </a:ln>
-        </p:spPr>
-        <p:txBody>
-          <a:bodyPr rtlCol="0" anchor="ctr"/>
-          <a:lstStyle/>
-          <a:p>
-            <a:pPr algn="ctr"/>
-          </a:p>
-        </p:txBody>
-      </p:sp>
-      <p:sp>
-        <p:nvSpPr>
-          <p:cNvPr id="17" name="TextBox 16"/>
-          <p:cNvSpPr txBox="1"/>
-          <p:nvPr/>
-        </p:nvSpPr>
-        <p:spPr>
-          <a:xfrm>
-            <a:off x="4566818" y="4932934"/>
-            <a:ext cx="822960" cy="292608"/>
-          </a:xfrm>
-          <a:prstGeom prst="rect">
-            <a:avLst/>
-          </a:prstGeom>
-          <a:noFill/>
-        </p:spPr>
-        <p:txBody>
-          <a:bodyPr wrap="square" anchor="ctr"/>
-          <a:lstStyle/>
-          <a:p>
-            <a:pPr algn="ctr">
-              <a:lnSpc>
-                <a:spcPct val="110000"/>
-              </a:lnSpc>
-            </a:pPr>
-            <a:r>
-              <a:rPr sz="1200" b="1">
-                <a:solidFill>
-                  <a:srgbClr val="13294B"/>
-                </a:solidFill>
-                <a:latin typeface="맑은 고딕"/>
-                <a:ea typeface="맑은 고딕"/>
-                <a:cs typeface="맑은 고딕"/>
-              </a:rPr>
-              <a:t>판단</a:t>
-            </a:r>
-          </a:p>
-        </p:txBody>
-      </p:sp>
-      <p:sp>
-        <p:nvSpPr>
-          <p:cNvPr id="18" name="Rounded Rectangle 17"/>
-          <p:cNvSpPr/>
-          <p:nvPr/>
-        </p:nvSpPr>
-        <p:spPr>
-          <a:xfrm>
-            <a:off x="8127796" y="2620010"/>
-            <a:ext cx="3515258" cy="2742692"/>
-          </a:xfrm>
-          <a:prstGeom prst="roundRect">
-            <a:avLst>
-              <a:gd name="adj" fmla="val 4000"/>
-            </a:avLst>
-          </a:prstGeom>
-          <a:solidFill>
-            <a:srgbClr val="FFFFFF"/>
-          </a:solidFill>
-          <a:ln w="28575">
-            <a:solidFill>
-              <a:srgbClr val="5CB8F2"/>
-            </a:solidFill>
-          </a:ln>
-        </p:spPr>
-        <p:txBody>
-          <a:bodyPr rtlCol="0" anchor="ctr"/>
-          <a:lstStyle/>
-          <a:p>
-            <a:pPr algn="ctr"/>
-          </a:p>
-        </p:txBody>
-      </p:sp>
-      <p:sp>
-        <p:nvSpPr>
-          <p:cNvPr id="19" name="Oval 18"/>
-          <p:cNvSpPr/>
-          <p:nvPr/>
-        </p:nvSpPr>
-        <p:spPr>
-          <a:xfrm>
-            <a:off x="8356396" y="2821178"/>
-            <a:ext cx="731520" cy="731520"/>
-          </a:xfrm>
-          <a:prstGeom prst="ellipse">
-            <a:avLst/>
-          </a:prstGeom>
-          <a:solidFill>
-            <a:srgbClr val="5CB8F2"/>
-          </a:solidFill>
-          <a:ln>
-            <a:noFill/>
-          </a:ln>
-        </p:spPr>
-        <p:txBody>
-          <a:bodyPr rtlCol="0" anchor="ctr"/>
-          <a:lstStyle/>
-          <a:p>
-            <a:pPr algn="ctr"/>
-          </a:p>
-        </p:txBody>
-      </p:sp>
-      <p:pic>
-        <p:nvPicPr>
-          <p:cNvPr id="20" name="아이콘:route" descr="route_13294B_1.6.png"/>
-          <p:cNvPicPr>
-            <a:picLocks noChangeAspect="1"/>
-          </p:cNvPicPr>
-          <p:nvPr/>
-        </p:nvPicPr>
-        <p:blipFill>
-          <a:blip r:embed="rId5"/>
-          <a:stretch>
-            <a:fillRect/>
-          </a:stretch>
-        </p:blipFill>
-        <p:spPr>
-          <a:xfrm>
-            <a:off x="8510016" y="2974797"/>
-            <a:ext cx="424281" cy="424281"/>
-          </a:xfrm>
-          <a:prstGeom prst="rect">
-            <a:avLst/>
-          </a:prstGeom>
-        </p:spPr>
-      </p:pic>
-      <p:sp>
-        <p:nvSpPr>
-          <p:cNvPr id="21" name="TextBox 20"/>
-          <p:cNvSpPr txBox="1"/>
-          <p:nvPr/>
-        </p:nvSpPr>
-        <p:spPr>
-          <a:xfrm>
-            <a:off x="8292388" y="3644138"/>
-            <a:ext cx="3186074" cy="1215644"/>
-          </a:xfrm>
-          <a:prstGeom prst="rect">
-            <a:avLst/>
-          </a:prstGeom>
-          <a:noFill/>
-        </p:spPr>
-        <p:txBody>
-          <a:bodyPr wrap="square" anchor="t"/>
-          <a:lstStyle/>
-          <a:p>
-            <a:pPr algn="l">
-              <a:lnSpc>
-                <a:spcPct val="110000"/>
-              </a:lnSpc>
-              <a:spcAft>
-                <a:spcPts val="400"/>
-              </a:spcAft>
-            </a:pPr>
-            <a:r>
-              <a:rPr sz="1800" b="1">
-                <a:solidFill>
-                  <a:srgbClr val="13294B"/>
-                </a:solidFill>
-                <a:latin typeface="맑은 고딕"/>
-                <a:ea typeface="맑은 고딕"/>
-                <a:cs typeface="맑은 고딕"/>
-              </a:rPr>
-              <a:t>프로세스</a:t>
-            </a:r>
-          </a:p>
-          <a:p>
-            <a:pPr algn="l">
-              <a:lnSpc>
-                <a:spcPct val="110000"/>
-              </a:lnSpc>
-              <a:spcAft>
-                <a:spcPts val="400"/>
-              </a:spcAft>
-            </a:pPr>
-            <a:r>
-              <a:rPr sz="1400" b="0">
-                <a:solidFill>
-                  <a:srgbClr val="1F2A3A"/>
-                </a:solidFill>
-                <a:latin typeface="맑은 고딕"/>
-                <a:ea typeface="맑은 고딕"/>
-                <a:cs typeface="맑은 고딕"/>
-              </a:rPr>
-              <a:t>추천을 승인, 명령, 재관측, 기록으로 잇고 진행과 결과를 남긴다</a:t>
-            </a:r>
-          </a:p>
-        </p:txBody>
-      </p:sp>
-      <p:sp>
-        <p:nvSpPr>
-          <p:cNvPr id="22" name="Rounded Rectangle 21"/>
-          <p:cNvSpPr/>
-          <p:nvPr/>
-        </p:nvSpPr>
-        <p:spPr>
-          <a:xfrm>
-            <a:off x="8356396" y="4932934"/>
-            <a:ext cx="1767839" cy="292608"/>
-          </a:xfrm>
-          <a:prstGeom prst="roundRect">
-            <a:avLst>
-              <a:gd name="adj" fmla="val 50000"/>
-            </a:avLst>
-          </a:prstGeom>
-          <a:solidFill>
-            <a:srgbClr val="5CB8F2"/>
-          </a:solidFill>
-          <a:ln>
-            <a:noFill/>
-          </a:ln>
-        </p:spPr>
-        <p:txBody>
-          <a:bodyPr rtlCol="0" anchor="ctr"/>
-          <a:lstStyle/>
-          <a:p>
-            <a:pPr algn="ctr"/>
-          </a:p>
-        </p:txBody>
-      </p:sp>
-      <p:sp>
-        <p:nvSpPr>
-          <p:cNvPr id="23" name="TextBox 22"/>
-          <p:cNvSpPr txBox="1"/>
-          <p:nvPr/>
-        </p:nvSpPr>
-        <p:spPr>
-          <a:xfrm>
-            <a:off x="8356396" y="4932934"/>
-            <a:ext cx="1767839" cy="292608"/>
-          </a:xfrm>
-          <a:prstGeom prst="rect">
-            <a:avLst/>
-          </a:prstGeom>
-          <a:noFill/>
-        </p:spPr>
-        <p:txBody>
-          <a:bodyPr wrap="square" anchor="ctr"/>
-          <a:lstStyle/>
-          <a:p>
-            <a:pPr algn="ctr">
-              <a:lnSpc>
-                <a:spcPct val="110000"/>
-              </a:lnSpc>
-            </a:pPr>
-            <a:r>
-              <a:rPr sz="1200" b="1">
-                <a:solidFill>
-                  <a:srgbClr val="13294B"/>
-                </a:solidFill>
-                <a:latin typeface="맑은 고딕"/>
-                <a:ea typeface="맑은 고딕"/>
-                <a:cs typeface="맑은 고딕"/>
-              </a:rPr>
-              <a:t>순서 · 책임 · 기록</a:t>
+              <a:t>처리 기록과 감사 기록</a:t>
             </a:r>
           </a:p>
         </p:txBody>
@@ -14141,7 +14349,7 @@
                 <a:ea typeface="맑은 고딕"/>
                 <a:cs typeface="맑은 고딕"/>
               </a:rPr>
-              <a:t>프로세스 변수, 단계의 시각, 감사 기록으로 값과 결정이 지나간 길을 따라간다</a:t>
+              <a:t>프로세스 변수, 단계의 시각, 처리 기록과 감사 기록으로 값과 결정이 지나간 길을 따라간다</a:t>
             </a:r>
           </a:p>
         </p:txBody>
@@ -14774,7 +14982,7 @@
                 <a:ea typeface="맑은 고딕"/>
                 <a:cs typeface="맑은 고딕"/>
               </a:rPr>
-              <a:t>이 실습을 마치면 직접 배포한 프로세스로 열린 처리 건 한 건과 그 처리 기록이 남는다.</a:t>
+              <a:t>배포한 프로세스를 쿨러 열화로 실행하면 처리 건 한 건이 열리고, 그 처리 기록에서 대기와 완료를 구분해 읽는다.</a:t>
             </a:r>
           </a:p>
         </p:txBody>
@@ -15210,7 +15418,7 @@
                 <a:ea typeface="맑은 고딕"/>
                 <a:cs typeface="맑은 고딕"/>
               </a:rPr>
-              <a:t>에이전트의 판단 뒤 운전원 승인에서 기다리는 상태를 읽는다</a:t>
+              <a:t>에이전트의 추천안이 나온 뒤 운전원 승인에서 기다리는 상태를 읽는다</a:t>
             </a:r>
           </a:p>
         </p:txBody>
@@ -18508,7 +18716,7 @@
       </p:sp>
       <p:pic>
         <p:nvPicPr>
-          <p:cNvPr id="8" name="아이콘:zoom-check" descr="zoom-check_13294B_1.6.png"/>
+          <p:cNvPr id="8" name="아이콘:rocket" descr="rocket_13294B_1.6.png"/>
           <p:cNvPicPr>
             <a:picLocks noChangeAspect="1"/>
           </p:cNvPicPr>
@@ -18567,7 +18775,7 @@
                 <a:ea typeface="맑은 고딕"/>
                 <a:cs typeface="맑은 고딕"/>
               </a:rPr>
-              <a:t>다시 검사한다</a:t>
+              <a:t>다시 검사해 배포한다</a:t>
             </a:r>
           </a:p>
           <a:p>
@@ -18609,7 +18817,7 @@
                 <a:ea typeface="맑은 고딕"/>
                 <a:cs typeface="맑은 고딕"/>
               </a:rPr>
-              <a:t>사전 검사에</a:t>
+              <a:t>사전 검사에 넣고</a:t>
             </a:r>
           </a:p>
           <a:p>
@@ -18630,7 +18838,7 @@
                 <a:ea typeface="맑은 고딕"/>
                 <a:cs typeface="맑은 고딕"/>
               </a:rPr>
-              <a:t>다시 넣는다</a:t>
+              <a:t>새 판본으로 배포한다</a:t>
             </a:r>
           </a:p>
         </p:txBody>
@@ -18726,7 +18934,7 @@
       </p:sp>
       <p:pic>
         <p:nvPicPr>
-          <p:cNvPr id="13" name="아이콘:rocket" descr="rocket_13294B_1.6.png"/>
+          <p:cNvPr id="13" name="아이콘:circle-check" descr="circle-check_13294B_1.6.png"/>
           <p:cNvPicPr>
             <a:picLocks noChangeAspect="1"/>
           </p:cNvPicPr>
@@ -18785,7 +18993,7 @@
                 <a:ea typeface="맑은 고딕"/>
                 <a:cs typeface="맑은 고딕"/>
               </a:rPr>
-              <a:t>배포한다</a:t>
+              <a:t>승인으로 실행한다</a:t>
             </a:r>
           </a:p>
           <a:p>
@@ -18806,7 +19014,7 @@
                 <a:ea typeface="맑은 고딕"/>
                 <a:cs typeface="맑은 고딕"/>
               </a:rPr>
-              <a:t>새 판본으로</a:t>
+              <a:t>명령과 재관측을 거쳐</a:t>
             </a:r>
           </a:p>
           <a:p>
@@ -18827,7 +19035,7 @@
                 <a:ea typeface="맑은 고딕"/>
                 <a:cs typeface="맑은 고딕"/>
               </a:rPr>
-              <a:t>등록하고</a:t>
+              <a:t>정상으로 끝나는지</a:t>
             </a:r>
           </a:p>
           <a:p>
@@ -18848,7 +19056,7 @@
                 <a:ea typeface="맑은 고딕"/>
                 <a:cs typeface="맑은 고딕"/>
               </a:rPr>
-              <a:t>배포한다</a:t>
+              <a:t>확인한다</a:t>
             </a:r>
           </a:p>
         </p:txBody>
@@ -18944,7 +19152,7 @@
       </p:sp>
       <p:pic>
         <p:nvPicPr>
-          <p:cNvPr id="18" name="아이콘:circle-check" descr="circle-check_13294B_1.6.png"/>
+          <p:cNvPr id="18" name="아이콘:ban" descr="ban_13294B_1.6.png"/>
           <p:cNvPicPr>
             <a:picLocks noChangeAspect="1"/>
           </p:cNvPicPr>
@@ -19003,7 +19211,7 @@
                 <a:ea typeface="맑은 고딕"/>
                 <a:cs typeface="맑은 고딕"/>
               </a:rPr>
-              <a:t>승인으로 실행한다</a:t>
+              <a:t>거절로 실행한다</a:t>
             </a:r>
           </a:p>
           <a:p>
@@ -19024,7 +19232,7 @@
                 <a:ea typeface="맑은 고딕"/>
                 <a:cs typeface="맑은 고딕"/>
               </a:rPr>
-              <a:t>명령과 재관측을 거쳐</a:t>
+              <a:t>설비 명령 없이</a:t>
             </a:r>
           </a:p>
           <a:p>
@@ -19045,7 +19253,7 @@
                 <a:ea typeface="맑은 고딕"/>
                 <a:cs typeface="맑은 고딕"/>
               </a:rPr>
-              <a:t>정상으로 끝나는지</a:t>
+              <a:t>거절 종결에 닿는지</a:t>
             </a:r>
           </a:p>
           <a:p>
@@ -19109,224 +19317,6 @@
         <p:spPr>
           <a:xfrm>
             <a:off x="7435717" y="2626423"/>
-            <a:ext cx="1911644" cy="2729864"/>
-          </a:xfrm>
-          <a:prstGeom prst="roundRect">
-            <a:avLst>
-              <a:gd name="adj" fmla="val 5000"/>
-            </a:avLst>
-          </a:prstGeom>
-          <a:solidFill>
-            <a:srgbClr val="F3F6F9"/>
-          </a:solidFill>
-          <a:ln>
-            <a:noFill/>
-          </a:ln>
-        </p:spPr>
-        <p:txBody>
-          <a:bodyPr rtlCol="0" anchor="ctr"/>
-          <a:lstStyle/>
-          <a:p>
-            <a:pPr algn="ctr"/>
-          </a:p>
-        </p:txBody>
-      </p:sp>
-      <p:sp>
-        <p:nvSpPr>
-          <p:cNvPr id="22" name="Oval 21"/>
-          <p:cNvSpPr/>
-          <p:nvPr/>
-        </p:nvSpPr>
-        <p:spPr>
-          <a:xfrm>
-            <a:off x="8025780" y="2809303"/>
-            <a:ext cx="731520" cy="731520"/>
-          </a:xfrm>
-          <a:prstGeom prst="ellipse">
-            <a:avLst/>
-          </a:prstGeom>
-          <a:solidFill>
-            <a:srgbClr val="FFFFFF"/>
-          </a:solidFill>
-          <a:ln>
-            <a:noFill/>
-          </a:ln>
-        </p:spPr>
-        <p:txBody>
-          <a:bodyPr rtlCol="0" anchor="ctr"/>
-          <a:lstStyle/>
-          <a:p>
-            <a:pPr algn="ctr"/>
-          </a:p>
-        </p:txBody>
-      </p:sp>
-      <p:pic>
-        <p:nvPicPr>
-          <p:cNvPr id="23" name="아이콘:ban" descr="ban_13294B_1.6.png"/>
-          <p:cNvPicPr>
-            <a:picLocks noChangeAspect="1"/>
-          </p:cNvPicPr>
-          <p:nvPr/>
-        </p:nvPicPr>
-        <p:blipFill>
-          <a:blip r:embed="rId6"/>
-          <a:stretch>
-            <a:fillRect/>
-          </a:stretch>
-        </p:blipFill>
-        <p:spPr>
-          <a:xfrm>
-            <a:off x="8179399" y="2962922"/>
-            <a:ext cx="424281" cy="424281"/>
-          </a:xfrm>
-          <a:prstGeom prst="rect">
-            <a:avLst/>
-          </a:prstGeom>
-        </p:spPr>
-      </p:pic>
-      <p:sp>
-        <p:nvSpPr>
-          <p:cNvPr id="24" name="TextBox 23"/>
-          <p:cNvSpPr txBox="1"/>
-          <p:nvPr/>
-        </p:nvSpPr>
-        <p:spPr>
-          <a:xfrm>
-            <a:off x="7508869" y="3613975"/>
-            <a:ext cx="1765340" cy="1669160"/>
-          </a:xfrm>
-          <a:prstGeom prst="rect">
-            <a:avLst/>
-          </a:prstGeom>
-          <a:noFill/>
-        </p:spPr>
-        <p:txBody>
-          <a:bodyPr wrap="square" anchor="t"/>
-          <a:lstStyle/>
-          <a:p>
-            <a:pPr algn="ctr">
-              <a:lnSpc>
-                <a:spcPct val="110000"/>
-              </a:lnSpc>
-              <a:spcAft>
-                <a:spcPts val="400"/>
-              </a:spcAft>
-            </a:pPr>
-            <a:r>
-              <a:rPr sz="1550" b="1">
-                <a:solidFill>
-                  <a:srgbClr val="13294B"/>
-                </a:solidFill>
-                <a:latin typeface="맑은 고딕"/>
-                <a:ea typeface="맑은 고딕"/>
-                <a:cs typeface="맑은 고딕"/>
-              </a:rPr>
-              <a:t>거절로 실행한다</a:t>
-            </a:r>
-          </a:p>
-          <a:p>
-            <a:pPr algn="ctr">
-              <a:lnSpc>
-                <a:spcPct val="110000"/>
-              </a:lnSpc>
-              <a:spcAft>
-                <a:spcPts val="400"/>
-              </a:spcAft>
-            </a:pPr>
-            <a:r>
-              <a:rPr sz="1250" b="0">
-                <a:solidFill>
-                  <a:srgbClr val="1F2A3A"/>
-                </a:solidFill>
-                <a:latin typeface="맑은 고딕"/>
-                <a:ea typeface="맑은 고딕"/>
-                <a:cs typeface="맑은 고딕"/>
-              </a:rPr>
-              <a:t>설비 명령 없이</a:t>
-            </a:r>
-          </a:p>
-          <a:p>
-            <a:pPr algn="ctr">
-              <a:lnSpc>
-                <a:spcPct val="110000"/>
-              </a:lnSpc>
-              <a:spcAft>
-                <a:spcPts val="400"/>
-              </a:spcAft>
-            </a:pPr>
-            <a:r>
-              <a:rPr sz="1250" b="0">
-                <a:solidFill>
-                  <a:srgbClr val="1F2A3A"/>
-                </a:solidFill>
-                <a:latin typeface="맑은 고딕"/>
-                <a:ea typeface="맑은 고딕"/>
-                <a:cs typeface="맑은 고딕"/>
-              </a:rPr>
-              <a:t>거절 종결에 닿는지</a:t>
-            </a:r>
-          </a:p>
-          <a:p>
-            <a:pPr algn="ctr">
-              <a:lnSpc>
-                <a:spcPct val="110000"/>
-              </a:lnSpc>
-              <a:spcAft>
-                <a:spcPts val="400"/>
-              </a:spcAft>
-            </a:pPr>
-            <a:r>
-              <a:rPr sz="1250" b="0">
-                <a:solidFill>
-                  <a:srgbClr val="1F2A3A"/>
-                </a:solidFill>
-                <a:latin typeface="맑은 고딕"/>
-                <a:ea typeface="맑은 고딕"/>
-                <a:cs typeface="맑은 고딕"/>
-              </a:rPr>
-              <a:t>확인한다</a:t>
-            </a:r>
-          </a:p>
-        </p:txBody>
-      </p:sp>
-      <p:sp>
-        <p:nvSpPr>
-          <p:cNvPr id="25" name="Right Arrow 24"/>
-          <p:cNvSpPr/>
-          <p:nvPr/>
-        </p:nvSpPr>
-        <p:spPr>
-          <a:xfrm>
-            <a:off x="9411370" y="3854196"/>
-            <a:ext cx="256031" cy="274320"/>
-          </a:xfrm>
-          <a:prstGeom prst="rightArrow">
-            <a:avLst/>
-          </a:prstGeom>
-          <a:solidFill>
-            <a:srgbClr val="13294B"/>
-          </a:solidFill>
-          <a:ln>
-            <a:noFill/>
-          </a:ln>
-        </p:spPr>
-        <p:txBody>
-          <a:bodyPr rtlCol="0" anchor="ctr"/>
-          <a:lstStyle/>
-          <a:p>
-            <a:pPr algn="ctr"/>
-          </a:p>
-        </p:txBody>
-      </p:sp>
-      <p:sp>
-        <p:nvSpPr>
-          <p:cNvPr id="26" name="Rounded Rectangle 25"/>
-          <p:cNvSpPr/>
-          <p:nvPr/>
-        </p:nvSpPr>
-        <p:spPr>
-          <a:xfrm>
-            <a:off x="9731410" y="2626423"/>
             <a:ext cx="1911644" cy="2729864"/>
           </a:xfrm>
           <a:prstGeom prst="roundRect">
@@ -19353,6 +19343,224 @@
       </p:sp>
       <p:sp>
         <p:nvSpPr>
+          <p:cNvPr id="22" name="Oval 21"/>
+          <p:cNvSpPr/>
+          <p:nvPr/>
+        </p:nvSpPr>
+        <p:spPr>
+          <a:xfrm>
+            <a:off x="8025780" y="2809303"/>
+            <a:ext cx="731520" cy="731520"/>
+          </a:xfrm>
+          <a:prstGeom prst="ellipse">
+            <a:avLst/>
+          </a:prstGeom>
+          <a:solidFill>
+            <a:srgbClr val="5CB8F2"/>
+          </a:solidFill>
+          <a:ln>
+            <a:noFill/>
+          </a:ln>
+        </p:spPr>
+        <p:txBody>
+          <a:bodyPr rtlCol="0" anchor="ctr"/>
+          <a:lstStyle/>
+          <a:p>
+            <a:pPr algn="ctr"/>
+          </a:p>
+        </p:txBody>
+      </p:sp>
+      <p:pic>
+        <p:nvPicPr>
+          <p:cNvPr id="23" name="아이콘:arrow-back-up" descr="arrow-back-up_13294B_1.6.png"/>
+          <p:cNvPicPr>
+            <a:picLocks noChangeAspect="1"/>
+          </p:cNvPicPr>
+          <p:nvPr/>
+        </p:nvPicPr>
+        <p:blipFill>
+          <a:blip r:embed="rId6"/>
+          <a:stretch>
+            <a:fillRect/>
+          </a:stretch>
+        </p:blipFill>
+        <p:spPr>
+          <a:xfrm>
+            <a:off x="8179399" y="2962922"/>
+            <a:ext cx="424281" cy="424281"/>
+          </a:xfrm>
+          <a:prstGeom prst="rect">
+            <a:avLst/>
+          </a:prstGeom>
+        </p:spPr>
+      </p:pic>
+      <p:sp>
+        <p:nvSpPr>
+          <p:cNvPr id="24" name="TextBox 23"/>
+          <p:cNvSpPr txBox="1"/>
+          <p:nvPr/>
+        </p:nvSpPr>
+        <p:spPr>
+          <a:xfrm>
+            <a:off x="7508869" y="3613975"/>
+            <a:ext cx="1765340" cy="1669160"/>
+          </a:xfrm>
+          <a:prstGeom prst="rect">
+            <a:avLst/>
+          </a:prstGeom>
+          <a:noFill/>
+        </p:spPr>
+        <p:txBody>
+          <a:bodyPr wrap="square" anchor="t"/>
+          <a:lstStyle/>
+          <a:p>
+            <a:pPr algn="ctr">
+              <a:lnSpc>
+                <a:spcPct val="110000"/>
+              </a:lnSpc>
+              <a:spcAft>
+                <a:spcPts val="400"/>
+              </a:spcAft>
+            </a:pPr>
+            <a:r>
+              <a:rPr sz="1550" b="1">
+                <a:solidFill>
+                  <a:srgbClr val="13294B"/>
+                </a:solidFill>
+                <a:latin typeface="맑은 고딕"/>
+                <a:ea typeface="맑은 고딕"/>
+                <a:cs typeface="맑은 고딕"/>
+              </a:rPr>
+              <a:t>되돌린다</a:t>
+            </a:r>
+          </a:p>
+          <a:p>
+            <a:pPr algn="ctr">
+              <a:lnSpc>
+                <a:spcPct val="110000"/>
+              </a:lnSpc>
+              <a:spcAft>
+                <a:spcPts val="400"/>
+              </a:spcAft>
+            </a:pPr>
+            <a:r>
+              <a:rPr sz="1250" b="0">
+                <a:solidFill>
+                  <a:srgbClr val="1F2A3A"/>
+                </a:solidFill>
+                <a:latin typeface="맑은 고딕"/>
+                <a:ea typeface="맑은 고딕"/>
+                <a:cs typeface="맑은 고딕"/>
+              </a:rPr>
+              <a:t>경보를 받는 흐름을</a:t>
+            </a:r>
+          </a:p>
+          <a:p>
+            <a:pPr algn="ctr">
+              <a:lnSpc>
+                <a:spcPct val="110000"/>
+              </a:lnSpc>
+              <a:spcAft>
+                <a:spcPts val="400"/>
+              </a:spcAft>
+            </a:pPr>
+            <a:r>
+              <a:rPr sz="1250" b="0">
+                <a:solidFill>
+                  <a:srgbClr val="1F2A3A"/>
+                </a:solidFill>
+                <a:latin typeface="맑은 고딕"/>
+                <a:ea typeface="맑은 고딕"/>
+                <a:cs typeface="맑은 고딕"/>
+              </a:rPr>
+              <a:t>기준 흐름으로</a:t>
+            </a:r>
+          </a:p>
+          <a:p>
+            <a:pPr algn="ctr">
+              <a:lnSpc>
+                <a:spcPct val="110000"/>
+              </a:lnSpc>
+              <a:spcAft>
+                <a:spcPts val="400"/>
+              </a:spcAft>
+            </a:pPr>
+            <a:r>
+              <a:rPr sz="1250" b="0">
+                <a:solidFill>
+                  <a:srgbClr val="1F2A3A"/>
+                </a:solidFill>
+                <a:latin typeface="맑은 고딕"/>
+                <a:ea typeface="맑은 고딕"/>
+                <a:cs typeface="맑은 고딕"/>
+              </a:rPr>
+              <a:t>되돌린다</a:t>
+            </a:r>
+          </a:p>
+        </p:txBody>
+      </p:sp>
+      <p:sp>
+        <p:nvSpPr>
+          <p:cNvPr id="25" name="Right Arrow 24"/>
+          <p:cNvSpPr/>
+          <p:nvPr/>
+        </p:nvSpPr>
+        <p:spPr>
+          <a:xfrm>
+            <a:off x="9411370" y="3854196"/>
+            <a:ext cx="256031" cy="274320"/>
+          </a:xfrm>
+          <a:prstGeom prst="rightArrow">
+            <a:avLst/>
+          </a:prstGeom>
+          <a:solidFill>
+            <a:srgbClr val="13294B"/>
+          </a:solidFill>
+          <a:ln>
+            <a:noFill/>
+          </a:ln>
+        </p:spPr>
+        <p:txBody>
+          <a:bodyPr rtlCol="0" anchor="ctr"/>
+          <a:lstStyle/>
+          <a:p>
+            <a:pPr algn="ctr"/>
+          </a:p>
+        </p:txBody>
+      </p:sp>
+      <p:sp>
+        <p:nvSpPr>
+          <p:cNvPr id="26" name="Rounded Rectangle 25"/>
+          <p:cNvSpPr/>
+          <p:nvPr/>
+        </p:nvSpPr>
+        <p:spPr>
+          <a:xfrm>
+            <a:off x="9731410" y="2626423"/>
+            <a:ext cx="1911644" cy="2729864"/>
+          </a:xfrm>
+          <a:prstGeom prst="roundRect">
+            <a:avLst>
+              <a:gd name="adj" fmla="val 5000"/>
+            </a:avLst>
+          </a:prstGeom>
+          <a:solidFill>
+            <a:srgbClr val="F3F6F9"/>
+          </a:solidFill>
+          <a:ln>
+            <a:noFill/>
+          </a:ln>
+        </p:spPr>
+        <p:txBody>
+          <a:bodyPr rtlCol="0" anchor="ctr"/>
+          <a:lstStyle/>
+          <a:p>
+            <a:pPr algn="ctr"/>
+          </a:p>
+        </p:txBody>
+      </p:sp>
+      <p:sp>
+        <p:nvSpPr>
           <p:cNvPr id="27" name="Oval 26"/>
           <p:cNvSpPr/>
           <p:nvPr/>
@@ -19366,7 +19574,7 @@
             <a:avLst/>
           </a:prstGeom>
           <a:solidFill>
-            <a:srgbClr val="5CB8F2"/>
+            <a:srgbClr val="FFFFFF"/>
           </a:solidFill>
           <a:ln>
             <a:noFill/>
@@ -20416,7 +20624,7 @@
                 <a:ea typeface="맑은 고딕"/>
                 <a:cs typeface="맑은 고딕"/>
               </a:rPr>
-              <a:t>승인과 종결의 기록</a:t>
+              <a:t>시작, 배포, 거부된 승인의 기록</a:t>
             </a:r>
           </a:p>
         </p:txBody>
@@ -26114,7 +26322,7 @@
       </p:sp>
       <p:pic>
         <p:nvPicPr>
-          <p:cNvPr id="6" name="삽화:흐름_토큰_승인대기.svg" descr="illust_8271297440817884204_1791735769.png"/>
+          <p:cNvPr id="6" name="삽화:흐름_토큰_승인대기.svg" descr="illust_8037898141180987650_1791735769.png"/>
           <p:cNvPicPr>
             <a:picLocks noChangeAspect="1"/>
           </p:cNvPicPr>
@@ -27510,7 +27718,7 @@
       </p:sp>
       <p:pic>
         <p:nvPicPr>
-          <p:cNvPr id="6" name="삽화:흐름_토큰_둘.svg" descr="illust_4988906698374443006_1791735769.png"/>
+          <p:cNvPr id="6" name="삽화:흐름_토큰_둘.svg" descr="illust_8649597606866644971_1791735769.png"/>
           <p:cNvPicPr>
             <a:picLocks noChangeAspect="1"/>
           </p:cNvPicPr>

--- a/docs/교재/통합반_오프라인/09회차/통합반_오프라인_09회차.pptx
+++ b/docs/교재/통합반_오프라인/09회차/통합반_오프라인_09회차.pptx
@@ -673,7 +673,7 @@
           <a:lstStyle/>
           <a:p>
             <a:r>
-              <a:t>프로세스를 실행하면 기록이 쌓입니다. 승인된 긴급 대응 처리 건의 단계별 시각입니다. 에이전트의 단계는 15시 22분 46초에 시작해 24분 8초에 끝났고, 곧바로 운전원 승인 단계가 열렸습니다. 이런 기록으로 업무가 어디까지 진행되었고 어디서 기다리고 있는지를 지켜보는 일을 모니터링이라고 합니다. 끝 시각에서 시작 시각을 빼면 그 단계에 걸린 시간이 나옵니다.</a:t>
+              <a:t>프로세스를 실행하면 기록이 쌓입니다. 승인되어 끝난 긴급 대응 처리 건의 단계 기록입니다. 에이전트의 단계부터 결과 보고까지 여섯 단계에 상태와 담당이 적혀 있고, 단계마다 그 단계가 열린 시각과 끝난 시각이 함께 남습니다. 이런 기록으로 업무가 어디까지 진행되었고 어디서 기다리고 있는지를 지켜보는 일을 모니터링이라고 합니다. 끝난 시각에서 열린 시각을 빼면 그 단계에 걸린 시간이 나옵니다.</a:t>
             </a:r>
           </a:p>
         </p:txBody>
@@ -9304,22 +9304,33 @@
                 <a:solidFill>
                   <a:srgbClr val="E8EEF6"/>
                 </a:solidFill>
-                <a:latin typeface="맑은 고딕"/>
-                <a:ea typeface="맑은 고딕"/>
-                <a:cs typeface="맑은 고딕"/>
-              </a:rPr>
-              <a:t>단계</a:t>
+                <a:latin typeface="Consolas"/>
+                <a:ea typeface="맑은 고딕"/>
+                <a:cs typeface="맑은 고딕"/>
+              </a:rPr>
+              <a:t># </a:t>
             </a:r>
             <a:r>
               <a:rPr sz="1300" b="0">
                 <a:solidFill>
                   <a:srgbClr val="E8EEF6"/>
                 </a:solidFill>
+                <a:latin typeface="맑은 고딕"/>
+                <a:ea typeface="맑은 고딕"/>
+                <a:cs typeface="맑은 고딕"/>
+              </a:rPr>
+              <a:t>처리</a:t>
+            </a:r>
+            <a:r>
+              <a:rPr sz="1300" b="0">
+                <a:solidFill>
+                  <a:srgbClr val="E8EEF6"/>
+                </a:solidFill>
                 <a:latin typeface="Consolas"/>
                 <a:ea typeface="맑은 고딕"/>
                 <a:cs typeface="맑은 고딕"/>
               </a:rPr>
-              <a:t>          </a:t>
+              <a:t> </a:t>
             </a:r>
             <a:r>
               <a:rPr sz="1300" b="0">
@@ -9330,7 +9341,7 @@
                 <a:ea typeface="맑은 고딕"/>
                 <a:cs typeface="맑은 고딕"/>
               </a:rPr>
-              <a:t>시작</a:t>
+              <a:t>건</a:t>
             </a:r>
             <a:r>
               <a:rPr sz="1300" b="0">
@@ -9341,7 +9352,7 @@
                 <a:ea typeface="맑은 고딕"/>
                 <a:cs typeface="맑은 고딕"/>
               </a:rPr>
-              <a:t>        </a:t>
+              <a:t> c3_cooling.32aca7de-</a:t>
             </a:r>
             <a:r>
               <a:rPr sz="1300" b="0">
@@ -9352,7 +9363,18 @@
                 <a:ea typeface="맑은 고딕"/>
                 <a:cs typeface="맑은 고딕"/>
               </a:rPr>
-              <a:t>끝</a:t>
+              <a:t>…</a:t>
+            </a:r>
+            <a:r>
+              <a:rPr sz="1300" b="0">
+                <a:solidFill>
+                  <a:srgbClr val="E8EEF6"/>
+                </a:solidFill>
+                <a:latin typeface="Consolas"/>
+                <a:ea typeface="맑은 고딕"/>
+                <a:cs typeface="맑은 고딕"/>
+              </a:rPr>
+              <a:t>  COMPLETED</a:t>
             </a:r>
           </a:p>
           <a:p>
@@ -9373,7 +9395,106 @@
                 <a:ea typeface="맑은 고딕"/>
                 <a:cs typeface="맑은 고딕"/>
               </a:rPr>
-              <a:t>T_agent     15:22:46    15:24:08</a:t>
+              <a:t># </a:t>
+            </a:r>
+            <a:r>
+              <a:rPr sz="1300" b="0">
+                <a:solidFill>
+                  <a:srgbClr val="E8EEF6"/>
+                </a:solidFill>
+                <a:latin typeface="맑은 고딕"/>
+                <a:ea typeface="맑은 고딕"/>
+                <a:cs typeface="맑은 고딕"/>
+              </a:rPr>
+              <a:t>단계</a:t>
+            </a:r>
+            <a:r>
+              <a:rPr sz="1300" b="0">
+                <a:solidFill>
+                  <a:srgbClr val="E8EEF6"/>
+                </a:solidFill>
+                <a:latin typeface="Consolas"/>
+                <a:ea typeface="맑은 고딕"/>
+                <a:cs typeface="맑은 고딕"/>
+              </a:rPr>
+              <a:t> </a:t>
+            </a:r>
+            <a:r>
+              <a:rPr sz="1300" b="0">
+                <a:solidFill>
+                  <a:srgbClr val="E8EEF6"/>
+                </a:solidFill>
+                <a:latin typeface="맑은 고딕"/>
+                <a:ea typeface="맑은 고딕"/>
+                <a:cs typeface="맑은 고딕"/>
+              </a:rPr>
+              <a:t>·</a:t>
+            </a:r>
+            <a:r>
+              <a:rPr sz="1300" b="0">
+                <a:solidFill>
+                  <a:srgbClr val="E8EEF6"/>
+                </a:solidFill>
+                <a:latin typeface="Consolas"/>
+                <a:ea typeface="맑은 고딕"/>
+                <a:cs typeface="맑은 고딕"/>
+              </a:rPr>
+              <a:t> </a:t>
+            </a:r>
+            <a:r>
+              <a:rPr sz="1300" b="0">
+                <a:solidFill>
+                  <a:srgbClr val="E8EEF6"/>
+                </a:solidFill>
+                <a:latin typeface="맑은 고딕"/>
+                <a:ea typeface="맑은 고딕"/>
+                <a:cs typeface="맑은 고딕"/>
+              </a:rPr>
+              <a:t>상태</a:t>
+            </a:r>
+            <a:r>
+              <a:rPr sz="1300" b="0">
+                <a:solidFill>
+                  <a:srgbClr val="E8EEF6"/>
+                </a:solidFill>
+                <a:latin typeface="Consolas"/>
+                <a:ea typeface="맑은 고딕"/>
+                <a:cs typeface="맑은 고딕"/>
+              </a:rPr>
+              <a:t> </a:t>
+            </a:r>
+            <a:r>
+              <a:rPr sz="1300" b="0">
+                <a:solidFill>
+                  <a:srgbClr val="E8EEF6"/>
+                </a:solidFill>
+                <a:latin typeface="맑은 고딕"/>
+                <a:ea typeface="맑은 고딕"/>
+                <a:cs typeface="맑은 고딕"/>
+              </a:rPr>
+              <a:t>·</a:t>
+            </a:r>
+            <a:r>
+              <a:rPr sz="1300" b="0">
+                <a:solidFill>
+                  <a:srgbClr val="E8EEF6"/>
+                </a:solidFill>
+                <a:latin typeface="Consolas"/>
+                <a:ea typeface="맑은 고딕"/>
+                <a:cs typeface="맑은 고딕"/>
+              </a:rPr>
+              <a:t> </a:t>
+            </a:r>
+            <a:r>
+              <a:rPr sz="1300" b="0">
+                <a:solidFill>
+                  <a:srgbClr val="E8EEF6"/>
+                </a:solidFill>
+                <a:latin typeface="맑은 고딕"/>
+                <a:ea typeface="맑은 고딕"/>
+                <a:cs typeface="맑은 고딕"/>
+              </a:rPr>
+              <a:t>담당</a:t>
             </a:r>
           </a:p>
           <a:p>
@@ -9394,7 +9515,18 @@
                 <a:ea typeface="맑은 고딕"/>
                 <a:cs typeface="맑은 고딕"/>
               </a:rPr>
-              <a:t>T_approve   15:24:08    15:24:09</a:t>
+              <a:t>T_agent     DONE   </a:t>
+            </a:r>
+            <a:r>
+              <a:rPr sz="1300" b="0">
+                <a:solidFill>
+                  <a:srgbClr val="E8EEF6"/>
+                </a:solidFill>
+                <a:latin typeface="맑은 고딕"/>
+                <a:ea typeface="맑은 고딕"/>
+                <a:cs typeface="맑은 고딕"/>
+              </a:rPr>
+              <a:t>에이전트</a:t>
             </a:r>
           </a:p>
           <a:p>
@@ -9415,7 +9547,18 @@
                 <a:ea typeface="맑은 고딕"/>
                 <a:cs typeface="맑은 고딕"/>
               </a:rPr>
-              <a:t>T_cmd       15:24:09    15:24:10</a:t>
+              <a:t>T_approve   DONE   </a:t>
+            </a:r>
+            <a:r>
+              <a:rPr sz="1300" b="0">
+                <a:solidFill>
+                  <a:srgbClr val="E8EEF6"/>
+                </a:solidFill>
+                <a:latin typeface="맑은 고딕"/>
+                <a:ea typeface="맑은 고딕"/>
+                <a:cs typeface="맑은 고딕"/>
+              </a:rPr>
+              <a:t>운전원</a:t>
             </a:r>
           </a:p>
           <a:p>
@@ -9436,7 +9579,18 @@
                 <a:ea typeface="맑은 고딕"/>
                 <a:cs typeface="맑은 고딕"/>
               </a:rPr>
-              <a:t>T_reobs     15:24:10    15:25:11</a:t>
+              <a:t>T_cmd       DONE   </a:t>
+            </a:r>
+            <a:r>
+              <a:rPr sz="1300" b="0">
+                <a:solidFill>
+                  <a:srgbClr val="E8EEF6"/>
+                </a:solidFill>
+                <a:latin typeface="맑은 고딕"/>
+                <a:ea typeface="맑은 고딕"/>
+                <a:cs typeface="맑은 고딕"/>
+              </a:rPr>
+              <a:t>시스템</a:t>
             </a:r>
           </a:p>
           <a:p>
@@ -9457,7 +9611,18 @@
                 <a:ea typeface="맑은 고딕"/>
                 <a:cs typeface="맑은 고딕"/>
               </a:rPr>
-              <a:t>T_wo        15:25:11    15:25:12</a:t>
+              <a:t>T_reobs     DONE   </a:t>
+            </a:r>
+            <a:r>
+              <a:rPr sz="1300" b="0">
+                <a:solidFill>
+                  <a:srgbClr val="E8EEF6"/>
+                </a:solidFill>
+                <a:latin typeface="맑은 고딕"/>
+                <a:ea typeface="맑은 고딕"/>
+                <a:cs typeface="맑은 고딕"/>
+              </a:rPr>
+              <a:t>시스템</a:t>
             </a:r>
           </a:p>
           <a:p>
@@ -9478,7 +9643,310 @@
                 <a:ea typeface="맑은 고딕"/>
                 <a:cs typeface="맑은 고딕"/>
               </a:rPr>
-              <a:t>R_ok        15:25:12    15:25:12</a:t>
+              <a:t>T_wo        DONE   </a:t>
+            </a:r>
+            <a:r>
+              <a:rPr sz="1300" b="0">
+                <a:solidFill>
+                  <a:srgbClr val="E8EEF6"/>
+                </a:solidFill>
+                <a:latin typeface="맑은 고딕"/>
+                <a:ea typeface="맑은 고딕"/>
+                <a:cs typeface="맑은 고딕"/>
+              </a:rPr>
+              <a:t>시스템</a:t>
+            </a:r>
+          </a:p>
+          <a:p>
+            <a:pPr algn="l">
+              <a:lnSpc>
+                <a:spcPct val="110000"/>
+              </a:lnSpc>
+              <a:spcAft>
+                <a:spcPts val="200"/>
+              </a:spcAft>
+            </a:pPr>
+            <a:r>
+              <a:rPr sz="1300" b="0">
+                <a:solidFill>
+                  <a:srgbClr val="E8EEF6"/>
+                </a:solidFill>
+                <a:latin typeface="Consolas"/>
+                <a:ea typeface="맑은 고딕"/>
+                <a:cs typeface="맑은 고딕"/>
+              </a:rPr>
+              <a:t>R_ok        DONE   </a:t>
+            </a:r>
+            <a:r>
+              <a:rPr sz="1300" b="0">
+                <a:solidFill>
+                  <a:srgbClr val="E8EEF6"/>
+                </a:solidFill>
+                <a:latin typeface="맑은 고딕"/>
+                <a:ea typeface="맑은 고딕"/>
+                <a:cs typeface="맑은 고딕"/>
+              </a:rPr>
+              <a:t>시스템</a:t>
+            </a:r>
+          </a:p>
+          <a:p>
+            <a:pPr algn="l">
+              <a:lnSpc>
+                <a:spcPct val="110000"/>
+              </a:lnSpc>
+              <a:spcAft>
+                <a:spcPts val="200"/>
+              </a:spcAft>
+            </a:pPr>
+          </a:p>
+          <a:p>
+            <a:pPr algn="l">
+              <a:lnSpc>
+                <a:spcPct val="110000"/>
+              </a:lnSpc>
+              <a:spcAft>
+                <a:spcPts val="200"/>
+              </a:spcAft>
+            </a:pPr>
+            <a:r>
+              <a:rPr sz="1300" b="0">
+                <a:solidFill>
+                  <a:srgbClr val="E8EEF6"/>
+                </a:solidFill>
+                <a:latin typeface="Consolas"/>
+                <a:ea typeface="맑은 고딕"/>
+                <a:cs typeface="맑은 고딕"/>
+              </a:rPr>
+              <a:t># </a:t>
+            </a:r>
+            <a:r>
+              <a:rPr sz="1300" b="0">
+                <a:solidFill>
+                  <a:srgbClr val="E8EEF6"/>
+                </a:solidFill>
+                <a:latin typeface="맑은 고딕"/>
+                <a:ea typeface="맑은 고딕"/>
+                <a:cs typeface="맑은 고딕"/>
+              </a:rPr>
+              <a:t>단계마다</a:t>
+            </a:r>
+            <a:r>
+              <a:rPr sz="1300" b="0">
+                <a:solidFill>
+                  <a:srgbClr val="E8EEF6"/>
+                </a:solidFill>
+                <a:latin typeface="Consolas"/>
+                <a:ea typeface="맑은 고딕"/>
+                <a:cs typeface="맑은 고딕"/>
+              </a:rPr>
+              <a:t> </a:t>
+            </a:r>
+            <a:r>
+              <a:rPr sz="1300" b="0">
+                <a:solidFill>
+                  <a:srgbClr val="E8EEF6"/>
+                </a:solidFill>
+                <a:latin typeface="맑은 고딕"/>
+                <a:ea typeface="맑은 고딕"/>
+                <a:cs typeface="맑은 고딕"/>
+              </a:rPr>
+              <a:t>함께</a:t>
+            </a:r>
+            <a:r>
+              <a:rPr sz="1300" b="0">
+                <a:solidFill>
+                  <a:srgbClr val="E8EEF6"/>
+                </a:solidFill>
+                <a:latin typeface="Consolas"/>
+                <a:ea typeface="맑은 고딕"/>
+                <a:cs typeface="맑은 고딕"/>
+              </a:rPr>
+              <a:t> </a:t>
+            </a:r>
+            <a:r>
+              <a:rPr sz="1300" b="0">
+                <a:solidFill>
+                  <a:srgbClr val="E8EEF6"/>
+                </a:solidFill>
+                <a:latin typeface="맑은 고딕"/>
+                <a:ea typeface="맑은 고딕"/>
+                <a:cs typeface="맑은 고딕"/>
+              </a:rPr>
+              <a:t>남는</a:t>
+            </a:r>
+            <a:r>
+              <a:rPr sz="1300" b="0">
+                <a:solidFill>
+                  <a:srgbClr val="E8EEF6"/>
+                </a:solidFill>
+                <a:latin typeface="Consolas"/>
+                <a:ea typeface="맑은 고딕"/>
+                <a:cs typeface="맑은 고딕"/>
+              </a:rPr>
+              <a:t> </a:t>
+            </a:r>
+            <a:r>
+              <a:rPr sz="1300" b="0">
+                <a:solidFill>
+                  <a:srgbClr val="E8EEF6"/>
+                </a:solidFill>
+                <a:latin typeface="맑은 고딕"/>
+                <a:ea typeface="맑은 고딕"/>
+                <a:cs typeface="맑은 고딕"/>
+              </a:rPr>
+              <a:t>것</a:t>
+            </a:r>
+          </a:p>
+          <a:p>
+            <a:pPr algn="l">
+              <a:lnSpc>
+                <a:spcPct val="110000"/>
+              </a:lnSpc>
+              <a:spcAft>
+                <a:spcPts val="200"/>
+              </a:spcAft>
+            </a:pPr>
+            <a:r>
+              <a:rPr sz="1300" b="0">
+                <a:solidFill>
+                  <a:srgbClr val="E8EEF6"/>
+                </a:solidFill>
+                <a:latin typeface="Consolas"/>
+                <a:ea typeface="맑은 고딕"/>
+                <a:cs typeface="맑은 고딕"/>
+              </a:rPr>
+              <a:t>start       </a:t>
+            </a:r>
+            <a:r>
+              <a:rPr sz="1300" b="0">
+                <a:solidFill>
+                  <a:srgbClr val="E8EEF6"/>
+                </a:solidFill>
+                <a:latin typeface="맑은 고딕"/>
+                <a:ea typeface="맑은 고딕"/>
+                <a:cs typeface="맑은 고딕"/>
+              </a:rPr>
+              <a:t>단계가</a:t>
+            </a:r>
+            <a:r>
+              <a:rPr sz="1300" b="0">
+                <a:solidFill>
+                  <a:srgbClr val="E8EEF6"/>
+                </a:solidFill>
+                <a:latin typeface="Consolas"/>
+                <a:ea typeface="맑은 고딕"/>
+                <a:cs typeface="맑은 고딕"/>
+              </a:rPr>
+              <a:t> </a:t>
+            </a:r>
+            <a:r>
+              <a:rPr sz="1300" b="0">
+                <a:solidFill>
+                  <a:srgbClr val="E8EEF6"/>
+                </a:solidFill>
+                <a:latin typeface="맑은 고딕"/>
+                <a:ea typeface="맑은 고딕"/>
+                <a:cs typeface="맑은 고딕"/>
+              </a:rPr>
+              <a:t>열린</a:t>
+            </a:r>
+            <a:r>
+              <a:rPr sz="1300" b="0">
+                <a:solidFill>
+                  <a:srgbClr val="E8EEF6"/>
+                </a:solidFill>
+                <a:latin typeface="Consolas"/>
+                <a:ea typeface="맑은 고딕"/>
+                <a:cs typeface="맑은 고딕"/>
+              </a:rPr>
+              <a:t> </a:t>
+            </a:r>
+            <a:r>
+              <a:rPr sz="1300" b="0">
+                <a:solidFill>
+                  <a:srgbClr val="E8EEF6"/>
+                </a:solidFill>
+                <a:latin typeface="맑은 고딕"/>
+                <a:ea typeface="맑은 고딕"/>
+                <a:cs typeface="맑은 고딕"/>
+              </a:rPr>
+              <a:t>시각</a:t>
+            </a:r>
+          </a:p>
+          <a:p>
+            <a:pPr algn="l">
+              <a:lnSpc>
+                <a:spcPct val="110000"/>
+              </a:lnSpc>
+              <a:spcAft>
+                <a:spcPts val="200"/>
+              </a:spcAft>
+            </a:pPr>
+            <a:r>
+              <a:rPr sz="1300" b="0">
+                <a:solidFill>
+                  <a:srgbClr val="E8EEF6"/>
+                </a:solidFill>
+                <a:latin typeface="Consolas"/>
+                <a:ea typeface="맑은 고딕"/>
+                <a:cs typeface="맑은 고딕"/>
+              </a:rPr>
+              <a:t>end         </a:t>
+            </a:r>
+            <a:r>
+              <a:rPr sz="1300" b="0">
+                <a:solidFill>
+                  <a:srgbClr val="E8EEF6"/>
+                </a:solidFill>
+                <a:latin typeface="맑은 고딕"/>
+                <a:ea typeface="맑은 고딕"/>
+                <a:cs typeface="맑은 고딕"/>
+              </a:rPr>
+              <a:t>단계가</a:t>
+            </a:r>
+            <a:r>
+              <a:rPr sz="1300" b="0">
+                <a:solidFill>
+                  <a:srgbClr val="E8EEF6"/>
+                </a:solidFill>
+                <a:latin typeface="Consolas"/>
+                <a:ea typeface="맑은 고딕"/>
+                <a:cs typeface="맑은 고딕"/>
+              </a:rPr>
+              <a:t> </a:t>
+            </a:r>
+            <a:r>
+              <a:rPr sz="1300" b="0">
+                <a:solidFill>
+                  <a:srgbClr val="E8EEF6"/>
+                </a:solidFill>
+                <a:latin typeface="맑은 고딕"/>
+                <a:ea typeface="맑은 고딕"/>
+                <a:cs typeface="맑은 고딕"/>
+              </a:rPr>
+              <a:t>끝난</a:t>
+            </a:r>
+            <a:r>
+              <a:rPr sz="1300" b="0">
+                <a:solidFill>
+                  <a:srgbClr val="E8EEF6"/>
+                </a:solidFill>
+                <a:latin typeface="Consolas"/>
+                <a:ea typeface="맑은 고딕"/>
+                <a:cs typeface="맑은 고딕"/>
+              </a:rPr>
+              <a:t> </a:t>
+            </a:r>
+            <a:r>
+              <a:rPr sz="1300" b="0">
+                <a:solidFill>
+                  <a:srgbClr val="E8EEF6"/>
+                </a:solidFill>
+                <a:latin typeface="맑은 고딕"/>
+                <a:ea typeface="맑은 고딕"/>
+                <a:cs typeface="맑은 고딕"/>
+              </a:rPr>
+              <a:t>시각</a:t>
             </a:r>
           </a:p>
         </p:txBody>
@@ -9688,7 +10156,7 @@
                 <a:ea typeface="맑은 고딕"/>
                 <a:cs typeface="맑은 고딕"/>
               </a:rPr>
-              <a:t>읽는 법</a:t>
+              <a:t>걸린 시간</a:t>
             </a:r>
           </a:p>
           <a:p>
@@ -9709,7 +10177,7 @@
                 <a:ea typeface="맑은 고딕"/>
                 <a:cs typeface="맑은 고딕"/>
               </a:rPr>
-              <a:t>끝에서 시작을 빼면</a:t>
+              <a:t>끝 시각에서 시작 시각을</a:t>
             </a:r>
           </a:p>
           <a:p>
@@ -9730,7 +10198,7 @@
                 <a:ea typeface="맑은 고딕"/>
                 <a:cs typeface="맑은 고딕"/>
               </a:rPr>
-              <a:t>단계에 걸린 시간이다.</a:t>
+              <a:t>뺀 값이다.</a:t>
             </a:r>
           </a:p>
         </p:txBody>
@@ -11117,7 +11585,7 @@
       </p:sp>
       <p:pic>
         <p:nvPicPr>
-          <p:cNvPr id="6" name="삽화:사건선_전체.svg" descr="illust_4338746720933726929_1791770778.png"/>
+          <p:cNvPr id="6" name="삽화:사건선_전체.svg" descr="illust_1219940487120723720_1791770778.png"/>
           <p:cNvPicPr>
             <a:picLocks noChangeAspect="1"/>
           </p:cNvPicPr>
@@ -11859,7 +12327,7 @@
       </p:sp>
       <p:pic>
         <p:nvPicPr>
-          <p:cNvPr id="6" name="삽화:세영역.svg" descr="illust_2875965704278617918_1791770778.png"/>
+          <p:cNvPr id="6" name="삽화:세영역.svg" descr="illust_3280420384322995887_1791770778.png"/>
           <p:cNvPicPr>
             <a:picLocks noChangeAspect="1"/>
           </p:cNvPicPr>
@@ -20796,7 +21264,7 @@
                 <a:ea typeface="맑은 고딕"/>
                 <a:cs typeface="맑은 고딕"/>
               </a:rPr>
-              <a:t>배운 내용을 바탕으로 정답을 맞춰보세요.</a:t>
+              <a:t>배운 내용을 바탕으로 정답을 맞혀 보세요.</a:t>
             </a:r>
           </a:p>
         </p:txBody>
@@ -26322,7 +26790,7 @@
       </p:sp>
       <p:pic>
         <p:nvPicPr>
-          <p:cNvPr id="6" name="삽화:흐름_토큰_승인대기.svg" descr="illust_8037898141180987650_1791735769.png"/>
+          <p:cNvPr id="6" name="삽화:흐름_토큰_승인대기.svg" descr="illust_574138981494361396_1791735769.png"/>
           <p:cNvPicPr>
             <a:picLocks noChangeAspect="1"/>
           </p:cNvPicPr>
@@ -27718,7 +28186,7 @@
       </p:sp>
       <p:pic>
         <p:nvPicPr>
-          <p:cNvPr id="6" name="삽화:흐름_토큰_둘.svg" descr="illust_8649597606866644971_1791735769.png"/>
+          <p:cNvPr id="6" name="삽화:흐름_토큰_둘.svg" descr="illust_8288659037348385648_1791735769.png"/>
           <p:cNvPicPr>
             <a:picLocks noChangeAspect="1"/>
           </p:cNvPicPr>
